--- a/Recommender_Systems_Project.pptx
+++ b/Recommender_Systems_Project.pptx
@@ -1925,7 +1925,7 @@
     <p:bg>
       <p:bgPr>
         <a:solidFill>
-          <a:srgbClr val="1E2761"/>
+          <a:srgbClr val="1C2A3A"/>
         </a:solidFill>
       </p:bgPr>
     </p:bg>
@@ -1945,54 +1945,14 @@
       </p:grpSpPr>
       <p:sp>
         <p:nvSpPr>
-          <p:cNvPr id="2" name="Shape 0"/>
-          <p:cNvSpPr/>
-          <p:nvPr/>
-        </p:nvSpPr>
-        <p:spPr>
-          <a:xfrm>
-            <a:off x="8595360" y="-2011680"/>
-            <a:ext cx="5943600" cy="5943600"/>
-          </a:xfrm>
-          <a:prstGeom prst="ellipse">
-            <a:avLst/>
-          </a:prstGeom>
-          <a:solidFill>
-            <a:srgbClr val="21294D"/>
-          </a:solidFill>
-          <a:ln/>
-        </p:spPr>
-      </p:sp>
-      <p:sp>
-        <p:nvSpPr>
-          <p:cNvPr id="3" name="Shape 1"/>
-          <p:cNvSpPr/>
-          <p:nvPr/>
-        </p:nvSpPr>
-        <p:spPr>
-          <a:xfrm>
-            <a:off x="10058400" y="3291840"/>
-            <a:ext cx="4206240" cy="4206240"/>
-          </a:xfrm>
-          <a:prstGeom prst="ellipse">
-            <a:avLst/>
-          </a:prstGeom>
-          <a:solidFill>
-            <a:srgbClr val="2A356B"/>
-          </a:solidFill>
-          <a:ln/>
-        </p:spPr>
-      </p:sp>
-      <p:sp>
-        <p:nvSpPr>
-          <p:cNvPr id="4" name="Text 2"/>
-          <p:cNvSpPr/>
-          <p:nvPr/>
-        </p:nvSpPr>
-        <p:spPr>
-          <a:xfrm>
-            <a:off x="640080" y="1965960"/>
-            <a:ext cx="8686800" cy="457200"/>
+          <p:cNvPr id="2" name="Text 0"/>
+          <p:cNvSpPr/>
+          <p:nvPr/>
+        </p:nvSpPr>
+        <p:spPr>
+          <a:xfrm>
+            <a:off x="822960" y="1828800"/>
+            <a:ext cx="10058400" cy="365760"/>
           </a:xfrm>
           <a:prstGeom prst="rect">
             <a:avLst/>
@@ -2008,30 +1968,30 @@
               <a:buNone/>
             </a:pPr>
             <a:r>
-              <a:rPr lang="en-US" sz="1600" spc="400" kern="0" dirty="0">
-                <a:solidFill>
-                  <a:srgbClr val="CADCFC"/>
+              <a:rPr lang="en-US" sz="1300" spc="300" kern="0" dirty="0">
+                <a:solidFill>
+                  <a:srgbClr val="CDD6E0"/>
                 </a:solidFill>
                 <a:latin typeface="Calibri" pitchFamily="34" charset="0"/>
                 <a:ea typeface="Calibri" pitchFamily="34" charset="-122"/>
                 <a:cs typeface="Calibri" pitchFamily="34" charset="-120"/>
               </a:rPr>
-              <a:t>RECOMMENDER SYSTEMS</a:t>
-            </a:r>
-            <a:endParaRPr lang="en-US" sz="1600" dirty="0"/>
-          </a:p>
-        </p:txBody>
-      </p:sp>
-      <p:sp>
-        <p:nvSpPr>
-          <p:cNvPr id="5" name="Text 3"/>
-          <p:cNvSpPr/>
-          <p:nvPr/>
-        </p:nvSpPr>
-        <p:spPr>
-          <a:xfrm>
-            <a:off x="640080" y="2423160"/>
-            <a:ext cx="9326880" cy="1463040"/>
+              <a:t>RECOMMENDER SYSTEMS  ·  INDIVIDUAL PROJECT</a:t>
+            </a:r>
+            <a:endParaRPr lang="en-US" sz="1300" dirty="0"/>
+          </a:p>
+        </p:txBody>
+      </p:sp>
+      <p:sp>
+        <p:nvSpPr>
+          <p:cNvPr id="3" name="Text 1"/>
+          <p:cNvSpPr/>
+          <p:nvPr/>
+        </p:nvSpPr>
+        <p:spPr>
+          <a:xfrm>
+            <a:off x="822960" y="2331720"/>
+            <a:ext cx="10241280" cy="914400"/>
           </a:xfrm>
           <a:prstGeom prst="rect">
             <a:avLst/>
@@ -2047,7 +2007,7 @@
               <a:buNone/>
             </a:pPr>
             <a:r>
-              <a:rPr lang="en-US" sz="4200" b="1" dirty="0">
+              <a:rPr lang="en-US" sz="4000" b="1" dirty="0">
                 <a:solidFill>
                   <a:srgbClr val="FFFFFF"/>
                 </a:solidFill>
@@ -2055,22 +2015,22 @@
                 <a:ea typeface="Cambria" pitchFamily="34" charset="-122"/>
                 <a:cs typeface="Cambria" pitchFamily="34" charset="-120"/>
               </a:rPr>
-              <a:t>Building a Movie Recommender Prototype</a:t>
-            </a:r>
-            <a:endParaRPr lang="en-US" sz="4200" dirty="0"/>
-          </a:p>
-        </p:txBody>
-      </p:sp>
-      <p:sp>
-        <p:nvSpPr>
-          <p:cNvPr id="6" name="Text 4"/>
-          <p:cNvSpPr/>
-          <p:nvPr/>
-        </p:nvSpPr>
-        <p:spPr>
-          <a:xfrm>
-            <a:off x="640080" y="3886200"/>
-            <a:ext cx="9144000" cy="457200"/>
+              <a:t>A Movie Recommender Prototype</a:t>
+            </a:r>
+            <a:endParaRPr lang="en-US" sz="4000" dirty="0"/>
+          </a:p>
+        </p:txBody>
+      </p:sp>
+      <p:sp>
+        <p:nvSpPr>
+          <p:cNvPr id="4" name="Text 2"/>
+          <p:cNvSpPr/>
+          <p:nvPr/>
+        </p:nvSpPr>
+        <p:spPr>
+          <a:xfrm>
+            <a:off x="822960" y="3383280"/>
+            <a:ext cx="9601200" cy="457200"/>
           </a:xfrm>
           <a:prstGeom prst="rect">
             <a:avLst/>
@@ -2086,30 +2046,53 @@
               <a:buNone/>
             </a:pPr>
             <a:r>
-              <a:rPr lang="en-US" sz="1600" dirty="0">
-                <a:solidFill>
-                  <a:srgbClr val="CADCFC"/>
+              <a:rPr lang="en-US" sz="1500" dirty="0">
+                <a:solidFill>
+                  <a:srgbClr val="CDD6E0"/>
                 </a:solidFill>
                 <a:latin typeface="Calibri" pitchFamily="34" charset="0"/>
                 <a:ea typeface="Calibri" pitchFamily="34" charset="-122"/>
                 <a:cs typeface="Calibri" pitchFamily="34" charset="-120"/>
               </a:rPr>
-              <a:t>Individual Project · From baselines to matrix factorization on MovieLens 32M</a:t>
-            </a:r>
-            <a:endParaRPr lang="en-US" sz="1600" dirty="0"/>
-          </a:p>
-        </p:txBody>
-      </p:sp>
-      <p:sp>
-        <p:nvSpPr>
-          <p:cNvPr id="7" name="Text 5"/>
-          <p:cNvSpPr/>
-          <p:nvPr/>
-        </p:nvSpPr>
-        <p:spPr>
-          <a:xfrm>
-            <a:off x="640080" y="5669280"/>
-            <a:ext cx="9144000" cy="365760"/>
+              <a:t>From non-personalized baselines to matrix factorization on MovieLens 32M</a:t>
+            </a:r>
+            <a:endParaRPr lang="en-US" sz="1500" dirty="0"/>
+          </a:p>
+        </p:txBody>
+      </p:sp>
+      <p:sp>
+        <p:nvSpPr>
+          <p:cNvPr id="5" name="Shape 3"/>
+          <p:cNvSpPr/>
+          <p:nvPr/>
+        </p:nvSpPr>
+        <p:spPr>
+          <a:xfrm>
+            <a:off x="841248" y="5486400"/>
+            <a:ext cx="2926080" cy="0"/>
+          </a:xfrm>
+          <a:prstGeom prst="line">
+            <a:avLst/>
+          </a:prstGeom>
+          <a:noFill/>
+          <a:ln w="19050">
+            <a:solidFill>
+              <a:srgbClr val="33617E"/>
+            </a:solidFill>
+            <a:prstDash val="solid"/>
+          </a:ln>
+        </p:spPr>
+      </p:sp>
+      <p:sp>
+        <p:nvSpPr>
+          <p:cNvPr id="6" name="Text 4"/>
+          <p:cNvSpPr/>
+          <p:nvPr/>
+        </p:nvSpPr>
+        <p:spPr>
+          <a:xfrm>
+            <a:off x="822960" y="5669280"/>
+            <a:ext cx="9144000" cy="640080"/>
           </a:xfrm>
           <a:prstGeom prst="rect">
             <a:avLst/>
@@ -2122,6 +2105,9 @@
           <a:lstStyle/>
           <a:p>
             <a:pPr indent="0" marL="0">
+              <a:lnSpc>
+                <a:spcPct val="110000"/>
+              </a:lnSpc>
               <a:buNone/>
             </a:pPr>
             <a:r>
@@ -2136,18 +2122,30 @@
               <a:t>Francesco Polimeni</a:t>
             </a:r>
             <a:pPr indent="0" marL="0">
+              <a:lnSpc>
+                <a:spcPct val="110000"/>
+              </a:lnSpc>
+              <a:buNone/>
+            </a:pPr>
+            <a:endParaRPr lang="en-US" sz="1300" dirty="0"/>
+          </a:p>
+          <a:p>
+            <a:pPr indent="0" marL="0">
+              <a:lnSpc>
+                <a:spcPct val="110000"/>
+              </a:lnSpc>
               <a:buNone/>
             </a:pPr>
             <a:r>
               <a:rPr lang="en-US" sz="1300" dirty="0">
                 <a:solidFill>
-                  <a:srgbClr val="CADCFC"/>
+                  <a:srgbClr val="CDD6E0"/>
                 </a:solidFill>
                 <a:latin typeface="Calibri" pitchFamily="34" charset="0"/>
                 <a:ea typeface="Calibri" pitchFamily="34" charset="-122"/>
                 <a:cs typeface="Calibri" pitchFamily="34" charset="-120"/>
               </a:rPr>
-              <a:t>   ·   Esade · Prof. Marc Torrens</a:t>
+              <a:t>Esade  ·  Prof. Marc Torrens</a:t>
             </a:r>
             <a:endParaRPr lang="en-US" sz="1300" dirty="0"/>
           </a:p>
@@ -2193,8 +2191,8 @@
         </p:nvSpPr>
         <p:spPr>
           <a:xfrm>
-            <a:off x="457200" y="320040"/>
-            <a:ext cx="11247120" cy="640080"/>
+            <a:off x="457200" y="365760"/>
+            <a:ext cx="11247120" cy="603504"/>
           </a:xfrm>
           <a:prstGeom prst="rect">
             <a:avLst/>
@@ -2210,9 +2208,9 @@
               <a:buNone/>
             </a:pPr>
             <a:r>
-              <a:rPr lang="en-US" sz="3000" b="1" dirty="0">
-                <a:solidFill>
-                  <a:srgbClr val="1E2761"/>
+              <a:rPr lang="en-US" sz="2700" b="1" dirty="0">
+                <a:solidFill>
+                  <a:srgbClr val="1C2A3A"/>
                 </a:solidFill>
                 <a:latin typeface="Cambria" pitchFamily="34" charset="0"/>
                 <a:ea typeface="Cambria" pitchFamily="34" charset="-122"/>
@@ -2220,7 +2218,7 @@
               </a:rPr>
               <a:t>Technical challenges</a:t>
             </a:r>
-            <a:endParaRPr lang="en-US" sz="3000" dirty="0"/>
+            <a:endParaRPr lang="en-US" sz="2700" dirty="0"/>
           </a:p>
         </p:txBody>
       </p:sp>
@@ -2232,8 +2230,8 @@
         </p:nvSpPr>
         <p:spPr>
           <a:xfrm>
-            <a:off x="457200" y="932688"/>
-            <a:ext cx="11247120" cy="320040"/>
+            <a:off x="475488" y="950976"/>
+            <a:ext cx="11247120" cy="292608"/>
           </a:xfrm>
           <a:prstGeom prst="rect">
             <a:avLst/>
@@ -2249,9 +2247,9 @@
               <a:buNone/>
             </a:pPr>
             <a:r>
-              <a:rPr lang="en-US" sz="1400" i="1" dirty="0">
-                <a:solidFill>
-                  <a:srgbClr val="F96167"/>
+              <a:rPr lang="en-US" sz="1300" dirty="0">
+                <a:solidFill>
+                  <a:srgbClr val="6B7480"/>
                 </a:solidFill>
                 <a:latin typeface="Calibri" pitchFamily="34" charset="0"/>
                 <a:ea typeface="Calibri" pitchFamily="34" charset="-122"/>
@@ -2259,7 +2257,7 @@
               </a:rPr>
               <a:t>What was hard, and how it was solved</a:t>
             </a:r>
-            <a:endParaRPr lang="en-US" sz="1400" dirty="0"/>
+            <a:endParaRPr lang="en-US" sz="1300" dirty="0"/>
           </a:p>
         </p:txBody>
       </p:sp>
@@ -2274,27 +2272,18 @@
             <a:off x="457200" y="1554480"/>
             <a:ext cx="5577840" cy="1783080"/>
           </a:xfrm>
-          <a:prstGeom prst="roundRect">
-            <a:avLst>
-              <a:gd name="adj" fmla="val 4103"/>
-            </a:avLst>
+          <a:prstGeom prst="rect">
+            <a:avLst/>
           </a:prstGeom>
           <a:solidFill>
             <a:srgbClr val="FFFFFF"/>
           </a:solidFill>
           <a:ln w="12700">
             <a:solidFill>
-              <a:srgbClr val="E2E7F2"/>
+              <a:srgbClr val="D7DCE3"/>
             </a:solidFill>
             <a:prstDash val="solid"/>
           </a:ln>
-          <a:effectLst>
-            <a:outerShdw sx="100000" sy="100000" kx="0" ky="0" algn="bl" rotWithShape="0" blurRad="88900" dist="25400" dir="5400000">
-              <a:srgbClr val="000000">
-                <a:alpha val="12000"/>
-              </a:srgbClr>
-            </a:outerShdw>
-          </a:effectLst>
         </p:spPr>
       </p:sp>
       <p:sp>
@@ -2324,7 +2313,7 @@
             <a:r>
               <a:rPr lang="en-US" sz="1700" b="1" dirty="0">
                 <a:solidFill>
-                  <a:srgbClr val="F96167"/>
+                  <a:srgbClr val="33617E"/>
                 </a:solidFill>
                 <a:latin typeface="Cambria" pitchFamily="34" charset="0"/>
                 <a:ea typeface="Cambria" pitchFamily="34" charset="-122"/>
@@ -2363,7 +2352,7 @@
             <a:r>
               <a:rPr lang="en-US" sz="1300" dirty="0">
                 <a:solidFill>
-                  <a:srgbClr val="21294D"/>
+                  <a:srgbClr val="26303B"/>
                 </a:solidFill>
                 <a:latin typeface="Calibri" pitchFamily="34" charset="0"/>
                 <a:ea typeface="Calibri" pitchFamily="34" charset="-122"/>
@@ -2386,27 +2375,18 @@
             <a:off x="6309360" y="1554480"/>
             <a:ext cx="5577840" cy="1783080"/>
           </a:xfrm>
-          <a:prstGeom prst="roundRect">
-            <a:avLst>
-              <a:gd name="adj" fmla="val 4103"/>
-            </a:avLst>
+          <a:prstGeom prst="rect">
+            <a:avLst/>
           </a:prstGeom>
           <a:solidFill>
             <a:srgbClr val="FFFFFF"/>
           </a:solidFill>
           <a:ln w="12700">
             <a:solidFill>
-              <a:srgbClr val="E2E7F2"/>
+              <a:srgbClr val="D7DCE3"/>
             </a:solidFill>
             <a:prstDash val="solid"/>
           </a:ln>
-          <a:effectLst>
-            <a:outerShdw sx="100000" sy="100000" kx="0" ky="0" algn="bl" rotWithShape="0" blurRad="88900" dist="25400" dir="5400000">
-              <a:srgbClr val="000000">
-                <a:alpha val="12000"/>
-              </a:srgbClr>
-            </a:outerShdw>
-          </a:effectLst>
         </p:spPr>
       </p:sp>
       <p:sp>
@@ -2436,7 +2416,7 @@
             <a:r>
               <a:rPr lang="en-US" sz="1700" b="1" dirty="0">
                 <a:solidFill>
-                  <a:srgbClr val="F96167"/>
+                  <a:srgbClr val="33617E"/>
                 </a:solidFill>
                 <a:latin typeface="Cambria" pitchFamily="34" charset="0"/>
                 <a:ea typeface="Cambria" pitchFamily="34" charset="-122"/>
@@ -2475,7 +2455,7 @@
             <a:r>
               <a:rPr lang="en-US" sz="1300" dirty="0">
                 <a:solidFill>
-                  <a:srgbClr val="21294D"/>
+                  <a:srgbClr val="26303B"/>
                 </a:solidFill>
                 <a:latin typeface="Calibri" pitchFamily="34" charset="0"/>
                 <a:ea typeface="Calibri" pitchFamily="34" charset="-122"/>
@@ -2498,27 +2478,18 @@
             <a:off x="457200" y="3520440"/>
             <a:ext cx="5577840" cy="1783080"/>
           </a:xfrm>
-          <a:prstGeom prst="roundRect">
-            <a:avLst>
-              <a:gd name="adj" fmla="val 4103"/>
-            </a:avLst>
+          <a:prstGeom prst="rect">
+            <a:avLst/>
           </a:prstGeom>
           <a:solidFill>
             <a:srgbClr val="FFFFFF"/>
           </a:solidFill>
           <a:ln w="12700">
             <a:solidFill>
-              <a:srgbClr val="E2E7F2"/>
+              <a:srgbClr val="D7DCE3"/>
             </a:solidFill>
             <a:prstDash val="solid"/>
           </a:ln>
-          <a:effectLst>
-            <a:outerShdw sx="100000" sy="100000" kx="0" ky="0" algn="bl" rotWithShape="0" blurRad="88900" dist="25400" dir="5400000">
-              <a:srgbClr val="000000">
-                <a:alpha val="12000"/>
-              </a:srgbClr>
-            </a:outerShdw>
-          </a:effectLst>
         </p:spPr>
       </p:sp>
       <p:sp>
@@ -2548,7 +2519,7 @@
             <a:r>
               <a:rPr lang="en-US" sz="1700" b="1" dirty="0">
                 <a:solidFill>
-                  <a:srgbClr val="F96167"/>
+                  <a:srgbClr val="33617E"/>
                 </a:solidFill>
                 <a:latin typeface="Cambria" pitchFamily="34" charset="0"/>
                 <a:ea typeface="Cambria" pitchFamily="34" charset="-122"/>
@@ -2587,7 +2558,7 @@
             <a:r>
               <a:rPr lang="en-US" sz="1300" dirty="0">
                 <a:solidFill>
-                  <a:srgbClr val="21294D"/>
+                  <a:srgbClr val="26303B"/>
                 </a:solidFill>
                 <a:latin typeface="Calibri" pitchFamily="34" charset="0"/>
                 <a:ea typeface="Calibri" pitchFamily="34" charset="-122"/>
@@ -2610,27 +2581,18 @@
             <a:off x="6309360" y="3520440"/>
             <a:ext cx="5577840" cy="1783080"/>
           </a:xfrm>
-          <a:prstGeom prst="roundRect">
-            <a:avLst>
-              <a:gd name="adj" fmla="val 4103"/>
-            </a:avLst>
+          <a:prstGeom prst="rect">
+            <a:avLst/>
           </a:prstGeom>
           <a:solidFill>
             <a:srgbClr val="FFFFFF"/>
           </a:solidFill>
           <a:ln w="12700">
             <a:solidFill>
-              <a:srgbClr val="E2E7F2"/>
+              <a:srgbClr val="D7DCE3"/>
             </a:solidFill>
             <a:prstDash val="solid"/>
           </a:ln>
-          <a:effectLst>
-            <a:outerShdw sx="100000" sy="100000" kx="0" ky="0" algn="bl" rotWithShape="0" blurRad="88900" dist="25400" dir="5400000">
-              <a:srgbClr val="000000">
-                <a:alpha val="12000"/>
-              </a:srgbClr>
-            </a:outerShdw>
-          </a:effectLst>
         </p:spPr>
       </p:sp>
       <p:sp>
@@ -2660,7 +2622,7 @@
             <a:r>
               <a:rPr lang="en-US" sz="1700" b="1" dirty="0">
                 <a:solidFill>
-                  <a:srgbClr val="F96167"/>
+                  <a:srgbClr val="33617E"/>
                 </a:solidFill>
                 <a:latin typeface="Cambria" pitchFamily="34" charset="0"/>
                 <a:ea typeface="Cambria" pitchFamily="34" charset="-122"/>
@@ -2699,7 +2661,7 @@
             <a:r>
               <a:rPr lang="en-US" sz="1300" dirty="0">
                 <a:solidFill>
-                  <a:srgbClr val="21294D"/>
+                  <a:srgbClr val="26303B"/>
                 </a:solidFill>
                 <a:latin typeface="Calibri" pitchFamily="34" charset="0"/>
                 <a:ea typeface="Calibri" pitchFamily="34" charset="-122"/>
@@ -2720,7 +2682,7 @@
         <p:spPr>
           <a:xfrm>
             <a:off x="457200" y="6473952"/>
-            <a:ext cx="7315200" cy="274320"/>
+            <a:ext cx="8229600" cy="274320"/>
           </a:xfrm>
           <a:prstGeom prst="rect">
             <a:avLst/>
@@ -2738,13 +2700,13 @@
             <a:r>
               <a:rPr lang="en-US" sz="900" dirty="0">
                 <a:solidFill>
-                  <a:srgbClr val="5B6586"/>
+                  <a:srgbClr val="6B7480"/>
                 </a:solidFill>
                 <a:latin typeface="Calibri" pitchFamily="34" charset="0"/>
                 <a:ea typeface="Calibri" pitchFamily="34" charset="-122"/>
                 <a:cs typeface="Calibri" pitchFamily="34" charset="-120"/>
               </a:rPr>
-              <a:t>Recommender Systems · Individual Project</a:t>
+              <a:t>Recommender Systems — Individual Project</a:t>
             </a:r>
             <a:endParaRPr lang="en-US" sz="900" dirty="0"/>
           </a:p>
@@ -2777,7 +2739,7 @@
             <a:r>
               <a:rPr lang="en-US" sz="900" dirty="0">
                 <a:solidFill>
-                  <a:srgbClr val="5B6586"/>
+                  <a:srgbClr val="6B7480"/>
                 </a:solidFill>
                 <a:latin typeface="Calibri" pitchFamily="34" charset="0"/>
                 <a:ea typeface="Calibri" pitchFamily="34" charset="-122"/>
@@ -2829,8 +2791,8 @@
         </p:nvSpPr>
         <p:spPr>
           <a:xfrm>
-            <a:off x="457200" y="320040"/>
-            <a:ext cx="11247120" cy="640080"/>
+            <a:off x="457200" y="365760"/>
+            <a:ext cx="11247120" cy="603504"/>
           </a:xfrm>
           <a:prstGeom prst="rect">
             <a:avLst/>
@@ -2846,17 +2808,17 @@
               <a:buNone/>
             </a:pPr>
             <a:r>
-              <a:rPr lang="en-US" sz="3000" b="1" dirty="0">
-                <a:solidFill>
-                  <a:srgbClr val="1E2761"/>
+              <a:rPr lang="en-US" sz="2700" b="1" dirty="0">
+                <a:solidFill>
+                  <a:srgbClr val="1C2A3A"/>
                 </a:solidFill>
                 <a:latin typeface="Cambria" pitchFamily="34" charset="0"/>
                 <a:ea typeface="Cambria" pitchFamily="34" charset="-122"/>
                 <a:cs typeface="Cambria" pitchFamily="34" charset="-120"/>
               </a:rPr>
-              <a:t>Making the evaluation honest</a:t>
-            </a:r>
-            <a:endParaRPr lang="en-US" sz="3000" dirty="0"/>
+              <a:t>Strengthening the evaluation</a:t>
+            </a:r>
+            <a:endParaRPr lang="en-US" sz="2700" dirty="0"/>
           </a:p>
         </p:txBody>
       </p:sp>
@@ -2868,8 +2830,8 @@
         </p:nvSpPr>
         <p:spPr>
           <a:xfrm>
-            <a:off x="457200" y="932688"/>
-            <a:ext cx="11247120" cy="320040"/>
+            <a:off x="475488" y="950976"/>
+            <a:ext cx="11247120" cy="292608"/>
           </a:xfrm>
           <a:prstGeom prst="rect">
             <a:avLst/>
@@ -2885,17 +2847,17 @@
               <a:buNone/>
             </a:pPr>
             <a:r>
-              <a:rPr lang="en-US" sz="1400" i="1" dirty="0">
-                <a:solidFill>
-                  <a:srgbClr val="F96167"/>
+              <a:rPr lang="en-US" sz="1300" dirty="0">
+                <a:solidFill>
+                  <a:srgbClr val="6B7480"/>
                 </a:solidFill>
                 <a:latin typeface="Calibri" pitchFamily="34" charset="0"/>
                 <a:ea typeface="Calibri" pitchFamily="34" charset="-122"/>
                 <a:cs typeface="Calibri" pitchFamily="34" charset="-120"/>
               </a:rPr>
-              <a:t>Weaknesses we found by self-critique — and how we fixed each</a:t>
-            </a:r>
-            <a:endParaRPr lang="en-US" sz="1400" dirty="0"/>
+              <a:t>Methodological issues identified during review, and how each was addressed</a:t>
+            </a:r>
+            <a:endParaRPr lang="en-US" sz="1300" dirty="0"/>
           </a:p>
         </p:txBody>
       </p:sp>
@@ -2910,27 +2872,18 @@
             <a:off x="457200" y="1554480"/>
             <a:ext cx="6492240" cy="658368"/>
           </a:xfrm>
-          <a:prstGeom prst="roundRect">
-            <a:avLst>
-              <a:gd name="adj" fmla="val 11111"/>
-            </a:avLst>
+          <a:prstGeom prst="rect">
+            <a:avLst/>
           </a:prstGeom>
           <a:solidFill>
             <a:srgbClr val="FFFFFF"/>
           </a:solidFill>
           <a:ln w="12700">
             <a:solidFill>
-              <a:srgbClr val="E2E7F2"/>
+              <a:srgbClr val="D7DCE3"/>
             </a:solidFill>
             <a:prstDash val="solid"/>
           </a:ln>
-          <a:effectLst>
-            <a:outerShdw sx="100000" sy="100000" kx="0" ky="0" algn="bl" rotWithShape="0" blurRad="88900" dist="25400" dir="5400000">
-              <a:srgbClr val="000000">
-                <a:alpha val="12000"/>
-              </a:srgbClr>
-            </a:outerShdw>
-          </a:effectLst>
         </p:spPr>
       </p:sp>
       <p:sp>
@@ -2960,7 +2913,7 @@
             <a:r>
               <a:rPr lang="en-US" sz="1250" dirty="0">
                 <a:solidFill>
-                  <a:srgbClr val="5B6586"/>
+                  <a:srgbClr val="6B7480"/>
                 </a:solidFill>
                 <a:latin typeface="Calibri" pitchFamily="34" charset="0"/>
                 <a:ea typeface="Calibri" pitchFamily="34" charset="-122"/>
@@ -2987,7 +2940,7 @@
             <a:avLst/>
           </a:prstGeom>
           <a:solidFill>
-            <a:srgbClr val="2C9C7F"/>
+            <a:srgbClr val="3F7A66"/>
           </a:solidFill>
           <a:ln/>
         </p:spPr>
@@ -3058,13 +3011,13 @@
             <a:r>
               <a:rPr lang="en-US" sz="1200" b="1" dirty="0">
                 <a:solidFill>
-                  <a:srgbClr val="1E2761"/>
+                  <a:srgbClr val="1C2A3A"/>
                 </a:solidFill>
                 <a:latin typeface="Calibri" pitchFamily="34" charset="0"/>
                 <a:ea typeface="Calibri" pitchFamily="34" charset="-122"/>
                 <a:cs typeface="Calibri" pitchFamily="34" charset="-120"/>
               </a:rPr>
-              <a:t>Temporal split → NDCG 0.33 → 0.12 (realistic)</a:t>
+              <a:t>Temporal split → NDCG ≈0.33 → ≈0.14 (realistic)</a:t>
             </a:r>
             <a:endParaRPr lang="en-US" sz="1200" dirty="0"/>
           </a:p>
@@ -3081,27 +3034,18 @@
             <a:off x="457200" y="2322576"/>
             <a:ext cx="6492240" cy="658368"/>
           </a:xfrm>
-          <a:prstGeom prst="roundRect">
-            <a:avLst>
-              <a:gd name="adj" fmla="val 11111"/>
-            </a:avLst>
+          <a:prstGeom prst="rect">
+            <a:avLst/>
           </a:prstGeom>
           <a:solidFill>
             <a:srgbClr val="FFFFFF"/>
           </a:solidFill>
           <a:ln w="12700">
             <a:solidFill>
-              <a:srgbClr val="E2E7F2"/>
+              <a:srgbClr val="D7DCE3"/>
             </a:solidFill>
             <a:prstDash val="solid"/>
           </a:ln>
-          <a:effectLst>
-            <a:outerShdw sx="100000" sy="100000" kx="0" ky="0" algn="bl" rotWithShape="0" blurRad="88900" dist="25400" dir="5400000">
-              <a:srgbClr val="000000">
-                <a:alpha val="12000"/>
-              </a:srgbClr>
-            </a:outerShdw>
-          </a:effectLst>
         </p:spPr>
       </p:sp>
       <p:sp>
@@ -3131,7 +3075,7 @@
             <a:r>
               <a:rPr lang="en-US" sz="1250" dirty="0">
                 <a:solidFill>
-                  <a:srgbClr val="5B6586"/>
+                  <a:srgbClr val="6B7480"/>
                 </a:solidFill>
                 <a:latin typeface="Calibri" pitchFamily="34" charset="0"/>
                 <a:ea typeface="Calibri" pitchFamily="34" charset="-122"/>
@@ -3158,7 +3102,7 @@
             <a:avLst/>
           </a:prstGeom>
           <a:solidFill>
-            <a:srgbClr val="2C9C7F"/>
+            <a:srgbClr val="3F7A66"/>
           </a:solidFill>
           <a:ln/>
         </p:spPr>
@@ -3229,7 +3173,7 @@
             <a:r>
               <a:rPr lang="en-US" sz="1200" b="1" dirty="0">
                 <a:solidFill>
-                  <a:srgbClr val="1E2761"/>
+                  <a:srgbClr val="1C2A3A"/>
                 </a:solidFill>
                 <a:latin typeface="Calibri" pitchFamily="34" charset="0"/>
                 <a:ea typeface="Calibri" pitchFamily="34" charset="-122"/>
@@ -3252,27 +3196,18 @@
             <a:off x="457200" y="3090672"/>
             <a:ext cx="6492240" cy="658368"/>
           </a:xfrm>
-          <a:prstGeom prst="roundRect">
-            <a:avLst>
-              <a:gd name="adj" fmla="val 11111"/>
-            </a:avLst>
+          <a:prstGeom prst="rect">
+            <a:avLst/>
           </a:prstGeom>
           <a:solidFill>
             <a:srgbClr val="FFFFFF"/>
           </a:solidFill>
           <a:ln w="12700">
             <a:solidFill>
-              <a:srgbClr val="E2E7F2"/>
+              <a:srgbClr val="D7DCE3"/>
             </a:solidFill>
             <a:prstDash val="solid"/>
           </a:ln>
-          <a:effectLst>
-            <a:outerShdw sx="100000" sy="100000" kx="0" ky="0" algn="bl" rotWithShape="0" blurRad="88900" dist="25400" dir="5400000">
-              <a:srgbClr val="000000">
-                <a:alpha val="12000"/>
-              </a:srgbClr>
-            </a:outerShdw>
-          </a:effectLst>
         </p:spPr>
       </p:sp>
       <p:sp>
@@ -3302,7 +3237,7 @@
             <a:r>
               <a:rPr lang="en-US" sz="1250" dirty="0">
                 <a:solidFill>
-                  <a:srgbClr val="5B6586"/>
+                  <a:srgbClr val="6B7480"/>
                 </a:solidFill>
                 <a:latin typeface="Calibri" pitchFamily="34" charset="0"/>
                 <a:ea typeface="Calibri" pitchFamily="34" charset="-122"/>
@@ -3329,7 +3264,7 @@
             <a:avLst/>
           </a:prstGeom>
           <a:solidFill>
-            <a:srgbClr val="2C9C7F"/>
+            <a:srgbClr val="3F7A66"/>
           </a:solidFill>
           <a:ln/>
         </p:spPr>
@@ -3400,7 +3335,7 @@
             <a:r>
               <a:rPr lang="en-US" sz="1200" b="1" dirty="0">
                 <a:solidFill>
-                  <a:srgbClr val="1E2761"/>
+                  <a:srgbClr val="1C2A3A"/>
                 </a:solidFill>
                 <a:latin typeface="Calibri" pitchFamily="34" charset="0"/>
                 <a:ea typeface="Calibri" pitchFamily="34" charset="-122"/>
@@ -3423,27 +3358,18 @@
             <a:off x="457200" y="3858768"/>
             <a:ext cx="6492240" cy="658368"/>
           </a:xfrm>
-          <a:prstGeom prst="roundRect">
-            <a:avLst>
-              <a:gd name="adj" fmla="val 11111"/>
-            </a:avLst>
+          <a:prstGeom prst="rect">
+            <a:avLst/>
           </a:prstGeom>
           <a:solidFill>
             <a:srgbClr val="FFFFFF"/>
           </a:solidFill>
           <a:ln w="12700">
             <a:solidFill>
-              <a:srgbClr val="E2E7F2"/>
+              <a:srgbClr val="D7DCE3"/>
             </a:solidFill>
             <a:prstDash val="solid"/>
           </a:ln>
-          <a:effectLst>
-            <a:outerShdw sx="100000" sy="100000" kx="0" ky="0" algn="bl" rotWithShape="0" blurRad="88900" dist="25400" dir="5400000">
-              <a:srgbClr val="000000">
-                <a:alpha val="12000"/>
-              </a:srgbClr>
-            </a:outerShdw>
-          </a:effectLst>
         </p:spPr>
       </p:sp>
       <p:sp>
@@ -3473,7 +3399,7 @@
             <a:r>
               <a:rPr lang="en-US" sz="1250" dirty="0">
                 <a:solidFill>
-                  <a:srgbClr val="5B6586"/>
+                  <a:srgbClr val="6B7480"/>
                 </a:solidFill>
                 <a:latin typeface="Calibri" pitchFamily="34" charset="0"/>
                 <a:ea typeface="Calibri" pitchFamily="34" charset="-122"/>
@@ -3500,7 +3426,7 @@
             <a:avLst/>
           </a:prstGeom>
           <a:solidFill>
-            <a:srgbClr val="2C9C7F"/>
+            <a:srgbClr val="3F7A66"/>
           </a:solidFill>
           <a:ln/>
         </p:spPr>
@@ -3571,7 +3497,7 @@
             <a:r>
               <a:rPr lang="en-US" sz="1200" b="1" dirty="0">
                 <a:solidFill>
-                  <a:srgbClr val="1E2761"/>
+                  <a:srgbClr val="1C2A3A"/>
                 </a:solidFill>
                 <a:latin typeface="Calibri" pitchFamily="34" charset="0"/>
                 <a:ea typeface="Calibri" pitchFamily="34" charset="-122"/>
@@ -3594,27 +3520,18 @@
             <a:off x="457200" y="4626864"/>
             <a:ext cx="6492240" cy="658368"/>
           </a:xfrm>
-          <a:prstGeom prst="roundRect">
-            <a:avLst>
-              <a:gd name="adj" fmla="val 11111"/>
-            </a:avLst>
+          <a:prstGeom prst="rect">
+            <a:avLst/>
           </a:prstGeom>
           <a:solidFill>
             <a:srgbClr val="FFFFFF"/>
           </a:solidFill>
           <a:ln w="12700">
             <a:solidFill>
-              <a:srgbClr val="E2E7F2"/>
+              <a:srgbClr val="D7DCE3"/>
             </a:solidFill>
             <a:prstDash val="solid"/>
           </a:ln>
-          <a:effectLst>
-            <a:outerShdw sx="100000" sy="100000" kx="0" ky="0" algn="bl" rotWithShape="0" blurRad="88900" dist="25400" dir="5400000">
-              <a:srgbClr val="000000">
-                <a:alpha val="12000"/>
-              </a:srgbClr>
-            </a:outerShdw>
-          </a:effectLst>
         </p:spPr>
       </p:sp>
       <p:sp>
@@ -3644,7 +3561,7 @@
             <a:r>
               <a:rPr lang="en-US" sz="1250" dirty="0">
                 <a:solidFill>
-                  <a:srgbClr val="5B6586"/>
+                  <a:srgbClr val="6B7480"/>
                 </a:solidFill>
                 <a:latin typeface="Calibri" pitchFamily="34" charset="0"/>
                 <a:ea typeface="Calibri" pitchFamily="34" charset="-122"/>
@@ -3671,7 +3588,7 @@
             <a:avLst/>
           </a:prstGeom>
           <a:solidFill>
-            <a:srgbClr val="2C9C7F"/>
+            <a:srgbClr val="3F7A66"/>
           </a:solidFill>
           <a:ln/>
         </p:spPr>
@@ -3742,7 +3659,7 @@
             <a:r>
               <a:rPr lang="en-US" sz="1200" b="1" dirty="0">
                 <a:solidFill>
-                  <a:srgbClr val="1E2761"/>
+                  <a:srgbClr val="1C2A3A"/>
                 </a:solidFill>
                 <a:latin typeface="Calibri" pitchFamily="34" charset="0"/>
                 <a:ea typeface="Calibri" pitchFamily="34" charset="-122"/>
@@ -3765,27 +3682,18 @@
             <a:off x="7223760" y="1554480"/>
             <a:ext cx="4480560" cy="3822192"/>
           </a:xfrm>
-          <a:prstGeom prst="roundRect">
-            <a:avLst>
-              <a:gd name="adj" fmla="val 1914"/>
-            </a:avLst>
+          <a:prstGeom prst="rect">
+            <a:avLst/>
           </a:prstGeom>
           <a:solidFill>
-            <a:srgbClr val="F4F6FB"/>
+            <a:srgbClr val="F4F5F7"/>
           </a:solidFill>
           <a:ln w="12700">
             <a:solidFill>
-              <a:srgbClr val="E2E7F2"/>
+              <a:srgbClr val="D7DCE3"/>
             </a:solidFill>
             <a:prstDash val="solid"/>
           </a:ln>
-          <a:effectLst>
-            <a:outerShdw sx="100000" sy="100000" kx="0" ky="0" algn="bl" rotWithShape="0" blurRad="88900" dist="25400" dir="5400000">
-              <a:srgbClr val="000000">
-                <a:alpha val="12000"/>
-              </a:srgbClr>
-            </a:outerShdw>
-          </a:effectLst>
         </p:spPr>
       </p:sp>
       <p:sp>
@@ -3815,7 +3723,7 @@
             <a:r>
               <a:rPr lang="en-US" sz="1350" b="1" dirty="0">
                 <a:solidFill>
-                  <a:srgbClr val="1E2761"/>
+                  <a:srgbClr val="1C2A3A"/>
                 </a:solidFill>
                 <a:latin typeface="Cambria" pitchFamily="34" charset="0"/>
                 <a:ea typeface="Cambria" pitchFamily="34" charset="-122"/>
@@ -3878,7 +3786,7 @@
             <a:r>
               <a:rPr lang="en-US" sz="1050" i="1" dirty="0">
                 <a:solidFill>
-                  <a:srgbClr val="5B6586"/>
+                  <a:srgbClr val="6B7480"/>
                 </a:solidFill>
                 <a:latin typeface="Calibri" pitchFamily="34" charset="0"/>
                 <a:ea typeface="Calibri" pitchFamily="34" charset="-122"/>
@@ -3899,7 +3807,7 @@
         <p:spPr>
           <a:xfrm>
             <a:off x="457200" y="6473952"/>
-            <a:ext cx="7315200" cy="274320"/>
+            <a:ext cx="8229600" cy="274320"/>
           </a:xfrm>
           <a:prstGeom prst="rect">
             <a:avLst/>
@@ -3917,13 +3825,13 @@
             <a:r>
               <a:rPr lang="en-US" sz="900" dirty="0">
                 <a:solidFill>
-                  <a:srgbClr val="5B6586"/>
+                  <a:srgbClr val="6B7480"/>
                 </a:solidFill>
                 <a:latin typeface="Calibri" pitchFamily="34" charset="0"/>
                 <a:ea typeface="Calibri" pitchFamily="34" charset="-122"/>
                 <a:cs typeface="Calibri" pitchFamily="34" charset="-120"/>
               </a:rPr>
-              <a:t>Recommender Systems · Individual Project</a:t>
+              <a:t>Recommender Systems — Individual Project</a:t>
             </a:r>
             <a:endParaRPr lang="en-US" sz="900" dirty="0"/>
           </a:p>
@@ -3956,7 +3864,7 @@
             <a:r>
               <a:rPr lang="en-US" sz="900" dirty="0">
                 <a:solidFill>
-                  <a:srgbClr val="5B6586"/>
+                  <a:srgbClr val="6B7480"/>
                 </a:solidFill>
                 <a:latin typeface="Calibri" pitchFamily="34" charset="0"/>
                 <a:ea typeface="Calibri" pitchFamily="34" charset="-122"/>
@@ -4008,8 +3916,8 @@
         </p:nvSpPr>
         <p:spPr>
           <a:xfrm>
-            <a:off x="457200" y="320040"/>
-            <a:ext cx="11247120" cy="640080"/>
+            <a:off x="457200" y="365760"/>
+            <a:ext cx="11247120" cy="603504"/>
           </a:xfrm>
           <a:prstGeom prst="rect">
             <a:avLst/>
@@ -4025,9 +3933,9 @@
               <a:buNone/>
             </a:pPr>
             <a:r>
-              <a:rPr lang="en-US" sz="3000" b="1" dirty="0">
-                <a:solidFill>
-                  <a:srgbClr val="1E2761"/>
+              <a:rPr lang="en-US" sz="2700" b="1" dirty="0">
+                <a:solidFill>
+                  <a:srgbClr val="1C2A3A"/>
                 </a:solidFill>
                 <a:latin typeface="Cambria" pitchFamily="34" charset="0"/>
                 <a:ea typeface="Cambria" pitchFamily="34" charset="-122"/>
@@ -4035,7 +3943,7 @@
               </a:rPr>
               <a:t>Threats to validity &amp; next steps</a:t>
             </a:r>
-            <a:endParaRPr lang="en-US" sz="3000" dirty="0"/>
+            <a:endParaRPr lang="en-US" sz="2700" dirty="0"/>
           </a:p>
         </p:txBody>
       </p:sp>
@@ -4047,8 +3955,8 @@
         </p:nvSpPr>
         <p:spPr>
           <a:xfrm>
-            <a:off x="457200" y="932688"/>
-            <a:ext cx="11247120" cy="320040"/>
+            <a:off x="475488" y="950976"/>
+            <a:ext cx="11247120" cy="292608"/>
           </a:xfrm>
           <a:prstGeom prst="rect">
             <a:avLst/>
@@ -4064,9 +3972,9 @@
               <a:buNone/>
             </a:pPr>
             <a:r>
-              <a:rPr lang="en-US" sz="1400" i="1" dirty="0">
-                <a:solidFill>
-                  <a:srgbClr val="F96167"/>
+              <a:rPr lang="en-US" sz="1300" dirty="0">
+                <a:solidFill>
+                  <a:srgbClr val="6B7480"/>
                 </a:solidFill>
                 <a:latin typeface="Calibri" pitchFamily="34" charset="0"/>
                 <a:ea typeface="Calibri" pitchFamily="34" charset="-122"/>
@@ -4074,7 +3982,7 @@
               </a:rPr>
               <a:t>What the numbers do — and don't — show</a:t>
             </a:r>
-            <a:endParaRPr lang="en-US" sz="1400" dirty="0"/>
+            <a:endParaRPr lang="en-US" sz="1300" dirty="0"/>
           </a:p>
         </p:txBody>
       </p:sp>
@@ -4089,27 +3997,18 @@
             <a:off x="457200" y="1554480"/>
             <a:ext cx="5486400" cy="3931920"/>
           </a:xfrm>
-          <a:prstGeom prst="roundRect">
-            <a:avLst>
-              <a:gd name="adj" fmla="val 1860"/>
-            </a:avLst>
+          <a:prstGeom prst="rect">
+            <a:avLst/>
           </a:prstGeom>
           <a:solidFill>
-            <a:srgbClr val="F4F6FB"/>
+            <a:srgbClr val="F4F5F7"/>
           </a:solidFill>
           <a:ln w="12700">
             <a:solidFill>
-              <a:srgbClr val="E2E7F2"/>
+              <a:srgbClr val="D7DCE3"/>
             </a:solidFill>
             <a:prstDash val="solid"/>
           </a:ln>
-          <a:effectLst>
-            <a:outerShdw sx="100000" sy="100000" kx="0" ky="0" algn="bl" rotWithShape="0" blurRad="88900" dist="25400" dir="5400000">
-              <a:srgbClr val="000000">
-                <a:alpha val="12000"/>
-              </a:srgbClr>
-            </a:outerShdw>
-          </a:effectLst>
         </p:spPr>
       </p:sp>
       <p:sp>
@@ -4139,7 +4038,7 @@
             <a:r>
               <a:rPr lang="en-US" sz="1800" b="1" dirty="0">
                 <a:solidFill>
-                  <a:srgbClr val="F96167"/>
+                  <a:srgbClr val="33617E"/>
                 </a:solidFill>
                 <a:latin typeface="Cambria" pitchFamily="34" charset="0"/>
                 <a:ea typeface="Cambria" pitchFamily="34" charset="-122"/>
@@ -4182,13 +4081,13 @@
             <a:r>
               <a:rPr lang="en-US" sz="1250" dirty="0">
                 <a:solidFill>
-                  <a:srgbClr val="21294D"/>
+                  <a:srgbClr val="26303B"/>
                 </a:solidFill>
                 <a:latin typeface="Calibri" pitchFamily="34" charset="0"/>
                 <a:ea typeface="Calibri" pitchFamily="34" charset="-122"/>
                 <a:cs typeface="Calibri" pitchFamily="34" charset="-120"/>
               </a:rPr>
-              <a:t>Leakage: fixed with a temporal split (SVD NDCG 0.33→0.12)</a:t>
+              <a:t>Leakage: fixed with a temporal split (SVD NDCG ≈0.33→≈0.14)</a:t>
             </a:r>
             <a:endParaRPr lang="en-US" sz="1250" dirty="0"/>
           </a:p>
@@ -4203,7 +4102,7 @@
             <a:r>
               <a:rPr lang="en-US" sz="1250" dirty="0">
                 <a:solidFill>
-                  <a:srgbClr val="21294D"/>
+                  <a:srgbClr val="26303B"/>
                 </a:solidFill>
                 <a:latin typeface="Calibri" pitchFamily="34" charset="0"/>
                 <a:ea typeface="Calibri" pitchFamily="34" charset="-122"/>
@@ -4224,13 +4123,13 @@
             <a:r>
               <a:rPr lang="en-US" sz="1250" dirty="0">
                 <a:solidFill>
-                  <a:srgbClr val="21294D"/>
+                  <a:srgbClr val="26303B"/>
                 </a:solidFill>
                 <a:latin typeface="Calibri" pitchFamily="34" charset="0"/>
                 <a:ea typeface="Calibri" pitchFamily="34" charset="-122"/>
                 <a:cs typeface="Calibri" pitchFamily="34" charset="-120"/>
               </a:rPr>
-              <a:t>Popularity bias: SVD puts only ~1% of recs in the long tail (vs 48% item-CF)</a:t>
+              <a:t>Popularity bias: SVD puts only ~1% of recs in the long tail (vs 49% item-CF)</a:t>
             </a:r>
             <a:endParaRPr lang="en-US" sz="1250" dirty="0"/>
           </a:p>
@@ -4245,7 +4144,7 @@
             <a:r>
               <a:rPr lang="en-US" sz="1250" dirty="0">
                 <a:solidFill>
-                  <a:srgbClr val="21294D"/>
+                  <a:srgbClr val="26303B"/>
                 </a:solidFill>
                 <a:latin typeface="Calibri" pitchFamily="34" charset="0"/>
                 <a:ea typeface="Calibri" pitchFamily="34" charset="-122"/>
@@ -4266,7 +4165,7 @@
             <a:r>
               <a:rPr lang="en-US" sz="1250" dirty="0">
                 <a:solidFill>
-                  <a:srgbClr val="21294D"/>
+                  <a:srgbClr val="26303B"/>
                 </a:solidFill>
                 <a:latin typeface="Calibri" pitchFamily="34" charset="0"/>
                 <a:ea typeface="Calibri" pitchFamily="34" charset="-122"/>
@@ -4289,27 +4188,18 @@
             <a:off x="6217920" y="1554480"/>
             <a:ext cx="5486400" cy="3931920"/>
           </a:xfrm>
-          <a:prstGeom prst="roundRect">
-            <a:avLst>
-              <a:gd name="adj" fmla="val 1860"/>
-            </a:avLst>
+          <a:prstGeom prst="rect">
+            <a:avLst/>
           </a:prstGeom>
           <a:solidFill>
             <a:srgbClr val="FFFFFF"/>
           </a:solidFill>
           <a:ln w="12700">
             <a:solidFill>
-              <a:srgbClr val="E2E7F2"/>
+              <a:srgbClr val="D7DCE3"/>
             </a:solidFill>
             <a:prstDash val="solid"/>
           </a:ln>
-          <a:effectLst>
-            <a:outerShdw sx="100000" sy="100000" kx="0" ky="0" algn="bl" rotWithShape="0" blurRad="88900" dist="25400" dir="5400000">
-              <a:srgbClr val="000000">
-                <a:alpha val="12000"/>
-              </a:srgbClr>
-            </a:outerShdw>
-          </a:effectLst>
         </p:spPr>
       </p:sp>
       <p:sp>
@@ -4339,7 +4229,7 @@
             <a:r>
               <a:rPr lang="en-US" sz="1800" b="1" dirty="0">
                 <a:solidFill>
-                  <a:srgbClr val="2C9C7F"/>
+                  <a:srgbClr val="3F7A66"/>
                 </a:solidFill>
                 <a:latin typeface="Cambria" pitchFamily="34" charset="0"/>
                 <a:ea typeface="Cambria" pitchFamily="34" charset="-122"/>
@@ -4382,7 +4272,7 @@
             <a:r>
               <a:rPr lang="en-US" sz="1250" dirty="0">
                 <a:solidFill>
-                  <a:srgbClr val="21294D"/>
+                  <a:srgbClr val="26303B"/>
                 </a:solidFill>
                 <a:latin typeface="Calibri" pitchFamily="34" charset="0"/>
                 <a:ea typeface="Calibri" pitchFamily="34" charset="-122"/>
@@ -4403,7 +4293,7 @@
             <a:r>
               <a:rPr lang="en-US" sz="1250" dirty="0">
                 <a:solidFill>
-                  <a:srgbClr val="21294D"/>
+                  <a:srgbClr val="26303B"/>
                 </a:solidFill>
                 <a:latin typeface="Calibri" pitchFamily="34" charset="0"/>
                 <a:ea typeface="Calibri" pitchFamily="34" charset="-122"/>
@@ -4424,7 +4314,7 @@
             <a:r>
               <a:rPr lang="en-US" sz="1250" dirty="0">
                 <a:solidFill>
-                  <a:srgbClr val="21294D"/>
+                  <a:srgbClr val="26303B"/>
                 </a:solidFill>
                 <a:latin typeface="Calibri" pitchFamily="34" charset="0"/>
                 <a:ea typeface="Calibri" pitchFamily="34" charset="-122"/>
@@ -4445,7 +4335,7 @@
             <a:r>
               <a:rPr lang="en-US" sz="1250" dirty="0">
                 <a:solidFill>
-                  <a:srgbClr val="21294D"/>
+                  <a:srgbClr val="26303B"/>
                 </a:solidFill>
                 <a:latin typeface="Calibri" pitchFamily="34" charset="0"/>
                 <a:ea typeface="Calibri" pitchFamily="34" charset="-122"/>
@@ -4466,7 +4356,7 @@
             <a:r>
               <a:rPr lang="en-US" sz="1250" dirty="0">
                 <a:solidFill>
-                  <a:srgbClr val="21294D"/>
+                  <a:srgbClr val="26303B"/>
                 </a:solidFill>
                 <a:latin typeface="Calibri" pitchFamily="34" charset="0"/>
                 <a:ea typeface="Calibri" pitchFamily="34" charset="-122"/>
@@ -4487,7 +4377,7 @@
         <p:spPr>
           <a:xfrm>
             <a:off x="457200" y="6473952"/>
-            <a:ext cx="7315200" cy="274320"/>
+            <a:ext cx="8229600" cy="274320"/>
           </a:xfrm>
           <a:prstGeom prst="rect">
             <a:avLst/>
@@ -4505,13 +4395,13 @@
             <a:r>
               <a:rPr lang="en-US" sz="900" dirty="0">
                 <a:solidFill>
-                  <a:srgbClr val="5B6586"/>
+                  <a:srgbClr val="6B7480"/>
                 </a:solidFill>
                 <a:latin typeface="Calibri" pitchFamily="34" charset="0"/>
                 <a:ea typeface="Calibri" pitchFamily="34" charset="-122"/>
                 <a:cs typeface="Calibri" pitchFamily="34" charset="-120"/>
               </a:rPr>
-              <a:t>Recommender Systems · Individual Project</a:t>
+              <a:t>Recommender Systems — Individual Project</a:t>
             </a:r>
             <a:endParaRPr lang="en-US" sz="900" dirty="0"/>
           </a:p>
@@ -4544,7 +4434,7 @@
             <a:r>
               <a:rPr lang="en-US" sz="900" dirty="0">
                 <a:solidFill>
-                  <a:srgbClr val="5B6586"/>
+                  <a:srgbClr val="6B7480"/>
                 </a:solidFill>
                 <a:latin typeface="Calibri" pitchFamily="34" charset="0"/>
                 <a:ea typeface="Calibri" pitchFamily="34" charset="-122"/>
@@ -4570,7 +4460,7 @@
     <p:bg>
       <p:bgPr>
         <a:solidFill>
-          <a:srgbClr val="1E2761"/>
+          <a:srgbClr val="1C2A3A"/>
         </a:solidFill>
       </p:bgPr>
     </p:bg>
@@ -4590,33 +4480,13 @@
       </p:grpSpPr>
       <p:sp>
         <p:nvSpPr>
-          <p:cNvPr id="2" name="Shape 0"/>
-          <p:cNvSpPr/>
-          <p:nvPr/>
-        </p:nvSpPr>
-        <p:spPr>
-          <a:xfrm>
-            <a:off x="-1828800" y="3931920"/>
-            <a:ext cx="5486400" cy="5486400"/>
-          </a:xfrm>
-          <a:prstGeom prst="ellipse">
-            <a:avLst/>
-          </a:prstGeom>
-          <a:solidFill>
-            <a:srgbClr val="21294D"/>
-          </a:solidFill>
-          <a:ln/>
-        </p:spPr>
-      </p:sp>
-      <p:sp>
-        <p:nvSpPr>
-          <p:cNvPr id="3" name="Text 1"/>
-          <p:cNvSpPr/>
-          <p:nvPr/>
-        </p:nvSpPr>
-        <p:spPr>
-          <a:xfrm>
-            <a:off x="640080" y="640080"/>
+          <p:cNvPr id="2" name="Text 0"/>
+          <p:cNvSpPr/>
+          <p:nvPr/>
+        </p:nvSpPr>
+        <p:spPr>
+          <a:xfrm>
+            <a:off x="822960" y="685800"/>
             <a:ext cx="10058400" cy="640080"/>
           </a:xfrm>
           <a:prstGeom prst="rect">
@@ -4633,7 +4503,7 @@
               <a:buNone/>
             </a:pPr>
             <a:r>
-              <a:rPr lang="en-US" sz="3000" b="1" dirty="0">
+              <a:rPr lang="en-US" sz="2800" b="1" dirty="0">
                 <a:solidFill>
                   <a:srgbClr val="FFFFFF"/>
                 </a:solidFill>
@@ -4641,42 +4511,45 @@
                 <a:ea typeface="Cambria" pitchFamily="34" charset="-122"/>
                 <a:cs typeface="Cambria" pitchFamily="34" charset="-120"/>
               </a:rPr>
-              <a:t>Final remarks</a:t>
-            </a:r>
-            <a:endParaRPr lang="en-US" sz="3000" dirty="0"/>
-          </a:p>
-        </p:txBody>
-      </p:sp>
-      <p:sp>
-        <p:nvSpPr>
-          <p:cNvPr id="4" name="Shape 2"/>
-          <p:cNvSpPr/>
-          <p:nvPr/>
-        </p:nvSpPr>
-        <p:spPr>
-          <a:xfrm>
-            <a:off x="731520" y="1645920"/>
-            <a:ext cx="502920" cy="502920"/>
-          </a:xfrm>
-          <a:prstGeom prst="ellipse">
-            <a:avLst/>
-          </a:prstGeom>
-          <a:solidFill>
-            <a:srgbClr val="F96167"/>
-          </a:solidFill>
-          <a:ln/>
-        </p:spPr>
-      </p:sp>
-      <p:sp>
-        <p:nvSpPr>
-          <p:cNvPr id="5" name="Text 3"/>
-          <p:cNvSpPr/>
-          <p:nvPr/>
-        </p:nvSpPr>
-        <p:spPr>
-          <a:xfrm>
-            <a:off x="731520" y="1645920"/>
-            <a:ext cx="502920" cy="502920"/>
+              <a:t>Conclusions</a:t>
+            </a:r>
+            <a:endParaRPr lang="en-US" sz="2800" dirty="0"/>
+          </a:p>
+        </p:txBody>
+      </p:sp>
+      <p:sp>
+        <p:nvSpPr>
+          <p:cNvPr id="3" name="Shape 1"/>
+          <p:cNvSpPr/>
+          <p:nvPr/>
+        </p:nvSpPr>
+        <p:spPr>
+          <a:xfrm>
+            <a:off x="841248" y="1371600"/>
+            <a:ext cx="2743200" cy="0"/>
+          </a:xfrm>
+          <a:prstGeom prst="line">
+            <a:avLst/>
+          </a:prstGeom>
+          <a:noFill/>
+          <a:ln w="19050">
+            <a:solidFill>
+              <a:srgbClr val="33617E"/>
+            </a:solidFill>
+            <a:prstDash val="solid"/>
+          </a:ln>
+        </p:spPr>
+      </p:sp>
+      <p:sp>
+        <p:nvSpPr>
+          <p:cNvPr id="4" name="Text 2"/>
+          <p:cNvSpPr/>
+          <p:nvPr/>
+        </p:nvSpPr>
+        <p:spPr>
+          <a:xfrm>
+            <a:off x="822960" y="1874520"/>
+            <a:ext cx="457200" cy="457200"/>
           </a:xfrm>
           <a:prstGeom prst="rect">
             <a:avLst/>
@@ -4688,34 +4561,34 @@
           <a:bodyPr wrap="square" lIns="0" tIns="0" rIns="0" bIns="0" rtlCol="0" anchor="ctr"/>
           <a:lstStyle/>
           <a:p>
-            <a:pPr algn="ctr" indent="0" marL="0">
-              <a:buNone/>
-            </a:pPr>
-            <a:r>
-              <a:rPr lang="en-US" sz="2000" b="1" dirty="0">
-                <a:solidFill>
-                  <a:srgbClr val="FFFFFF"/>
+            <a:pPr indent="0" marL="0">
+              <a:buNone/>
+            </a:pPr>
+            <a:r>
+              <a:rPr lang="en-US" sz="1800" b="1" dirty="0">
+                <a:solidFill>
+                  <a:srgbClr val="33617E"/>
                 </a:solidFill>
                 <a:latin typeface="Cambria" pitchFamily="34" charset="0"/>
                 <a:ea typeface="Cambria" pitchFamily="34" charset="-122"/>
                 <a:cs typeface="Cambria" pitchFamily="34" charset="-120"/>
               </a:rPr>
-              <a:t>1</a:t>
-            </a:r>
-            <a:endParaRPr lang="en-US" sz="2000" dirty="0"/>
-          </a:p>
-        </p:txBody>
-      </p:sp>
-      <p:sp>
-        <p:nvSpPr>
-          <p:cNvPr id="6" name="Text 4"/>
-          <p:cNvSpPr/>
-          <p:nvPr/>
-        </p:nvSpPr>
-        <p:spPr>
-          <a:xfrm>
-            <a:off x="1463040" y="1600200"/>
-            <a:ext cx="9875520" cy="457200"/>
+              <a:t>1.</a:t>
+            </a:r>
+            <a:endParaRPr lang="en-US" sz="1800" dirty="0"/>
+          </a:p>
+        </p:txBody>
+      </p:sp>
+      <p:sp>
+        <p:nvSpPr>
+          <p:cNvPr id="5" name="Text 3"/>
+          <p:cNvSpPr/>
+          <p:nvPr/>
+        </p:nvSpPr>
+        <p:spPr>
+          <a:xfrm>
+            <a:off x="1371600" y="1856232"/>
+            <a:ext cx="9875520" cy="411480"/>
           </a:xfrm>
           <a:prstGeom prst="rect">
             <a:avLst/>
@@ -4731,7 +4604,7 @@
               <a:buNone/>
             </a:pPr>
             <a:r>
-              <a:rPr lang="en-US" sz="1900" b="1" dirty="0">
+              <a:rPr lang="en-US" sz="1800" b="1" dirty="0">
                 <a:solidFill>
                   <a:srgbClr val="FFFFFF"/>
                 </a:solidFill>
@@ -4739,22 +4612,22 @@
                 <a:ea typeface="Cambria" pitchFamily="34" charset="-122"/>
                 <a:cs typeface="Cambria" pitchFamily="34" charset="-120"/>
               </a:rPr>
-              <a:t>No universal best model</a:t>
-            </a:r>
-            <a:endParaRPr lang="en-US" sz="1900" dirty="0"/>
-          </a:p>
-        </p:txBody>
-      </p:sp>
-      <p:sp>
-        <p:nvSpPr>
-          <p:cNvPr id="7" name="Text 5"/>
-          <p:cNvSpPr/>
-          <p:nvPr/>
-        </p:nvSpPr>
-        <p:spPr>
-          <a:xfrm>
-            <a:off x="1463040" y="2057400"/>
-            <a:ext cx="9875520" cy="548640"/>
+              <a:t>No single best model.</a:t>
+            </a:r>
+            <a:endParaRPr lang="en-US" sz="1800" dirty="0"/>
+          </a:p>
+        </p:txBody>
+      </p:sp>
+      <p:sp>
+        <p:nvSpPr>
+          <p:cNvPr id="6" name="Text 4"/>
+          <p:cNvSpPr/>
+          <p:nvPr/>
+        </p:nvSpPr>
+        <p:spPr>
+          <a:xfrm>
+            <a:off x="1371600" y="2258568"/>
+            <a:ext cx="9875520" cy="502920"/>
           </a:xfrm>
           <a:prstGeom prst="rect">
             <a:avLst/>
@@ -4770,9 +4643,9 @@
               <a:buNone/>
             </a:pPr>
             <a:r>
-              <a:rPr lang="en-US" sz="1400" dirty="0">
-                <a:solidFill>
-                  <a:srgbClr val="CADCFC"/>
+              <a:rPr lang="en-US" sz="1350" dirty="0">
+                <a:solidFill>
+                  <a:srgbClr val="CDD6E0"/>
                 </a:solidFill>
                 <a:latin typeface="Calibri" pitchFamily="34" charset="0"/>
                 <a:ea typeface="Calibri" pitchFamily="34" charset="-122"/>
@@ -4780,40 +4653,20 @@
               </a:rPr>
               <a:t>The right choice depends on the objective — engagement, discovery or coverage.</a:t>
             </a:r>
-            <a:endParaRPr lang="en-US" sz="1400" dirty="0"/>
-          </a:p>
-        </p:txBody>
-      </p:sp>
-      <p:sp>
-        <p:nvSpPr>
-          <p:cNvPr id="8" name="Shape 6"/>
-          <p:cNvSpPr/>
-          <p:nvPr/>
-        </p:nvSpPr>
-        <p:spPr>
-          <a:xfrm>
-            <a:off x="731520" y="2971800"/>
-            <a:ext cx="502920" cy="502920"/>
-          </a:xfrm>
-          <a:prstGeom prst="ellipse">
-            <a:avLst/>
-          </a:prstGeom>
-          <a:solidFill>
-            <a:srgbClr val="F96167"/>
-          </a:solidFill>
-          <a:ln/>
-        </p:spPr>
-      </p:sp>
-      <p:sp>
-        <p:nvSpPr>
-          <p:cNvPr id="9" name="Text 7"/>
-          <p:cNvSpPr/>
-          <p:nvPr/>
-        </p:nvSpPr>
-        <p:spPr>
-          <a:xfrm>
-            <a:off x="731520" y="2971800"/>
-            <a:ext cx="502920" cy="502920"/>
+            <a:endParaRPr lang="en-US" sz="1350" dirty="0"/>
+          </a:p>
+        </p:txBody>
+      </p:sp>
+      <p:sp>
+        <p:nvSpPr>
+          <p:cNvPr id="7" name="Text 5"/>
+          <p:cNvSpPr/>
+          <p:nvPr/>
+        </p:nvSpPr>
+        <p:spPr>
+          <a:xfrm>
+            <a:off x="822960" y="3017520"/>
+            <a:ext cx="457200" cy="457200"/>
           </a:xfrm>
           <a:prstGeom prst="rect">
             <a:avLst/>
@@ -4825,34 +4678,34 @@
           <a:bodyPr wrap="square" lIns="0" tIns="0" rIns="0" bIns="0" rtlCol="0" anchor="ctr"/>
           <a:lstStyle/>
           <a:p>
-            <a:pPr algn="ctr" indent="0" marL="0">
-              <a:buNone/>
-            </a:pPr>
-            <a:r>
-              <a:rPr lang="en-US" sz="2000" b="1" dirty="0">
-                <a:solidFill>
-                  <a:srgbClr val="FFFFFF"/>
+            <a:pPr indent="0" marL="0">
+              <a:buNone/>
+            </a:pPr>
+            <a:r>
+              <a:rPr lang="en-US" sz="1800" b="1" dirty="0">
+                <a:solidFill>
+                  <a:srgbClr val="33617E"/>
                 </a:solidFill>
                 <a:latin typeface="Cambria" pitchFamily="34" charset="0"/>
                 <a:ea typeface="Cambria" pitchFamily="34" charset="-122"/>
                 <a:cs typeface="Cambria" pitchFamily="34" charset="-120"/>
               </a:rPr>
-              <a:t>2</a:t>
-            </a:r>
-            <a:endParaRPr lang="en-US" sz="2000" dirty="0"/>
-          </a:p>
-        </p:txBody>
-      </p:sp>
-      <p:sp>
-        <p:nvSpPr>
-          <p:cNvPr id="10" name="Text 8"/>
-          <p:cNvSpPr/>
-          <p:nvPr/>
-        </p:nvSpPr>
-        <p:spPr>
-          <a:xfrm>
-            <a:off x="1463040" y="2926080"/>
-            <a:ext cx="9875520" cy="457200"/>
+              <a:t>2.</a:t>
+            </a:r>
+            <a:endParaRPr lang="en-US" sz="1800" dirty="0"/>
+          </a:p>
+        </p:txBody>
+      </p:sp>
+      <p:sp>
+        <p:nvSpPr>
+          <p:cNvPr id="8" name="Text 6"/>
+          <p:cNvSpPr/>
+          <p:nvPr/>
+        </p:nvSpPr>
+        <p:spPr>
+          <a:xfrm>
+            <a:off x="1371600" y="2999232"/>
+            <a:ext cx="9875520" cy="411480"/>
           </a:xfrm>
           <a:prstGeom prst="rect">
             <a:avLst/>
@@ -4868,7 +4721,7 @@
               <a:buNone/>
             </a:pPr>
             <a:r>
-              <a:rPr lang="en-US" sz="1900" b="1" dirty="0">
+              <a:rPr lang="en-US" sz="1800" b="1" dirty="0">
                 <a:solidFill>
                   <a:srgbClr val="FFFFFF"/>
                 </a:solidFill>
@@ -4876,22 +4729,22 @@
                 <a:ea typeface="Cambria" pitchFamily="34" charset="-122"/>
                 <a:cs typeface="Cambria" pitchFamily="34" charset="-120"/>
               </a:rPr>
-              <a:t>Accuracy is not enough</a:t>
-            </a:r>
-            <a:endParaRPr lang="en-US" sz="1900" dirty="0"/>
-          </a:p>
-        </p:txBody>
-      </p:sp>
-      <p:sp>
-        <p:nvSpPr>
-          <p:cNvPr id="11" name="Text 9"/>
-          <p:cNvSpPr/>
-          <p:nvPr/>
-        </p:nvSpPr>
-        <p:spPr>
-          <a:xfrm>
-            <a:off x="1463040" y="3383280"/>
-            <a:ext cx="9875520" cy="548640"/>
+              <a:t>Accuracy is not the whole story.</a:t>
+            </a:r>
+            <a:endParaRPr lang="en-US" sz="1800" dirty="0"/>
+          </a:p>
+        </p:txBody>
+      </p:sp>
+      <p:sp>
+        <p:nvSpPr>
+          <p:cNvPr id="9" name="Text 7"/>
+          <p:cNvSpPr/>
+          <p:nvPr/>
+        </p:nvSpPr>
+        <p:spPr>
+          <a:xfrm>
+            <a:off x="1371600" y="3401568"/>
+            <a:ext cx="9875520" cy="502920"/>
           </a:xfrm>
           <a:prstGeom prst="rect">
             <a:avLst/>
@@ -4907,50 +4760,30 @@
               <a:buNone/>
             </a:pPr>
             <a:r>
-              <a:rPr lang="en-US" sz="1400" dirty="0">
-                <a:solidFill>
-                  <a:srgbClr val="CADCFC"/>
+              <a:rPr lang="en-US" sz="1350" dirty="0">
+                <a:solidFill>
+                  <a:srgbClr val="CDD6E0"/>
                 </a:solidFill>
                 <a:latin typeface="Calibri" pitchFamily="34" charset="0"/>
                 <a:ea typeface="Calibri" pitchFamily="34" charset="-122"/>
                 <a:cs typeface="Calibri" pitchFamily="34" charset="-120"/>
               </a:rPr>
-              <a:t>The most accurate model (popularity) is also the least useful for discovery.</a:t>
-            </a:r>
-            <a:endParaRPr lang="en-US" sz="1400" dirty="0"/>
-          </a:p>
-        </p:txBody>
-      </p:sp>
-      <p:sp>
-        <p:nvSpPr>
-          <p:cNvPr id="12" name="Shape 10"/>
-          <p:cNvSpPr/>
-          <p:nvPr/>
-        </p:nvSpPr>
-        <p:spPr>
-          <a:xfrm>
-            <a:off x="731520" y="4297680"/>
-            <a:ext cx="502920" cy="502920"/>
-          </a:xfrm>
-          <a:prstGeom prst="ellipse">
-            <a:avLst/>
-          </a:prstGeom>
-          <a:solidFill>
-            <a:srgbClr val="F96167"/>
-          </a:solidFill>
-          <a:ln/>
-        </p:spPr>
-      </p:sp>
-      <p:sp>
-        <p:nvSpPr>
-          <p:cNvPr id="13" name="Text 11"/>
-          <p:cNvSpPr/>
-          <p:nvPr/>
-        </p:nvSpPr>
-        <p:spPr>
-          <a:xfrm>
-            <a:off x="731520" y="4297680"/>
-            <a:ext cx="502920" cy="502920"/>
+              <a:t>The most accurate model (popularity / SVD) is also the most popularity-biased.</a:t>
+            </a:r>
+            <a:endParaRPr lang="en-US" sz="1350" dirty="0"/>
+          </a:p>
+        </p:txBody>
+      </p:sp>
+      <p:sp>
+        <p:nvSpPr>
+          <p:cNvPr id="10" name="Text 8"/>
+          <p:cNvSpPr/>
+          <p:nvPr/>
+        </p:nvSpPr>
+        <p:spPr>
+          <a:xfrm>
+            <a:off x="822960" y="4160520"/>
+            <a:ext cx="457200" cy="457200"/>
           </a:xfrm>
           <a:prstGeom prst="rect">
             <a:avLst/>
@@ -4962,34 +4795,34 @@
           <a:bodyPr wrap="square" lIns="0" tIns="0" rIns="0" bIns="0" rtlCol="0" anchor="ctr"/>
           <a:lstStyle/>
           <a:p>
-            <a:pPr algn="ctr" indent="0" marL="0">
-              <a:buNone/>
-            </a:pPr>
-            <a:r>
-              <a:rPr lang="en-US" sz="2000" b="1" dirty="0">
-                <a:solidFill>
-                  <a:srgbClr val="FFFFFF"/>
+            <a:pPr indent="0" marL="0">
+              <a:buNone/>
+            </a:pPr>
+            <a:r>
+              <a:rPr lang="en-US" sz="1800" b="1" dirty="0">
+                <a:solidFill>
+                  <a:srgbClr val="33617E"/>
                 </a:solidFill>
                 <a:latin typeface="Cambria" pitchFamily="34" charset="0"/>
                 <a:ea typeface="Cambria" pitchFamily="34" charset="-122"/>
                 <a:cs typeface="Cambria" pitchFamily="34" charset="-120"/>
               </a:rPr>
-              <a:t>3</a:t>
-            </a:r>
-            <a:endParaRPr lang="en-US" sz="2000" dirty="0"/>
-          </a:p>
-        </p:txBody>
-      </p:sp>
-      <p:sp>
-        <p:nvSpPr>
-          <p:cNvPr id="14" name="Text 12"/>
-          <p:cNvSpPr/>
-          <p:nvPr/>
-        </p:nvSpPr>
-        <p:spPr>
-          <a:xfrm>
-            <a:off x="1463040" y="4251960"/>
-            <a:ext cx="9875520" cy="457200"/>
+              <a:t>3.</a:t>
+            </a:r>
+            <a:endParaRPr lang="en-US" sz="1800" dirty="0"/>
+          </a:p>
+        </p:txBody>
+      </p:sp>
+      <p:sp>
+        <p:nvSpPr>
+          <p:cNvPr id="11" name="Text 9"/>
+          <p:cNvSpPr/>
+          <p:nvPr/>
+        </p:nvSpPr>
+        <p:spPr>
+          <a:xfrm>
+            <a:off x="1371600" y="4142232"/>
+            <a:ext cx="9875520" cy="411480"/>
           </a:xfrm>
           <a:prstGeom prst="rect">
             <a:avLst/>
@@ -5005,7 +4838,7 @@
               <a:buNone/>
             </a:pPr>
             <a:r>
-              <a:rPr lang="en-US" sz="1900" b="1" dirty="0">
+              <a:rPr lang="en-US" sz="1800" b="1" dirty="0">
                 <a:solidFill>
                   <a:srgbClr val="FFFFFF"/>
                 </a:solidFill>
@@ -5013,22 +4846,22 @@
                 <a:ea typeface="Cambria" pitchFamily="34" charset="-122"/>
                 <a:cs typeface="Cambria" pitchFamily="34" charset="-120"/>
               </a:rPr>
-              <a:t>Personalization adds value</a:t>
-            </a:r>
-            <a:endParaRPr lang="en-US" sz="1900" dirty="0"/>
-          </a:p>
-        </p:txBody>
-      </p:sp>
-      <p:sp>
-        <p:nvSpPr>
-          <p:cNvPr id="15" name="Text 13"/>
-          <p:cNvSpPr/>
-          <p:nvPr/>
-        </p:nvSpPr>
-        <p:spPr>
-          <a:xfrm>
-            <a:off x="1463040" y="4709160"/>
-            <a:ext cx="9875520" cy="548640"/>
+              <a:t>Personalization adds value.</a:t>
+            </a:r>
+            <a:endParaRPr lang="en-US" sz="1800" dirty="0"/>
+          </a:p>
+        </p:txBody>
+      </p:sp>
+      <p:sp>
+        <p:nvSpPr>
+          <p:cNvPr id="12" name="Text 10"/>
+          <p:cNvSpPr/>
+          <p:nvPr/>
+        </p:nvSpPr>
+        <p:spPr>
+          <a:xfrm>
+            <a:off x="1371600" y="4544568"/>
+            <a:ext cx="9875520" cy="502920"/>
           </a:xfrm>
           <a:prstGeom prst="rect">
             <a:avLst/>
@@ -5044,30 +4877,30 @@
               <a:buNone/>
             </a:pPr>
             <a:r>
-              <a:rPr lang="en-US" sz="1400" dirty="0">
-                <a:solidFill>
-                  <a:srgbClr val="CADCFC"/>
+              <a:rPr lang="en-US" sz="1350" dirty="0">
+                <a:solidFill>
+                  <a:srgbClr val="CDD6E0"/>
                 </a:solidFill>
                 <a:latin typeface="Calibri" pitchFamily="34" charset="0"/>
                 <a:ea typeface="Calibri" pitchFamily="34" charset="-122"/>
                 <a:cs typeface="Calibri" pitchFamily="34" charset="-120"/>
               </a:rPr>
-              <a:t>MF and CF surface relevant, novel items a popularity list never would.</a:t>
-            </a:r>
-            <a:endParaRPr lang="en-US" sz="1400" dirty="0"/>
-          </a:p>
-        </p:txBody>
-      </p:sp>
-      <p:sp>
-        <p:nvSpPr>
-          <p:cNvPr id="16" name="Text 14"/>
-          <p:cNvSpPr/>
-          <p:nvPr/>
-        </p:nvSpPr>
-        <p:spPr>
-          <a:xfrm>
-            <a:off x="640080" y="5715000"/>
-            <a:ext cx="10058400" cy="457200"/>
+              <a:t>Matrix factorization and CF surface relevant items a popularity list would miss.</a:t>
+            </a:r>
+            <a:endParaRPr lang="en-US" sz="1350" dirty="0"/>
+          </a:p>
+        </p:txBody>
+      </p:sp>
+      <p:sp>
+        <p:nvSpPr>
+          <p:cNvPr id="13" name="Text 11"/>
+          <p:cNvSpPr/>
+          <p:nvPr/>
+        </p:nvSpPr>
+        <p:spPr>
+          <a:xfrm>
+            <a:off x="822960" y="5852160"/>
+            <a:ext cx="10515600" cy="365760"/>
           </a:xfrm>
           <a:prstGeom prst="rect">
             <a:avLst/>
@@ -5083,17 +4916,31 @@
               <a:buNone/>
             </a:pPr>
             <a:r>
-              <a:rPr lang="en-US" sz="1500" i="1" dirty="0">
-                <a:solidFill>
-                  <a:srgbClr val="CADCFC"/>
+              <a:rPr lang="en-US" sz="1300" dirty="0">
+                <a:solidFill>
+                  <a:srgbClr val="CDD6E0"/>
                 </a:solidFill>
                 <a:latin typeface="Calibri" pitchFamily="34" charset="0"/>
                 <a:ea typeface="Calibri" pitchFamily="34" charset="-122"/>
                 <a:cs typeface="Calibri" pitchFamily="34" charset="-120"/>
               </a:rPr>
-              <a:t>Thank you — questions welcome.</a:t>
-            </a:r>
-            <a:endParaRPr lang="en-US" sz="1500" dirty="0"/>
+              <a:t>Thank you.   Live demo: </a:t>
+            </a:r>
+            <a:pPr indent="0" marL="0">
+              <a:buNone/>
+            </a:pPr>
+            <a:r>
+              <a:rPr lang="en-US" sz="1300" b="1" dirty="0">
+                <a:solidFill>
+                  <a:srgbClr val="FFFFFF"/>
+                </a:solidFill>
+                <a:latin typeface="Calibri" pitchFamily="34" charset="0"/>
+                <a:ea typeface="Calibri" pitchFamily="34" charset="-122"/>
+                <a:cs typeface="Calibri" pitchFamily="34" charset="-120"/>
+              </a:rPr>
+              <a:t>movierec-fp.streamlit.app</a:t>
+            </a:r>
+            <a:endParaRPr lang="en-US" sz="1300" dirty="0"/>
           </a:p>
         </p:txBody>
       </p:sp>
@@ -5137,8 +4984,8 @@
         </p:nvSpPr>
         <p:spPr>
           <a:xfrm>
-            <a:off x="457200" y="320040"/>
-            <a:ext cx="11247120" cy="640080"/>
+            <a:off x="457200" y="365760"/>
+            <a:ext cx="11247120" cy="603504"/>
           </a:xfrm>
           <a:prstGeom prst="rect">
             <a:avLst/>
@@ -5154,9 +5001,9 @@
               <a:buNone/>
             </a:pPr>
             <a:r>
-              <a:rPr lang="en-US" sz="3000" b="1" dirty="0">
-                <a:solidFill>
-                  <a:srgbClr val="1E2761"/>
+              <a:rPr lang="en-US" sz="2700" b="1" dirty="0">
+                <a:solidFill>
+                  <a:srgbClr val="1C2A3A"/>
                 </a:solidFill>
                 <a:latin typeface="Cambria" pitchFamily="34" charset="0"/>
                 <a:ea typeface="Cambria" pitchFamily="34" charset="-122"/>
@@ -5164,7 +5011,7 @@
               </a:rPr>
               <a:t>Objective &amp; approach</a:t>
             </a:r>
-            <a:endParaRPr lang="en-US" sz="3000" dirty="0"/>
+            <a:endParaRPr lang="en-US" sz="2700" dirty="0"/>
           </a:p>
         </p:txBody>
       </p:sp>
@@ -5176,8 +5023,8 @@
         </p:nvSpPr>
         <p:spPr>
           <a:xfrm>
-            <a:off x="457200" y="932688"/>
-            <a:ext cx="11247120" cy="320040"/>
+            <a:off x="475488" y="950976"/>
+            <a:ext cx="11247120" cy="292608"/>
           </a:xfrm>
           <a:prstGeom prst="rect">
             <a:avLst/>
@@ -5193,9 +5040,9 @@
               <a:buNone/>
             </a:pPr>
             <a:r>
-              <a:rPr lang="en-US" sz="1400" i="1" dirty="0">
-                <a:solidFill>
-                  <a:srgbClr val="F96167"/>
+              <a:rPr lang="en-US" sz="1300" dirty="0">
+                <a:solidFill>
+                  <a:srgbClr val="6B7480"/>
                 </a:solidFill>
                 <a:latin typeface="Calibri" pitchFamily="34" charset="0"/>
                 <a:ea typeface="Calibri" pitchFamily="34" charset="-122"/>
@@ -5203,7 +5050,7 @@
               </a:rPr>
               <a:t>One prototype, many algorithms, the same evaluation protocol</a:t>
             </a:r>
-            <a:endParaRPr lang="en-US" sz="1400" dirty="0"/>
+            <a:endParaRPr lang="en-US" sz="1300" dirty="0"/>
           </a:p>
         </p:txBody>
       </p:sp>
@@ -5218,27 +5065,18 @@
             <a:off x="457200" y="1554480"/>
             <a:ext cx="3520440" cy="3383280"/>
           </a:xfrm>
-          <a:prstGeom prst="roundRect">
-            <a:avLst>
-              <a:gd name="adj" fmla="val 2162"/>
-            </a:avLst>
+          <a:prstGeom prst="rect">
+            <a:avLst/>
           </a:prstGeom>
           <a:solidFill>
             <a:srgbClr val="FFFFFF"/>
           </a:solidFill>
           <a:ln w="12700">
             <a:solidFill>
-              <a:srgbClr val="E2E7F2"/>
+              <a:srgbClr val="D7DCE3"/>
             </a:solidFill>
             <a:prstDash val="solid"/>
           </a:ln>
-          <a:effectLst>
-            <a:outerShdw sx="100000" sy="100000" kx="0" ky="0" algn="bl" rotWithShape="0" blurRad="88900" dist="25400" dir="5400000">
-              <a:srgbClr val="000000">
-                <a:alpha val="12000"/>
-              </a:srgbClr>
-            </a:outerShdw>
-          </a:effectLst>
         </p:spPr>
       </p:sp>
       <p:sp>
@@ -5256,7 +5094,7 @@
             <a:avLst/>
           </a:prstGeom>
           <a:solidFill>
-            <a:srgbClr val="1E2761"/>
+            <a:srgbClr val="1C2A3A"/>
           </a:solidFill>
           <a:ln/>
         </p:spPr>
@@ -5327,7 +5165,7 @@
             <a:r>
               <a:rPr lang="en-US" sz="1900" b="1" dirty="0">
                 <a:solidFill>
-                  <a:srgbClr val="1E2761"/>
+                  <a:srgbClr val="1C2A3A"/>
                 </a:solidFill>
                 <a:latin typeface="Cambria" pitchFamily="34" charset="0"/>
                 <a:ea typeface="Cambria" pitchFamily="34" charset="-122"/>
@@ -5366,7 +5204,7 @@
             <a:r>
               <a:rPr lang="en-US" sz="1400" dirty="0">
                 <a:solidFill>
-                  <a:srgbClr val="21294D"/>
+                  <a:srgbClr val="26303B"/>
                 </a:solidFill>
                 <a:latin typeface="Calibri" pitchFamily="34" charset="0"/>
                 <a:ea typeface="Calibri" pitchFamily="34" charset="-122"/>
@@ -5389,27 +5227,18 @@
             <a:off x="4251960" y="1554480"/>
             <a:ext cx="3520440" cy="3383280"/>
           </a:xfrm>
-          <a:prstGeom prst="roundRect">
-            <a:avLst>
-              <a:gd name="adj" fmla="val 2162"/>
-            </a:avLst>
+          <a:prstGeom prst="rect">
+            <a:avLst/>
           </a:prstGeom>
           <a:solidFill>
             <a:srgbClr val="FFFFFF"/>
           </a:solidFill>
           <a:ln w="12700">
             <a:solidFill>
-              <a:srgbClr val="E2E7F2"/>
+              <a:srgbClr val="D7DCE3"/>
             </a:solidFill>
             <a:prstDash val="solid"/>
           </a:ln>
-          <a:effectLst>
-            <a:outerShdw sx="100000" sy="100000" kx="0" ky="0" algn="bl" rotWithShape="0" blurRad="88900" dist="25400" dir="5400000">
-              <a:srgbClr val="000000">
-                <a:alpha val="12000"/>
-              </a:srgbClr>
-            </a:outerShdw>
-          </a:effectLst>
         </p:spPr>
       </p:sp>
       <p:sp>
@@ -5427,7 +5256,7 @@
             <a:avLst/>
           </a:prstGeom>
           <a:solidFill>
-            <a:srgbClr val="1E2761"/>
+            <a:srgbClr val="1C2A3A"/>
           </a:solidFill>
           <a:ln/>
         </p:spPr>
@@ -5498,7 +5327,7 @@
             <a:r>
               <a:rPr lang="en-US" sz="1900" b="1" dirty="0">
                 <a:solidFill>
-                  <a:srgbClr val="1E2761"/>
+                  <a:srgbClr val="1C2A3A"/>
                 </a:solidFill>
                 <a:latin typeface="Cambria" pitchFamily="34" charset="0"/>
                 <a:ea typeface="Cambria" pitchFamily="34" charset="-122"/>
@@ -5537,7 +5366,7 @@
             <a:r>
               <a:rPr lang="en-US" sz="1400" dirty="0">
                 <a:solidFill>
-                  <a:srgbClr val="21294D"/>
+                  <a:srgbClr val="26303B"/>
                 </a:solidFill>
                 <a:latin typeface="Calibri" pitchFamily="34" charset="0"/>
                 <a:ea typeface="Calibri" pitchFamily="34" charset="-122"/>
@@ -5560,27 +5389,18 @@
             <a:off x="8046720" y="1554480"/>
             <a:ext cx="3520440" cy="3383280"/>
           </a:xfrm>
-          <a:prstGeom prst="roundRect">
-            <a:avLst>
-              <a:gd name="adj" fmla="val 2162"/>
-            </a:avLst>
+          <a:prstGeom prst="rect">
+            <a:avLst/>
           </a:prstGeom>
           <a:solidFill>
             <a:srgbClr val="FFFFFF"/>
           </a:solidFill>
           <a:ln w="12700">
             <a:solidFill>
-              <a:srgbClr val="E2E7F2"/>
+              <a:srgbClr val="D7DCE3"/>
             </a:solidFill>
             <a:prstDash val="solid"/>
           </a:ln>
-          <a:effectLst>
-            <a:outerShdw sx="100000" sy="100000" kx="0" ky="0" algn="bl" rotWithShape="0" blurRad="88900" dist="25400" dir="5400000">
-              <a:srgbClr val="000000">
-                <a:alpha val="12000"/>
-              </a:srgbClr>
-            </a:outerShdw>
-          </a:effectLst>
         </p:spPr>
       </p:sp>
       <p:sp>
@@ -5598,7 +5418,7 @@
             <a:avLst/>
           </a:prstGeom>
           <a:solidFill>
-            <a:srgbClr val="1E2761"/>
+            <a:srgbClr val="1C2A3A"/>
           </a:solidFill>
           <a:ln/>
         </p:spPr>
@@ -5669,7 +5489,7 @@
             <a:r>
               <a:rPr lang="en-US" sz="1900" b="1" dirty="0">
                 <a:solidFill>
-                  <a:srgbClr val="1E2761"/>
+                  <a:srgbClr val="1C2A3A"/>
                 </a:solidFill>
                 <a:latin typeface="Cambria" pitchFamily="34" charset="0"/>
                 <a:ea typeface="Cambria" pitchFamily="34" charset="-122"/>
@@ -5708,7 +5528,7 @@
             <a:r>
               <a:rPr lang="en-US" sz="1400" dirty="0">
                 <a:solidFill>
-                  <a:srgbClr val="21294D"/>
+                  <a:srgbClr val="26303B"/>
                 </a:solidFill>
                 <a:latin typeface="Calibri" pitchFamily="34" charset="0"/>
                 <a:ea typeface="Calibri" pitchFamily="34" charset="-122"/>
@@ -5747,7 +5567,7 @@
             <a:r>
               <a:rPr lang="en-US" sz="1400" i="1" dirty="0">
                 <a:solidFill>
-                  <a:srgbClr val="5B6586"/>
+                  <a:srgbClr val="6B7480"/>
                 </a:solidFill>
                 <a:latin typeface="Calibri" pitchFamily="34" charset="0"/>
                 <a:ea typeface="Calibri" pitchFamily="34" charset="-122"/>
@@ -5768,7 +5588,7 @@
         <p:spPr>
           <a:xfrm>
             <a:off x="457200" y="6473952"/>
-            <a:ext cx="7315200" cy="274320"/>
+            <a:ext cx="8229600" cy="274320"/>
           </a:xfrm>
           <a:prstGeom prst="rect">
             <a:avLst/>
@@ -5786,13 +5606,13 @@
             <a:r>
               <a:rPr lang="en-US" sz="900" dirty="0">
                 <a:solidFill>
-                  <a:srgbClr val="5B6586"/>
+                  <a:srgbClr val="6B7480"/>
                 </a:solidFill>
                 <a:latin typeface="Calibri" pitchFamily="34" charset="0"/>
                 <a:ea typeface="Calibri" pitchFamily="34" charset="-122"/>
                 <a:cs typeface="Calibri" pitchFamily="34" charset="-120"/>
               </a:rPr>
-              <a:t>Recommender Systems · Individual Project</a:t>
+              <a:t>Recommender Systems — Individual Project</a:t>
             </a:r>
             <a:endParaRPr lang="en-US" sz="900" dirty="0"/>
           </a:p>
@@ -5825,7 +5645,7 @@
             <a:r>
               <a:rPr lang="en-US" sz="900" dirty="0">
                 <a:solidFill>
-                  <a:srgbClr val="5B6586"/>
+                  <a:srgbClr val="6B7480"/>
                 </a:solidFill>
                 <a:latin typeface="Calibri" pitchFamily="34" charset="0"/>
                 <a:ea typeface="Calibri" pitchFamily="34" charset="-122"/>
@@ -5877,8 +5697,8 @@
         </p:nvSpPr>
         <p:spPr>
           <a:xfrm>
-            <a:off x="457200" y="320040"/>
-            <a:ext cx="11247120" cy="640080"/>
+            <a:off x="457200" y="365760"/>
+            <a:ext cx="11247120" cy="603504"/>
           </a:xfrm>
           <a:prstGeom prst="rect">
             <a:avLst/>
@@ -5894,9 +5714,9 @@
               <a:buNone/>
             </a:pPr>
             <a:r>
-              <a:rPr lang="en-US" sz="3000" b="1" dirty="0">
-                <a:solidFill>
-                  <a:srgbClr val="1E2761"/>
+              <a:rPr lang="en-US" sz="2700" b="1" dirty="0">
+                <a:solidFill>
+                  <a:srgbClr val="1C2A3A"/>
                 </a:solidFill>
                 <a:latin typeface="Cambria" pitchFamily="34" charset="0"/>
                 <a:ea typeface="Cambria" pitchFamily="34" charset="-122"/>
@@ -5904,7 +5724,7 @@
               </a:rPr>
               <a:t>Dataset &amp; exploratory analysis</a:t>
             </a:r>
-            <a:endParaRPr lang="en-US" sz="3000" dirty="0"/>
+            <a:endParaRPr lang="en-US" sz="2700" dirty="0"/>
           </a:p>
         </p:txBody>
       </p:sp>
@@ -5916,8 +5736,8 @@
         </p:nvSpPr>
         <p:spPr>
           <a:xfrm>
-            <a:off x="457200" y="932688"/>
-            <a:ext cx="11247120" cy="320040"/>
+            <a:off x="475488" y="950976"/>
+            <a:ext cx="11247120" cy="292608"/>
           </a:xfrm>
           <a:prstGeom prst="rect">
             <a:avLst/>
@@ -5933,9 +5753,9 @@
               <a:buNone/>
             </a:pPr>
             <a:r>
-              <a:rPr lang="en-US" sz="1400" i="1" dirty="0">
-                <a:solidFill>
-                  <a:srgbClr val="F96167"/>
+              <a:rPr lang="en-US" sz="1300" dirty="0">
+                <a:solidFill>
+                  <a:srgbClr val="6B7480"/>
                 </a:solidFill>
                 <a:latin typeface="Calibri" pitchFamily="34" charset="0"/>
                 <a:ea typeface="Calibri" pitchFamily="34" charset="-122"/>
@@ -5943,7 +5763,7 @@
               </a:rPr>
               <a:t>MovieLens 32M · half-star ratings 0.5–5 · genre metadata</a:t>
             </a:r>
-            <a:endParaRPr lang="en-US" sz="1400" dirty="0"/>
+            <a:endParaRPr lang="en-US" sz="1300" dirty="0"/>
           </a:p>
         </p:txBody>
       </p:sp>
@@ -5958,27 +5778,18 @@
             <a:off x="457200" y="1508760"/>
             <a:ext cx="2651760" cy="1280160"/>
           </a:xfrm>
-          <a:prstGeom prst="roundRect">
-            <a:avLst>
-              <a:gd name="adj" fmla="val 5714"/>
-            </a:avLst>
+          <a:prstGeom prst="rect">
+            <a:avLst/>
           </a:prstGeom>
           <a:solidFill>
-            <a:srgbClr val="F4F6FB"/>
+            <a:srgbClr val="F4F5F7"/>
           </a:solidFill>
           <a:ln w="12700">
             <a:solidFill>
-              <a:srgbClr val="E2E7F2"/>
+              <a:srgbClr val="D7DCE3"/>
             </a:solidFill>
             <a:prstDash val="solid"/>
           </a:ln>
-          <a:effectLst>
-            <a:outerShdw sx="100000" sy="100000" kx="0" ky="0" algn="bl" rotWithShape="0" blurRad="88900" dist="25400" dir="5400000">
-              <a:srgbClr val="000000">
-                <a:alpha val="12000"/>
-              </a:srgbClr>
-            </a:outerShdw>
-          </a:effectLst>
         </p:spPr>
       </p:sp>
       <p:sp>
@@ -6008,7 +5819,7 @@
             <a:r>
               <a:rPr lang="en-US" sz="2600" b="1" dirty="0">
                 <a:solidFill>
-                  <a:srgbClr val="1E2761"/>
+                  <a:srgbClr val="1C2A3A"/>
                 </a:solidFill>
                 <a:latin typeface="Cambria" pitchFamily="34" charset="0"/>
                 <a:ea typeface="Cambria" pitchFamily="34" charset="-122"/>
@@ -6047,7 +5858,7 @@
             <a:r>
               <a:rPr lang="en-US" sz="1300" dirty="0">
                 <a:solidFill>
-                  <a:srgbClr val="5B6586"/>
+                  <a:srgbClr val="6B7480"/>
                 </a:solidFill>
                 <a:latin typeface="Calibri" pitchFamily="34" charset="0"/>
                 <a:ea typeface="Calibri" pitchFamily="34" charset="-122"/>
@@ -6070,27 +5881,18 @@
             <a:off x="3337560" y="1508760"/>
             <a:ext cx="2651760" cy="1280160"/>
           </a:xfrm>
-          <a:prstGeom prst="roundRect">
-            <a:avLst>
-              <a:gd name="adj" fmla="val 5714"/>
-            </a:avLst>
+          <a:prstGeom prst="rect">
+            <a:avLst/>
           </a:prstGeom>
           <a:solidFill>
-            <a:srgbClr val="F4F6FB"/>
+            <a:srgbClr val="F4F5F7"/>
           </a:solidFill>
           <a:ln w="12700">
             <a:solidFill>
-              <a:srgbClr val="E2E7F2"/>
+              <a:srgbClr val="D7DCE3"/>
             </a:solidFill>
             <a:prstDash val="solid"/>
           </a:ln>
-          <a:effectLst>
-            <a:outerShdw sx="100000" sy="100000" kx="0" ky="0" algn="bl" rotWithShape="0" blurRad="88900" dist="25400" dir="5400000">
-              <a:srgbClr val="000000">
-                <a:alpha val="12000"/>
-              </a:srgbClr>
-            </a:outerShdw>
-          </a:effectLst>
         </p:spPr>
       </p:sp>
       <p:sp>
@@ -6120,7 +5922,7 @@
             <a:r>
               <a:rPr lang="en-US" sz="2600" b="1" dirty="0">
                 <a:solidFill>
-                  <a:srgbClr val="1E2761"/>
+                  <a:srgbClr val="1C2A3A"/>
                 </a:solidFill>
                 <a:latin typeface="Cambria" pitchFamily="34" charset="0"/>
                 <a:ea typeface="Cambria" pitchFamily="34" charset="-122"/>
@@ -6159,7 +5961,7 @@
             <a:r>
               <a:rPr lang="en-US" sz="1300" dirty="0">
                 <a:solidFill>
-                  <a:srgbClr val="5B6586"/>
+                  <a:srgbClr val="6B7480"/>
                 </a:solidFill>
                 <a:latin typeface="Calibri" pitchFamily="34" charset="0"/>
                 <a:ea typeface="Calibri" pitchFamily="34" charset="-122"/>
@@ -6182,27 +5984,18 @@
             <a:off x="6217920" y="1508760"/>
             <a:ext cx="2651760" cy="1280160"/>
           </a:xfrm>
-          <a:prstGeom prst="roundRect">
-            <a:avLst>
-              <a:gd name="adj" fmla="val 5714"/>
-            </a:avLst>
+          <a:prstGeom prst="rect">
+            <a:avLst/>
           </a:prstGeom>
           <a:solidFill>
-            <a:srgbClr val="F4F6FB"/>
+            <a:srgbClr val="F4F5F7"/>
           </a:solidFill>
           <a:ln w="12700">
             <a:solidFill>
-              <a:srgbClr val="E2E7F2"/>
+              <a:srgbClr val="D7DCE3"/>
             </a:solidFill>
             <a:prstDash val="solid"/>
           </a:ln>
-          <a:effectLst>
-            <a:outerShdw sx="100000" sy="100000" kx="0" ky="0" algn="bl" rotWithShape="0" blurRad="88900" dist="25400" dir="5400000">
-              <a:srgbClr val="000000">
-                <a:alpha val="12000"/>
-              </a:srgbClr>
-            </a:outerShdw>
-          </a:effectLst>
         </p:spPr>
       </p:sp>
       <p:sp>
@@ -6232,7 +6025,7 @@
             <a:r>
               <a:rPr lang="en-US" sz="2600" b="1" dirty="0">
                 <a:solidFill>
-                  <a:srgbClr val="1E2761"/>
+                  <a:srgbClr val="1C2A3A"/>
                 </a:solidFill>
                 <a:latin typeface="Cambria" pitchFamily="34" charset="0"/>
                 <a:ea typeface="Cambria" pitchFamily="34" charset="-122"/>
@@ -6271,7 +6064,7 @@
             <a:r>
               <a:rPr lang="en-US" sz="1300" dirty="0">
                 <a:solidFill>
-                  <a:srgbClr val="5B6586"/>
+                  <a:srgbClr val="6B7480"/>
                 </a:solidFill>
                 <a:latin typeface="Calibri" pitchFamily="34" charset="0"/>
                 <a:ea typeface="Calibri" pitchFamily="34" charset="-122"/>
@@ -6294,27 +6087,18 @@
             <a:off x="9098280" y="1508760"/>
             <a:ext cx="2651760" cy="1280160"/>
           </a:xfrm>
-          <a:prstGeom prst="roundRect">
-            <a:avLst>
-              <a:gd name="adj" fmla="val 5714"/>
-            </a:avLst>
+          <a:prstGeom prst="rect">
+            <a:avLst/>
           </a:prstGeom>
           <a:solidFill>
-            <a:srgbClr val="F4F6FB"/>
+            <a:srgbClr val="F4F5F7"/>
           </a:solidFill>
           <a:ln w="12700">
             <a:solidFill>
-              <a:srgbClr val="E2E7F2"/>
+              <a:srgbClr val="D7DCE3"/>
             </a:solidFill>
             <a:prstDash val="solid"/>
           </a:ln>
-          <a:effectLst>
-            <a:outerShdw sx="100000" sy="100000" kx="0" ky="0" algn="bl" rotWithShape="0" blurRad="88900" dist="25400" dir="5400000">
-              <a:srgbClr val="000000">
-                <a:alpha val="12000"/>
-              </a:srgbClr>
-            </a:outerShdw>
-          </a:effectLst>
         </p:spPr>
       </p:sp>
       <p:sp>
@@ -6344,7 +6128,7 @@
             <a:r>
               <a:rPr lang="en-US" sz="2600" b="1" dirty="0">
                 <a:solidFill>
-                  <a:srgbClr val="1E2761"/>
+                  <a:srgbClr val="1C2A3A"/>
                 </a:solidFill>
                 <a:latin typeface="Cambria" pitchFamily="34" charset="0"/>
                 <a:ea typeface="Cambria" pitchFamily="34" charset="-122"/>
@@ -6383,7 +6167,7 @@
             <a:r>
               <a:rPr lang="en-US" sz="1300" dirty="0">
                 <a:solidFill>
-                  <a:srgbClr val="5B6586"/>
+                  <a:srgbClr val="6B7480"/>
                 </a:solidFill>
                 <a:latin typeface="Calibri" pitchFamily="34" charset="0"/>
                 <a:ea typeface="Calibri" pitchFamily="34" charset="-122"/>
@@ -6454,27 +6238,18 @@
             <a:off x="9052560" y="3017520"/>
             <a:ext cx="2743200" cy="2606040"/>
           </a:xfrm>
-          <a:prstGeom prst="roundRect">
-            <a:avLst>
-              <a:gd name="adj" fmla="val 2807"/>
-            </a:avLst>
+          <a:prstGeom prst="rect">
+            <a:avLst/>
           </a:prstGeom>
           <a:solidFill>
-            <a:srgbClr val="F4F6FB"/>
+            <a:srgbClr val="F4F5F7"/>
           </a:solidFill>
           <a:ln w="12700">
             <a:solidFill>
-              <a:srgbClr val="E2E7F2"/>
+              <a:srgbClr val="D7DCE3"/>
             </a:solidFill>
             <a:prstDash val="solid"/>
           </a:ln>
-          <a:effectLst>
-            <a:outerShdw sx="100000" sy="100000" kx="0" ky="0" algn="bl" rotWithShape="0" blurRad="88900" dist="25400" dir="5400000">
-              <a:srgbClr val="000000">
-                <a:alpha val="12000"/>
-              </a:srgbClr>
-            </a:outerShdw>
-          </a:effectLst>
         </p:spPr>
       </p:sp>
       <p:sp>
@@ -6504,7 +6279,7 @@
             <a:r>
               <a:rPr lang="en-US" sz="1500" b="1" dirty="0">
                 <a:solidFill>
-                  <a:srgbClr val="1E2761"/>
+                  <a:srgbClr val="1C2A3A"/>
                 </a:solidFill>
                 <a:latin typeface="Cambria" pitchFamily="34" charset="0"/>
                 <a:ea typeface="Cambria" pitchFamily="34" charset="-122"/>
@@ -6547,7 +6322,7 @@
             <a:r>
               <a:rPr lang="en-US" sz="1250" dirty="0">
                 <a:solidFill>
-                  <a:srgbClr val="21294D"/>
+                  <a:srgbClr val="26303B"/>
                 </a:solidFill>
                 <a:latin typeface="Calibri" pitchFamily="34" charset="0"/>
                 <a:ea typeface="Calibri" pitchFamily="34" charset="-122"/>
@@ -6568,7 +6343,7 @@
             <a:r>
               <a:rPr lang="en-US" sz="1250" dirty="0">
                 <a:solidFill>
-                  <a:srgbClr val="21294D"/>
+                  <a:srgbClr val="26303B"/>
                 </a:solidFill>
                 <a:latin typeface="Calibri" pitchFamily="34" charset="0"/>
                 <a:ea typeface="Calibri" pitchFamily="34" charset="-122"/>
@@ -6589,7 +6364,7 @@
             <a:r>
               <a:rPr lang="en-US" sz="1250" dirty="0">
                 <a:solidFill>
-                  <a:srgbClr val="21294D"/>
+                  <a:srgbClr val="26303B"/>
                 </a:solidFill>
                 <a:latin typeface="Calibri" pitchFamily="34" charset="0"/>
                 <a:ea typeface="Calibri" pitchFamily="34" charset="-122"/>
@@ -6610,7 +6385,7 @@
             <a:r>
               <a:rPr lang="en-US" sz="1250" dirty="0">
                 <a:solidFill>
-                  <a:srgbClr val="21294D"/>
+                  <a:srgbClr val="26303B"/>
                 </a:solidFill>
                 <a:latin typeface="Calibri" pitchFamily="34" charset="0"/>
                 <a:ea typeface="Calibri" pitchFamily="34" charset="-122"/>
@@ -6631,7 +6406,7 @@
         <p:spPr>
           <a:xfrm>
             <a:off x="457200" y="6473952"/>
-            <a:ext cx="7315200" cy="274320"/>
+            <a:ext cx="8229600" cy="274320"/>
           </a:xfrm>
           <a:prstGeom prst="rect">
             <a:avLst/>
@@ -6649,13 +6424,13 @@
             <a:r>
               <a:rPr lang="en-US" sz="900" dirty="0">
                 <a:solidFill>
-                  <a:srgbClr val="5B6586"/>
+                  <a:srgbClr val="6B7480"/>
                 </a:solidFill>
                 <a:latin typeface="Calibri" pitchFamily="34" charset="0"/>
                 <a:ea typeface="Calibri" pitchFamily="34" charset="-122"/>
                 <a:cs typeface="Calibri" pitchFamily="34" charset="-120"/>
               </a:rPr>
-              <a:t>Recommender Systems · Individual Project</a:t>
+              <a:t>Recommender Systems — Individual Project</a:t>
             </a:r>
             <a:endParaRPr lang="en-US" sz="900" dirty="0"/>
           </a:p>
@@ -6688,7 +6463,7 @@
             <a:r>
               <a:rPr lang="en-US" sz="900" dirty="0">
                 <a:solidFill>
-                  <a:srgbClr val="5B6586"/>
+                  <a:srgbClr val="6B7480"/>
                 </a:solidFill>
                 <a:latin typeface="Calibri" pitchFamily="34" charset="0"/>
                 <a:ea typeface="Calibri" pitchFamily="34" charset="-122"/>
@@ -6740,8 +6515,8 @@
         </p:nvSpPr>
         <p:spPr>
           <a:xfrm>
-            <a:off x="457200" y="320040"/>
-            <a:ext cx="11247120" cy="640080"/>
+            <a:off x="457200" y="365760"/>
+            <a:ext cx="11247120" cy="603504"/>
           </a:xfrm>
           <a:prstGeom prst="rect">
             <a:avLst/>
@@ -6757,9 +6532,9 @@
               <a:buNone/>
             </a:pPr>
             <a:r>
-              <a:rPr lang="en-US" sz="3000" b="1" dirty="0">
-                <a:solidFill>
-                  <a:srgbClr val="1E2761"/>
+              <a:rPr lang="en-US" sz="2700" b="1" dirty="0">
+                <a:solidFill>
+                  <a:srgbClr val="1C2A3A"/>
                 </a:solidFill>
                 <a:latin typeface="Cambria" pitchFamily="34" charset="0"/>
                 <a:ea typeface="Cambria" pitchFamily="34" charset="-122"/>
@@ -6767,7 +6542,7 @@
               </a:rPr>
               <a:t>Preprocessing &amp; evaluation protocol</a:t>
             </a:r>
-            <a:endParaRPr lang="en-US" sz="3000" dirty="0"/>
+            <a:endParaRPr lang="en-US" sz="2700" dirty="0"/>
           </a:p>
         </p:txBody>
       </p:sp>
@@ -6779,8 +6554,8 @@
         </p:nvSpPr>
         <p:spPr>
           <a:xfrm>
-            <a:off x="457200" y="932688"/>
-            <a:ext cx="11247120" cy="320040"/>
+            <a:off x="475488" y="950976"/>
+            <a:ext cx="11247120" cy="292608"/>
           </a:xfrm>
           <a:prstGeom prst="rect">
             <a:avLst/>
@@ -6796,9 +6571,9 @@
               <a:buNone/>
             </a:pPr>
             <a:r>
-              <a:rPr lang="en-US" sz="1400" i="1" dirty="0">
-                <a:solidFill>
-                  <a:srgbClr val="F96167"/>
+              <a:rPr lang="en-US" sz="1300" dirty="0">
+                <a:solidFill>
+                  <a:srgbClr val="6B7480"/>
                 </a:solidFill>
                 <a:latin typeface="Calibri" pitchFamily="34" charset="0"/>
                 <a:ea typeface="Calibri" pitchFamily="34" charset="-122"/>
@@ -6806,7 +6581,7 @@
               </a:rPr>
               <a:t>Same pipeline for every model — fair comparison</a:t>
             </a:r>
-            <a:endParaRPr lang="en-US" sz="1400" dirty="0"/>
+            <a:endParaRPr lang="en-US" sz="1300" dirty="0"/>
           </a:p>
         </p:txBody>
       </p:sp>
@@ -6821,27 +6596,18 @@
             <a:off x="457200" y="1554480"/>
             <a:ext cx="5486400" cy="3931920"/>
           </a:xfrm>
-          <a:prstGeom prst="roundRect">
-            <a:avLst>
-              <a:gd name="adj" fmla="val 1860"/>
-            </a:avLst>
+          <a:prstGeom prst="rect">
+            <a:avLst/>
           </a:prstGeom>
           <a:solidFill>
             <a:srgbClr val="FFFFFF"/>
           </a:solidFill>
           <a:ln w="12700">
             <a:solidFill>
-              <a:srgbClr val="E2E7F2"/>
+              <a:srgbClr val="D7DCE3"/>
             </a:solidFill>
             <a:prstDash val="solid"/>
           </a:ln>
-          <a:effectLst>
-            <a:outerShdw sx="100000" sy="100000" kx="0" ky="0" algn="bl" rotWithShape="0" blurRad="88900" dist="25400" dir="5400000">
-              <a:srgbClr val="000000">
-                <a:alpha val="12000"/>
-              </a:srgbClr>
-            </a:outerShdw>
-          </a:effectLst>
         </p:spPr>
       </p:sp>
       <p:sp>
@@ -6871,7 +6637,7 @@
             <a:r>
               <a:rPr lang="en-US" sz="1800" b="1" dirty="0">
                 <a:solidFill>
-                  <a:srgbClr val="1E2761"/>
+                  <a:srgbClr val="1C2A3A"/>
                 </a:solidFill>
                 <a:latin typeface="Cambria" pitchFamily="34" charset="0"/>
                 <a:ea typeface="Cambria" pitchFamily="34" charset="-122"/>
@@ -6914,13 +6680,13 @@
             <a:r>
               <a:rPr lang="en-US" sz="1400" dirty="0">
                 <a:solidFill>
-                  <a:srgbClr val="21294D"/>
+                  <a:srgbClr val="26303B"/>
                 </a:solidFill>
                 <a:latin typeface="Calibri" pitchFamily="34" charset="0"/>
                 <a:ea typeface="Calibri" pitchFamily="34" charset="-122"/>
                 <a:cs typeface="Calibri" pitchFamily="34" charset="-120"/>
               </a:rPr>
-              <a:t>Cap catalog to 2,000 most-popular items + k-core (≥100 / ≥20 ratings)</a:t>
+              <a:t>Cap catalog to 3,000 most-popular items + k-core (≥100 / ≥20 ratings)</a:t>
             </a:r>
             <a:endParaRPr lang="en-US" sz="1400" dirty="0"/>
           </a:p>
@@ -6935,7 +6701,7 @@
             <a:r>
               <a:rPr lang="en-US" sz="1400" dirty="0">
                 <a:solidFill>
-                  <a:srgbClr val="21294D"/>
+                  <a:srgbClr val="26303B"/>
                 </a:solidFill>
                 <a:latin typeface="Calibri" pitchFamily="34" charset="0"/>
                 <a:ea typeface="Calibri" pitchFamily="34" charset="-122"/>
@@ -6956,7 +6722,7 @@
             <a:r>
               <a:rPr lang="en-US" sz="1400" dirty="0">
                 <a:solidFill>
-                  <a:srgbClr val="21294D"/>
+                  <a:srgbClr val="26303B"/>
                 </a:solidFill>
                 <a:latin typeface="Calibri" pitchFamily="34" charset="0"/>
                 <a:ea typeface="Calibri" pitchFamily="34" charset="-122"/>
@@ -6977,7 +6743,7 @@
             <a:r>
               <a:rPr lang="en-US" sz="1400" dirty="0">
                 <a:solidFill>
-                  <a:srgbClr val="21294D"/>
+                  <a:srgbClr val="26303B"/>
                 </a:solidFill>
                 <a:latin typeface="Calibri" pitchFamily="34" charset="0"/>
                 <a:ea typeface="Calibri" pitchFamily="34" charset="-122"/>
@@ -7000,27 +6766,18 @@
             <a:off x="6217920" y="1554480"/>
             <a:ext cx="5486400" cy="3931920"/>
           </a:xfrm>
-          <a:prstGeom prst="roundRect">
-            <a:avLst>
-              <a:gd name="adj" fmla="val 1860"/>
-            </a:avLst>
+          <a:prstGeom prst="rect">
+            <a:avLst/>
           </a:prstGeom>
           <a:solidFill>
             <a:srgbClr val="FFFFFF"/>
           </a:solidFill>
           <a:ln w="12700">
             <a:solidFill>
-              <a:srgbClr val="E2E7F2"/>
+              <a:srgbClr val="D7DCE3"/>
             </a:solidFill>
             <a:prstDash val="solid"/>
           </a:ln>
-          <a:effectLst>
-            <a:outerShdw sx="100000" sy="100000" kx="0" ky="0" algn="bl" rotWithShape="0" blurRad="88900" dist="25400" dir="5400000">
-              <a:srgbClr val="000000">
-                <a:alpha val="12000"/>
-              </a:srgbClr>
-            </a:outerShdw>
-          </a:effectLst>
         </p:spPr>
       </p:sp>
       <p:sp>
@@ -7050,7 +6807,7 @@
             <a:r>
               <a:rPr lang="en-US" sz="1800" b="1" dirty="0">
                 <a:solidFill>
-                  <a:srgbClr val="1E2761"/>
+                  <a:srgbClr val="1C2A3A"/>
                 </a:solidFill>
                 <a:latin typeface="Cambria" pitchFamily="34" charset="0"/>
                 <a:ea typeface="Cambria" pitchFamily="34" charset="-122"/>
@@ -7093,7 +6850,7 @@
             <a:r>
               <a:rPr lang="en-US" sz="1450" dirty="0">
                 <a:solidFill>
-                  <a:srgbClr val="21294D"/>
+                  <a:srgbClr val="26303B"/>
                 </a:solidFill>
                 <a:latin typeface="Calibri" pitchFamily="34" charset="0"/>
                 <a:ea typeface="Calibri" pitchFamily="34" charset="-122"/>
@@ -7114,7 +6871,7 @@
             <a:r>
               <a:rPr lang="en-US" sz="1450" dirty="0">
                 <a:solidFill>
-                  <a:srgbClr val="21294D"/>
+                  <a:srgbClr val="26303B"/>
                 </a:solidFill>
                 <a:latin typeface="Calibri" pitchFamily="34" charset="0"/>
                 <a:ea typeface="Calibri" pitchFamily="34" charset="-122"/>
@@ -7135,7 +6892,7 @@
             <a:r>
               <a:rPr lang="en-US" sz="1450" dirty="0">
                 <a:solidFill>
-                  <a:srgbClr val="21294D"/>
+                  <a:srgbClr val="26303B"/>
                 </a:solidFill>
                 <a:latin typeface="Calibri" pitchFamily="34" charset="0"/>
                 <a:ea typeface="Calibri" pitchFamily="34" charset="-122"/>
@@ -7156,7 +6913,7 @@
             <a:r>
               <a:rPr lang="en-US" sz="1450" dirty="0">
                 <a:solidFill>
-                  <a:srgbClr val="21294D"/>
+                  <a:srgbClr val="26303B"/>
                 </a:solidFill>
                 <a:latin typeface="Calibri" pitchFamily="34" charset="0"/>
                 <a:ea typeface="Calibri" pitchFamily="34" charset="-122"/>
@@ -7177,7 +6934,7 @@
             <a:r>
               <a:rPr lang="en-US" sz="1450" dirty="0">
                 <a:solidFill>
-                  <a:srgbClr val="21294D"/>
+                  <a:srgbClr val="26303B"/>
                 </a:solidFill>
                 <a:latin typeface="Calibri" pitchFamily="34" charset="0"/>
                 <a:ea typeface="Calibri" pitchFamily="34" charset="-122"/>
@@ -7198,7 +6955,7 @@
         <p:spPr>
           <a:xfrm>
             <a:off x="457200" y="6473952"/>
-            <a:ext cx="7315200" cy="274320"/>
+            <a:ext cx="8229600" cy="274320"/>
           </a:xfrm>
           <a:prstGeom prst="rect">
             <a:avLst/>
@@ -7216,13 +6973,13 @@
             <a:r>
               <a:rPr lang="en-US" sz="900" dirty="0">
                 <a:solidFill>
-                  <a:srgbClr val="5B6586"/>
+                  <a:srgbClr val="6B7480"/>
                 </a:solidFill>
                 <a:latin typeface="Calibri" pitchFamily="34" charset="0"/>
                 <a:ea typeface="Calibri" pitchFamily="34" charset="-122"/>
                 <a:cs typeface="Calibri" pitchFamily="34" charset="-120"/>
               </a:rPr>
-              <a:t>Recommender Systems · Individual Project</a:t>
+              <a:t>Recommender Systems — Individual Project</a:t>
             </a:r>
             <a:endParaRPr lang="en-US" sz="900" dirty="0"/>
           </a:p>
@@ -7255,7 +7012,7 @@
             <a:r>
               <a:rPr lang="en-US" sz="900" dirty="0">
                 <a:solidFill>
-                  <a:srgbClr val="5B6586"/>
+                  <a:srgbClr val="6B7480"/>
                 </a:solidFill>
                 <a:latin typeface="Calibri" pitchFamily="34" charset="0"/>
                 <a:ea typeface="Calibri" pitchFamily="34" charset="-122"/>
@@ -7307,8 +7064,8 @@
         </p:nvSpPr>
         <p:spPr>
           <a:xfrm>
-            <a:off x="457200" y="320040"/>
-            <a:ext cx="11247120" cy="640080"/>
+            <a:off x="457200" y="365760"/>
+            <a:ext cx="11247120" cy="603504"/>
           </a:xfrm>
           <a:prstGeom prst="rect">
             <a:avLst/>
@@ -7324,9 +7081,9 @@
               <a:buNone/>
             </a:pPr>
             <a:r>
-              <a:rPr lang="en-US" sz="3000" b="1" dirty="0">
-                <a:solidFill>
-                  <a:srgbClr val="1E2761"/>
+              <a:rPr lang="en-US" sz="2700" b="1" dirty="0">
+                <a:solidFill>
+                  <a:srgbClr val="1C2A3A"/>
                 </a:solidFill>
                 <a:latin typeface="Cambria" pitchFamily="34" charset="0"/>
                 <a:ea typeface="Cambria" pitchFamily="34" charset="-122"/>
@@ -7334,7 +7091,7 @@
               </a:rPr>
               <a:t>Algorithms implemented</a:t>
             </a:r>
-            <a:endParaRPr lang="en-US" sz="3000" dirty="0"/>
+            <a:endParaRPr lang="en-US" sz="2700" dirty="0"/>
           </a:p>
         </p:txBody>
       </p:sp>
@@ -7346,8 +7103,8 @@
         </p:nvSpPr>
         <p:spPr>
           <a:xfrm>
-            <a:off x="457200" y="932688"/>
-            <a:ext cx="11247120" cy="320040"/>
+            <a:off x="475488" y="950976"/>
+            <a:ext cx="11247120" cy="292608"/>
           </a:xfrm>
           <a:prstGeom prst="rect">
             <a:avLst/>
@@ -7363,9 +7120,9 @@
               <a:buNone/>
             </a:pPr>
             <a:r>
-              <a:rPr lang="en-US" sz="1400" i="1" dirty="0">
-                <a:solidFill>
-                  <a:srgbClr val="F96167"/>
+              <a:rPr lang="en-US" sz="1300" dirty="0">
+                <a:solidFill>
+                  <a:srgbClr val="6B7480"/>
                 </a:solidFill>
                 <a:latin typeface="Calibri" pitchFamily="34" charset="0"/>
                 <a:ea typeface="Calibri" pitchFamily="34" charset="-122"/>
@@ -7373,7 +7130,7 @@
               </a:rPr>
               <a:t>Nine models in code, from simple baselines to latent factors</a:t>
             </a:r>
-            <a:endParaRPr lang="en-US" sz="1400" dirty="0"/>
+            <a:endParaRPr lang="en-US" sz="1300" dirty="0"/>
           </a:p>
         </p:txBody>
       </p:sp>
@@ -7388,27 +7145,18 @@
             <a:off x="457200" y="1554480"/>
             <a:ext cx="2651760" cy="1737360"/>
           </a:xfrm>
-          <a:prstGeom prst="roundRect">
-            <a:avLst>
-              <a:gd name="adj" fmla="val 4211"/>
-            </a:avLst>
+          <a:prstGeom prst="rect">
+            <a:avLst/>
           </a:prstGeom>
           <a:solidFill>
             <a:srgbClr val="FFFFFF"/>
           </a:solidFill>
           <a:ln w="12700">
             <a:solidFill>
-              <a:srgbClr val="E2E7F2"/>
+              <a:srgbClr val="D7DCE3"/>
             </a:solidFill>
             <a:prstDash val="solid"/>
           </a:ln>
-          <a:effectLst>
-            <a:outerShdw sx="100000" sy="100000" kx="0" ky="0" algn="bl" rotWithShape="0" blurRad="88900" dist="25400" dir="5400000">
-              <a:srgbClr val="000000">
-                <a:alpha val="12000"/>
-              </a:srgbClr>
-            </a:outerShdw>
-          </a:effectLst>
         </p:spPr>
       </p:sp>
       <p:sp>
@@ -7426,7 +7174,7 @@
             <a:avLst/>
           </a:prstGeom>
           <a:solidFill>
-            <a:srgbClr val="1E2761"/>
+            <a:srgbClr val="1C2A3A"/>
           </a:solidFill>
           <a:ln/>
         </p:spPr>
@@ -7458,7 +7206,7 @@
             <a:r>
               <a:rPr lang="en-US" sz="1500" b="1" dirty="0">
                 <a:solidFill>
-                  <a:srgbClr val="1E2761"/>
+                  <a:srgbClr val="1C2A3A"/>
                 </a:solidFill>
                 <a:latin typeface="Cambria" pitchFamily="34" charset="0"/>
                 <a:ea typeface="Cambria" pitchFamily="34" charset="-122"/>
@@ -7497,7 +7245,7 @@
             <a:r>
               <a:rPr lang="en-US" sz="1150" dirty="0">
                 <a:solidFill>
-                  <a:srgbClr val="21294D"/>
+                  <a:srgbClr val="26303B"/>
                 </a:solidFill>
                 <a:latin typeface="Calibri" pitchFamily="34" charset="0"/>
                 <a:ea typeface="Calibri" pitchFamily="34" charset="-122"/>
@@ -7520,27 +7268,18 @@
             <a:off x="3337560" y="1554480"/>
             <a:ext cx="2651760" cy="1737360"/>
           </a:xfrm>
-          <a:prstGeom prst="roundRect">
-            <a:avLst>
-              <a:gd name="adj" fmla="val 4211"/>
-            </a:avLst>
+          <a:prstGeom prst="rect">
+            <a:avLst/>
           </a:prstGeom>
           <a:solidFill>
             <a:srgbClr val="FFFFFF"/>
           </a:solidFill>
           <a:ln w="12700">
             <a:solidFill>
-              <a:srgbClr val="E2E7F2"/>
+              <a:srgbClr val="D7DCE3"/>
             </a:solidFill>
             <a:prstDash val="solid"/>
           </a:ln>
-          <a:effectLst>
-            <a:outerShdw sx="100000" sy="100000" kx="0" ky="0" algn="bl" rotWithShape="0" blurRad="88900" dist="25400" dir="5400000">
-              <a:srgbClr val="000000">
-                <a:alpha val="12000"/>
-              </a:srgbClr>
-            </a:outerShdw>
-          </a:effectLst>
         </p:spPr>
       </p:sp>
       <p:sp>
@@ -7558,7 +7297,7 @@
             <a:avLst/>
           </a:prstGeom>
           <a:solidFill>
-            <a:srgbClr val="1E2761"/>
+            <a:srgbClr val="1C2A3A"/>
           </a:solidFill>
           <a:ln/>
         </p:spPr>
@@ -7590,7 +7329,7 @@
             <a:r>
               <a:rPr lang="en-US" sz="1500" b="1" dirty="0">
                 <a:solidFill>
-                  <a:srgbClr val="1E2761"/>
+                  <a:srgbClr val="1C2A3A"/>
                 </a:solidFill>
                 <a:latin typeface="Cambria" pitchFamily="34" charset="0"/>
                 <a:ea typeface="Cambria" pitchFamily="34" charset="-122"/>
@@ -7629,7 +7368,7 @@
             <a:r>
               <a:rPr lang="en-US" sz="1150" dirty="0">
                 <a:solidFill>
-                  <a:srgbClr val="21294D"/>
+                  <a:srgbClr val="26303B"/>
                 </a:solidFill>
                 <a:latin typeface="Calibri" pitchFamily="34" charset="0"/>
                 <a:ea typeface="Calibri" pitchFamily="34" charset="-122"/>
@@ -7652,27 +7391,18 @@
             <a:off x="6217920" y="1554480"/>
             <a:ext cx="2651760" cy="1737360"/>
           </a:xfrm>
-          <a:prstGeom prst="roundRect">
-            <a:avLst>
-              <a:gd name="adj" fmla="val 4211"/>
-            </a:avLst>
+          <a:prstGeom prst="rect">
+            <a:avLst/>
           </a:prstGeom>
           <a:solidFill>
             <a:srgbClr val="FFFFFF"/>
           </a:solidFill>
           <a:ln w="12700">
             <a:solidFill>
-              <a:srgbClr val="E2E7F2"/>
+              <a:srgbClr val="D7DCE3"/>
             </a:solidFill>
             <a:prstDash val="solid"/>
           </a:ln>
-          <a:effectLst>
-            <a:outerShdw sx="100000" sy="100000" kx="0" ky="0" algn="bl" rotWithShape="0" blurRad="88900" dist="25400" dir="5400000">
-              <a:srgbClr val="000000">
-                <a:alpha val="12000"/>
-              </a:srgbClr>
-            </a:outerShdw>
-          </a:effectLst>
         </p:spPr>
       </p:sp>
       <p:sp>
@@ -7690,7 +7420,7 @@
             <a:avLst/>
           </a:prstGeom>
           <a:solidFill>
-            <a:srgbClr val="5B6586"/>
+            <a:srgbClr val="6B7480"/>
           </a:solidFill>
           <a:ln/>
         </p:spPr>
@@ -7722,7 +7452,7 @@
             <a:r>
               <a:rPr lang="en-US" sz="1500" b="1" dirty="0">
                 <a:solidFill>
-                  <a:srgbClr val="1E2761"/>
+                  <a:srgbClr val="1C2A3A"/>
                 </a:solidFill>
                 <a:latin typeface="Cambria" pitchFamily="34" charset="0"/>
                 <a:ea typeface="Cambria" pitchFamily="34" charset="-122"/>
@@ -7761,7 +7491,7 @@
             <a:r>
               <a:rPr lang="en-US" sz="1150" dirty="0">
                 <a:solidFill>
-                  <a:srgbClr val="21294D"/>
+                  <a:srgbClr val="26303B"/>
                 </a:solidFill>
                 <a:latin typeface="Calibri" pitchFamily="34" charset="0"/>
                 <a:ea typeface="Calibri" pitchFamily="34" charset="-122"/>
@@ -7784,27 +7514,18 @@
             <a:off x="9098280" y="1554480"/>
             <a:ext cx="2651760" cy="1737360"/>
           </a:xfrm>
-          <a:prstGeom prst="roundRect">
-            <a:avLst>
-              <a:gd name="adj" fmla="val 4211"/>
-            </a:avLst>
+          <a:prstGeom prst="rect">
+            <a:avLst/>
           </a:prstGeom>
           <a:solidFill>
             <a:srgbClr val="FFFFFF"/>
           </a:solidFill>
           <a:ln w="12700">
             <a:solidFill>
-              <a:srgbClr val="E2E7F2"/>
+              <a:srgbClr val="D7DCE3"/>
             </a:solidFill>
             <a:prstDash val="solid"/>
           </a:ln>
-          <a:effectLst>
-            <a:outerShdw sx="100000" sy="100000" kx="0" ky="0" algn="bl" rotWithShape="0" blurRad="88900" dist="25400" dir="5400000">
-              <a:srgbClr val="000000">
-                <a:alpha val="12000"/>
-              </a:srgbClr>
-            </a:outerShdw>
-          </a:effectLst>
         </p:spPr>
       </p:sp>
       <p:sp>
@@ -7822,7 +7543,7 @@
             <a:avLst/>
           </a:prstGeom>
           <a:solidFill>
-            <a:srgbClr val="2C9C7F"/>
+            <a:srgbClr val="3F7A66"/>
           </a:solidFill>
           <a:ln/>
         </p:spPr>
@@ -7854,7 +7575,7 @@
             <a:r>
               <a:rPr lang="en-US" sz="1500" b="1" dirty="0">
                 <a:solidFill>
-                  <a:srgbClr val="1E2761"/>
+                  <a:srgbClr val="1C2A3A"/>
                 </a:solidFill>
                 <a:latin typeface="Cambria" pitchFamily="34" charset="0"/>
                 <a:ea typeface="Cambria" pitchFamily="34" charset="-122"/>
@@ -7893,7 +7614,7 @@
             <a:r>
               <a:rPr lang="en-US" sz="1150" dirty="0">
                 <a:solidFill>
-                  <a:srgbClr val="21294D"/>
+                  <a:srgbClr val="26303B"/>
                 </a:solidFill>
                 <a:latin typeface="Calibri" pitchFamily="34" charset="0"/>
                 <a:ea typeface="Calibri" pitchFamily="34" charset="-122"/>
@@ -7916,27 +7637,18 @@
             <a:off x="457200" y="3474720"/>
             <a:ext cx="2651760" cy="1737360"/>
           </a:xfrm>
-          <a:prstGeom prst="roundRect">
-            <a:avLst>
-              <a:gd name="adj" fmla="val 4211"/>
-            </a:avLst>
+          <a:prstGeom prst="rect">
+            <a:avLst/>
           </a:prstGeom>
           <a:solidFill>
             <a:srgbClr val="FFFFFF"/>
           </a:solidFill>
           <a:ln w="12700">
             <a:solidFill>
-              <a:srgbClr val="E2E7F2"/>
+              <a:srgbClr val="D7DCE3"/>
             </a:solidFill>
             <a:prstDash val="solid"/>
           </a:ln>
-          <a:effectLst>
-            <a:outerShdw sx="100000" sy="100000" kx="0" ky="0" algn="bl" rotWithShape="0" blurRad="88900" dist="25400" dir="5400000">
-              <a:srgbClr val="000000">
-                <a:alpha val="12000"/>
-              </a:srgbClr>
-            </a:outerShdw>
-          </a:effectLst>
         </p:spPr>
       </p:sp>
       <p:sp>
@@ -7954,7 +7666,7 @@
             <a:avLst/>
           </a:prstGeom>
           <a:solidFill>
-            <a:srgbClr val="2C9C7F"/>
+            <a:srgbClr val="3F7A66"/>
           </a:solidFill>
           <a:ln/>
         </p:spPr>
@@ -7986,7 +7698,7 @@
             <a:r>
               <a:rPr lang="en-US" sz="1500" b="1" dirty="0">
                 <a:solidFill>
-                  <a:srgbClr val="1E2761"/>
+                  <a:srgbClr val="1C2A3A"/>
                 </a:solidFill>
                 <a:latin typeface="Cambria" pitchFamily="34" charset="0"/>
                 <a:ea typeface="Cambria" pitchFamily="34" charset="-122"/>
@@ -8025,7 +7737,7 @@
             <a:r>
               <a:rPr lang="en-US" sz="1150" dirty="0">
                 <a:solidFill>
-                  <a:srgbClr val="21294D"/>
+                  <a:srgbClr val="26303B"/>
                 </a:solidFill>
                 <a:latin typeface="Calibri" pitchFamily="34" charset="0"/>
                 <a:ea typeface="Calibri" pitchFamily="34" charset="-122"/>
@@ -8048,27 +7760,18 @@
             <a:off x="3337560" y="3474720"/>
             <a:ext cx="2651760" cy="1737360"/>
           </a:xfrm>
-          <a:prstGeom prst="roundRect">
-            <a:avLst>
-              <a:gd name="adj" fmla="val 4211"/>
-            </a:avLst>
+          <a:prstGeom prst="rect">
+            <a:avLst/>
           </a:prstGeom>
           <a:solidFill>
             <a:srgbClr val="FFFFFF"/>
           </a:solidFill>
           <a:ln w="12700">
             <a:solidFill>
-              <a:srgbClr val="E2E7F2"/>
+              <a:srgbClr val="D7DCE3"/>
             </a:solidFill>
             <a:prstDash val="solid"/>
           </a:ln>
-          <a:effectLst>
-            <a:outerShdw sx="100000" sy="100000" kx="0" ky="0" algn="bl" rotWithShape="0" blurRad="88900" dist="25400" dir="5400000">
-              <a:srgbClr val="000000">
-                <a:alpha val="12000"/>
-              </a:srgbClr>
-            </a:outerShdw>
-          </a:effectLst>
         </p:spPr>
       </p:sp>
       <p:sp>
@@ -8086,7 +7789,7 @@
             <a:avLst/>
           </a:prstGeom>
           <a:solidFill>
-            <a:srgbClr val="2C9C7F"/>
+            <a:srgbClr val="3F7A66"/>
           </a:solidFill>
           <a:ln/>
         </p:spPr>
@@ -8118,7 +7821,7 @@
             <a:r>
               <a:rPr lang="en-US" sz="1500" b="1" dirty="0">
                 <a:solidFill>
-                  <a:srgbClr val="1E2761"/>
+                  <a:srgbClr val="1C2A3A"/>
                 </a:solidFill>
                 <a:latin typeface="Cambria" pitchFamily="34" charset="0"/>
                 <a:ea typeface="Cambria" pitchFamily="34" charset="-122"/>
@@ -8157,7 +7860,7 @@
             <a:r>
               <a:rPr lang="en-US" sz="1150" dirty="0">
                 <a:solidFill>
-                  <a:srgbClr val="21294D"/>
+                  <a:srgbClr val="26303B"/>
                 </a:solidFill>
                 <a:latin typeface="Calibri" pitchFamily="34" charset="0"/>
                 <a:ea typeface="Calibri" pitchFamily="34" charset="-122"/>
@@ -8180,27 +7883,18 @@
             <a:off x="6217920" y="3474720"/>
             <a:ext cx="2651760" cy="1737360"/>
           </a:xfrm>
-          <a:prstGeom prst="roundRect">
-            <a:avLst>
-              <a:gd name="adj" fmla="val 4211"/>
-            </a:avLst>
+          <a:prstGeom prst="rect">
+            <a:avLst/>
           </a:prstGeom>
           <a:solidFill>
             <a:srgbClr val="FFFFFF"/>
           </a:solidFill>
           <a:ln w="12700">
             <a:solidFill>
-              <a:srgbClr val="E2E7F2"/>
+              <a:srgbClr val="D7DCE3"/>
             </a:solidFill>
             <a:prstDash val="solid"/>
           </a:ln>
-          <a:effectLst>
-            <a:outerShdw sx="100000" sy="100000" kx="0" ky="0" algn="bl" rotWithShape="0" blurRad="88900" dist="25400" dir="5400000">
-              <a:srgbClr val="000000">
-                <a:alpha val="12000"/>
-              </a:srgbClr>
-            </a:outerShdw>
-          </a:effectLst>
         </p:spPr>
       </p:sp>
       <p:sp>
@@ -8218,7 +7912,7 @@
             <a:avLst/>
           </a:prstGeom>
           <a:solidFill>
-            <a:srgbClr val="F96167"/>
+            <a:srgbClr val="33617E"/>
           </a:solidFill>
           <a:ln/>
         </p:spPr>
@@ -8250,7 +7944,7 @@
             <a:r>
               <a:rPr lang="en-US" sz="1500" b="1" dirty="0">
                 <a:solidFill>
-                  <a:srgbClr val="1E2761"/>
+                  <a:srgbClr val="1C2A3A"/>
                 </a:solidFill>
                 <a:latin typeface="Cambria" pitchFamily="34" charset="0"/>
                 <a:ea typeface="Cambria" pitchFamily="34" charset="-122"/>
@@ -8289,7 +7983,7 @@
             <a:r>
               <a:rPr lang="en-US" sz="1150" dirty="0">
                 <a:solidFill>
-                  <a:srgbClr val="21294D"/>
+                  <a:srgbClr val="26303B"/>
                 </a:solidFill>
                 <a:latin typeface="Calibri" pitchFamily="34" charset="0"/>
                 <a:ea typeface="Calibri" pitchFamily="34" charset="-122"/>
@@ -8312,27 +8006,18 @@
             <a:off x="9098280" y="3474720"/>
             <a:ext cx="2606040" cy="1737360"/>
           </a:xfrm>
-          <a:prstGeom prst="roundRect">
-            <a:avLst>
-              <a:gd name="adj" fmla="val 4211"/>
-            </a:avLst>
+          <a:prstGeom prst="rect">
+            <a:avLst/>
           </a:prstGeom>
           <a:solidFill>
-            <a:srgbClr val="1E2761"/>
+            <a:srgbClr val="1C2A3A"/>
           </a:solidFill>
           <a:ln w="12700">
             <a:solidFill>
-              <a:srgbClr val="E2E7F2"/>
+              <a:srgbClr val="D7DCE3"/>
             </a:solidFill>
             <a:prstDash val="solid"/>
           </a:ln>
-          <a:effectLst>
-            <a:outerShdw sx="100000" sy="100000" kx="0" ky="0" algn="bl" rotWithShape="0" blurRad="88900" dist="25400" dir="5400000">
-              <a:srgbClr val="000000">
-                <a:alpha val="12000"/>
-              </a:srgbClr>
-            </a:outerShdw>
-          </a:effectLst>
         </p:spPr>
       </p:sp>
       <p:sp>
@@ -8401,7 +8086,7 @@
             <a:r>
               <a:rPr lang="en-US" sz="1150" dirty="0">
                 <a:solidFill>
-                  <a:srgbClr val="CADCFC"/>
+                  <a:srgbClr val="CDD6E0"/>
                 </a:solidFill>
                 <a:latin typeface="Calibri" pitchFamily="34" charset="0"/>
                 <a:ea typeface="Calibri" pitchFamily="34" charset="-122"/>
@@ -8422,7 +8107,7 @@
         <p:spPr>
           <a:xfrm>
             <a:off x="457200" y="6473952"/>
-            <a:ext cx="7315200" cy="274320"/>
+            <a:ext cx="8229600" cy="274320"/>
           </a:xfrm>
           <a:prstGeom prst="rect">
             <a:avLst/>
@@ -8440,13 +8125,13 @@
             <a:r>
               <a:rPr lang="en-US" sz="900" dirty="0">
                 <a:solidFill>
-                  <a:srgbClr val="5B6586"/>
+                  <a:srgbClr val="6B7480"/>
                 </a:solidFill>
                 <a:latin typeface="Calibri" pitchFamily="34" charset="0"/>
                 <a:ea typeface="Calibri" pitchFamily="34" charset="-122"/>
                 <a:cs typeface="Calibri" pitchFamily="34" charset="-120"/>
               </a:rPr>
-              <a:t>Recommender Systems · Individual Project</a:t>
+              <a:t>Recommender Systems — Individual Project</a:t>
             </a:r>
             <a:endParaRPr lang="en-US" sz="900" dirty="0"/>
           </a:p>
@@ -8479,7 +8164,7 @@
             <a:r>
               <a:rPr lang="en-US" sz="900" dirty="0">
                 <a:solidFill>
-                  <a:srgbClr val="5B6586"/>
+                  <a:srgbClr val="6B7480"/>
                 </a:solidFill>
                 <a:latin typeface="Calibri" pitchFamily="34" charset="0"/>
                 <a:ea typeface="Calibri" pitchFamily="34" charset="-122"/>
@@ -8531,8 +8216,8 @@
         </p:nvSpPr>
         <p:spPr>
           <a:xfrm>
-            <a:off x="457200" y="320040"/>
-            <a:ext cx="11247120" cy="640080"/>
+            <a:off x="457200" y="365760"/>
+            <a:ext cx="11247120" cy="603504"/>
           </a:xfrm>
           <a:prstGeom prst="rect">
             <a:avLst/>
@@ -8548,9 +8233,9 @@
               <a:buNone/>
             </a:pPr>
             <a:r>
-              <a:rPr lang="en-US" sz="3000" b="1" dirty="0">
-                <a:solidFill>
-                  <a:srgbClr val="1E2761"/>
+              <a:rPr lang="en-US" sz="2700" b="1" dirty="0">
+                <a:solidFill>
+                  <a:srgbClr val="1C2A3A"/>
                 </a:solidFill>
                 <a:latin typeface="Cambria" pitchFamily="34" charset="0"/>
                 <a:ea typeface="Cambria" pitchFamily="34" charset="-122"/>
@@ -8558,7 +8243,7 @@
               </a:rPr>
               <a:t>Results — accuracy vs. beyond-accuracy</a:t>
             </a:r>
-            <a:endParaRPr lang="en-US" sz="3000" dirty="0"/>
+            <a:endParaRPr lang="en-US" sz="2700" dirty="0"/>
           </a:p>
         </p:txBody>
       </p:sp>
@@ -8570,8 +8255,8 @@
         </p:nvSpPr>
         <p:spPr>
           <a:xfrm>
-            <a:off x="457200" y="932688"/>
-            <a:ext cx="11247120" cy="320040"/>
+            <a:off x="475488" y="950976"/>
+            <a:ext cx="11247120" cy="292608"/>
           </a:xfrm>
           <a:prstGeom prst="rect">
             <a:avLst/>
@@ -8587,9 +8272,9 @@
               <a:buNone/>
             </a:pPr>
             <a:r>
-              <a:rPr lang="en-US" sz="1400" i="1" dirty="0">
-                <a:solidFill>
-                  <a:srgbClr val="F96167"/>
+              <a:rPr lang="en-US" sz="1300" dirty="0">
+                <a:solidFill>
+                  <a:srgbClr val="6B7480"/>
                 </a:solidFill>
                 <a:latin typeface="Calibri" pitchFamily="34" charset="0"/>
                 <a:ea typeface="Calibri" pitchFamily="34" charset="-122"/>
@@ -8597,7 +8282,7 @@
               </a:rPr>
               <a:t>Top-10 · temporal split (leakage-free) · 10k users · 95% CI on NDCG</a:t>
             </a:r>
-            <a:endParaRPr lang="en-US" sz="1400" dirty="0"/>
+            <a:endParaRPr lang="en-US" sz="1300" dirty="0"/>
           </a:p>
         </p:txBody>
       </p:sp>
@@ -8697,7 +8382,7 @@
                       <a:tailEnd type="none" w="med" len="med"/>
                     </a:lnB>
                     <a:solidFill>
-                      <a:srgbClr val="1E2761"/>
+                      <a:srgbClr val="1C2A3A"/>
                     </a:solidFill>
                   </a:tcPr>
                 </a:tc>
@@ -8765,7 +8450,7 @@
                       <a:tailEnd type="none" w="med" len="med"/>
                     </a:lnB>
                     <a:solidFill>
-                      <a:srgbClr val="1E2761"/>
+                      <a:srgbClr val="1C2A3A"/>
                     </a:solidFill>
                   </a:tcPr>
                 </a:tc>
@@ -8833,7 +8518,7 @@
                       <a:tailEnd type="none" w="med" len="med"/>
                     </a:lnB>
                     <a:solidFill>
-                      <a:srgbClr val="1E2761"/>
+                      <a:srgbClr val="1C2A3A"/>
                     </a:solidFill>
                   </a:tcPr>
                 </a:tc>
@@ -8901,7 +8586,7 @@
                       <a:tailEnd type="none" w="med" len="med"/>
                     </a:lnB>
                     <a:solidFill>
-                      <a:srgbClr val="1E2761"/>
+                      <a:srgbClr val="1C2A3A"/>
                     </a:solidFill>
                   </a:tcPr>
                 </a:tc>
@@ -8969,7 +8654,7 @@
                       <a:tailEnd type="none" w="med" len="med"/>
                     </a:lnB>
                     <a:solidFill>
-                      <a:srgbClr val="1E2761"/>
+                      <a:srgbClr val="1C2A3A"/>
                     </a:solidFill>
                   </a:tcPr>
                 </a:tc>
@@ -9037,7 +8722,7 @@
                       <a:tailEnd type="none" w="med" len="med"/>
                     </a:lnB>
                     <a:solidFill>
-                      <a:srgbClr val="1E2761"/>
+                      <a:srgbClr val="1C2A3A"/>
                     </a:solidFill>
                   </a:tcPr>
                 </a:tc>
@@ -9105,7 +8790,7 @@
                       <a:tailEnd type="none" w="med" len="med"/>
                     </a:lnB>
                     <a:solidFill>
-                      <a:srgbClr val="1E2761"/>
+                      <a:srgbClr val="1C2A3A"/>
                     </a:solidFill>
                   </a:tcPr>
                 </a:tc>
@@ -9122,7 +8807,7 @@
                       <a:r>
                         <a:rPr lang="en-US" sz="1100" b="1" dirty="0">
                           <a:solidFill>
-                            <a:srgbClr val="21294D"/>
+                            <a:srgbClr val="26303B"/>
                           </a:solidFill>
                           <a:latin typeface="Calibri" pitchFamily="34" charset="0"/>
                           <a:ea typeface="Calibri" pitchFamily="34" charset="-122"/>
@@ -9190,7 +8875,7 @@
                       <a:r>
                         <a:rPr lang="en-US" sz="1100" dirty="0">
                           <a:solidFill>
-                            <a:srgbClr val="21294D"/>
+                            <a:srgbClr val="26303B"/>
                           </a:solidFill>
                           <a:latin typeface="Calibri" pitchFamily="34" charset="0"/>
                           <a:ea typeface="Calibri" pitchFamily="34" charset="-122"/>
@@ -9258,7 +8943,7 @@
                       <a:r>
                         <a:rPr lang="en-US" sz="1100" dirty="0">
                           <a:solidFill>
-                            <a:srgbClr val="21294D"/>
+                            <a:srgbClr val="26303B"/>
                           </a:solidFill>
                           <a:latin typeface="Calibri" pitchFamily="34" charset="0"/>
                           <a:ea typeface="Calibri" pitchFamily="34" charset="-122"/>
@@ -9326,7 +9011,7 @@
                       <a:r>
                         <a:rPr lang="en-US" sz="1100" b="1" dirty="0">
                           <a:solidFill>
-                            <a:srgbClr val="F96167"/>
+                            <a:srgbClr val="33617E"/>
                           </a:solidFill>
                           <a:latin typeface="Calibri" pitchFamily="34" charset="0"/>
                           <a:ea typeface="Calibri" pitchFamily="34" charset="-122"/>
@@ -9394,7 +9079,7 @@
                       <a:r>
                         <a:rPr lang="en-US" sz="1100" dirty="0">
                           <a:solidFill>
-                            <a:srgbClr val="21294D"/>
+                            <a:srgbClr val="26303B"/>
                           </a:solidFill>
                           <a:latin typeface="Calibri" pitchFamily="34" charset="0"/>
                           <a:ea typeface="Calibri" pitchFamily="34" charset="-122"/>
@@ -9462,7 +9147,7 @@
                       <a:r>
                         <a:rPr lang="en-US" sz="1100" dirty="0">
                           <a:solidFill>
-                            <a:srgbClr val="21294D"/>
+                            <a:srgbClr val="26303B"/>
                           </a:solidFill>
                           <a:latin typeface="Calibri" pitchFamily="34" charset="0"/>
                           <a:ea typeface="Calibri" pitchFamily="34" charset="-122"/>
@@ -9530,7 +9215,7 @@
                       <a:r>
                         <a:rPr lang="en-US" sz="1100" dirty="0">
                           <a:solidFill>
-                            <a:srgbClr val="21294D"/>
+                            <a:srgbClr val="26303B"/>
                           </a:solidFill>
                           <a:latin typeface="Calibri" pitchFamily="34" charset="0"/>
                           <a:ea typeface="Calibri" pitchFamily="34" charset="-122"/>
@@ -9600,7 +9285,7 @@
                       <a:r>
                         <a:rPr lang="en-US" sz="1100" b="1" dirty="0">
                           <a:solidFill>
-                            <a:srgbClr val="21294D"/>
+                            <a:srgbClr val="26303B"/>
                           </a:solidFill>
                           <a:latin typeface="Calibri" pitchFamily="34" charset="0"/>
                           <a:ea typeface="Calibri" pitchFamily="34" charset="-122"/>
@@ -9668,7 +9353,7 @@
                       <a:r>
                         <a:rPr lang="en-US" sz="1100" dirty="0">
                           <a:solidFill>
-                            <a:srgbClr val="21294D"/>
+                            <a:srgbClr val="26303B"/>
                           </a:solidFill>
                           <a:latin typeface="Calibri" pitchFamily="34" charset="0"/>
                           <a:ea typeface="Calibri" pitchFamily="34" charset="-122"/>
@@ -9736,7 +9421,7 @@
                       <a:r>
                         <a:rPr lang="en-US" sz="1100" dirty="0">
                           <a:solidFill>
-                            <a:srgbClr val="21294D"/>
+                            <a:srgbClr val="26303B"/>
                           </a:solidFill>
                           <a:latin typeface="Calibri" pitchFamily="34" charset="0"/>
                           <a:ea typeface="Calibri" pitchFamily="34" charset="-122"/>
@@ -9804,7 +9489,7 @@
                       <a:r>
                         <a:rPr lang="en-US" sz="1100" dirty="0">
                           <a:solidFill>
-                            <a:srgbClr val="21294D"/>
+                            <a:srgbClr val="26303B"/>
                           </a:solidFill>
                           <a:latin typeface="Calibri" pitchFamily="34" charset="0"/>
                           <a:ea typeface="Calibri" pitchFamily="34" charset="-122"/>
@@ -9872,7 +9557,7 @@
                       <a:r>
                         <a:rPr lang="en-US" sz="1100" dirty="0">
                           <a:solidFill>
-                            <a:srgbClr val="21294D"/>
+                            <a:srgbClr val="26303B"/>
                           </a:solidFill>
                           <a:latin typeface="Calibri" pitchFamily="34" charset="0"/>
                           <a:ea typeface="Calibri" pitchFamily="34" charset="-122"/>
@@ -9940,7 +9625,7 @@
                       <a:r>
                         <a:rPr lang="en-US" sz="1100" dirty="0">
                           <a:solidFill>
-                            <a:srgbClr val="21294D"/>
+                            <a:srgbClr val="26303B"/>
                           </a:solidFill>
                           <a:latin typeface="Calibri" pitchFamily="34" charset="0"/>
                           <a:ea typeface="Calibri" pitchFamily="34" charset="-122"/>
@@ -10008,7 +9693,7 @@
                       <a:r>
                         <a:rPr lang="en-US" sz="1100" dirty="0">
                           <a:solidFill>
-                            <a:srgbClr val="21294D"/>
+                            <a:srgbClr val="26303B"/>
                           </a:solidFill>
                           <a:latin typeface="Calibri" pitchFamily="34" charset="0"/>
                           <a:ea typeface="Calibri" pitchFamily="34" charset="-122"/>
@@ -10078,7 +9763,7 @@
                       <a:r>
                         <a:rPr lang="en-US" sz="1100" b="1" dirty="0">
                           <a:solidFill>
-                            <a:srgbClr val="21294D"/>
+                            <a:srgbClr val="26303B"/>
                           </a:solidFill>
                           <a:latin typeface="Calibri" pitchFamily="34" charset="0"/>
                           <a:ea typeface="Calibri" pitchFamily="34" charset="-122"/>
@@ -10146,7 +9831,7 @@
                       <a:r>
                         <a:rPr lang="en-US" sz="1100" dirty="0">
                           <a:solidFill>
-                            <a:srgbClr val="21294D"/>
+                            <a:srgbClr val="26303B"/>
                           </a:solidFill>
                           <a:latin typeface="Calibri" pitchFamily="34" charset="0"/>
                           <a:ea typeface="Calibri" pitchFamily="34" charset="-122"/>
@@ -10214,7 +9899,7 @@
                       <a:r>
                         <a:rPr lang="en-US" sz="1100" dirty="0">
                           <a:solidFill>
-                            <a:srgbClr val="21294D"/>
+                            <a:srgbClr val="26303B"/>
                           </a:solidFill>
                           <a:latin typeface="Calibri" pitchFamily="34" charset="0"/>
                           <a:ea typeface="Calibri" pitchFamily="34" charset="-122"/>
@@ -10282,7 +9967,7 @@
                       <a:r>
                         <a:rPr lang="en-US" sz="1100" dirty="0">
                           <a:solidFill>
-                            <a:srgbClr val="21294D"/>
+                            <a:srgbClr val="26303B"/>
                           </a:solidFill>
                           <a:latin typeface="Calibri" pitchFamily="34" charset="0"/>
                           <a:ea typeface="Calibri" pitchFamily="34" charset="-122"/>
@@ -10350,7 +10035,7 @@
                       <a:r>
                         <a:rPr lang="en-US" sz="1100" dirty="0">
                           <a:solidFill>
-                            <a:srgbClr val="21294D"/>
+                            <a:srgbClr val="26303B"/>
                           </a:solidFill>
                           <a:latin typeface="Calibri" pitchFamily="34" charset="0"/>
                           <a:ea typeface="Calibri" pitchFamily="34" charset="-122"/>
@@ -10418,7 +10103,7 @@
                       <a:r>
                         <a:rPr lang="en-US" sz="1100" dirty="0">
                           <a:solidFill>
-                            <a:srgbClr val="21294D"/>
+                            <a:srgbClr val="26303B"/>
                           </a:solidFill>
                           <a:latin typeface="Calibri" pitchFamily="34" charset="0"/>
                           <a:ea typeface="Calibri" pitchFamily="34" charset="-122"/>
@@ -10486,7 +10171,7 @@
                       <a:r>
                         <a:rPr lang="en-US" sz="1100" dirty="0">
                           <a:solidFill>
-                            <a:srgbClr val="21294D"/>
+                            <a:srgbClr val="26303B"/>
                           </a:solidFill>
                           <a:latin typeface="Calibri" pitchFamily="34" charset="0"/>
                           <a:ea typeface="Calibri" pitchFamily="34" charset="-122"/>
@@ -10556,7 +10241,7 @@
                       <a:r>
                         <a:rPr lang="en-US" sz="1100" b="1" dirty="0">
                           <a:solidFill>
-                            <a:srgbClr val="21294D"/>
+                            <a:srgbClr val="26303B"/>
                           </a:solidFill>
                           <a:latin typeface="Calibri" pitchFamily="34" charset="0"/>
                           <a:ea typeface="Calibri" pitchFamily="34" charset="-122"/>
@@ -10624,7 +10309,7 @@
                       <a:r>
                         <a:rPr lang="en-US" sz="1100" dirty="0">
                           <a:solidFill>
-                            <a:srgbClr val="21294D"/>
+                            <a:srgbClr val="26303B"/>
                           </a:solidFill>
                           <a:latin typeface="Calibri" pitchFamily="34" charset="0"/>
                           <a:ea typeface="Calibri" pitchFamily="34" charset="-122"/>
@@ -10692,7 +10377,7 @@
                       <a:r>
                         <a:rPr lang="en-US" sz="1100" dirty="0">
                           <a:solidFill>
-                            <a:srgbClr val="21294D"/>
+                            <a:srgbClr val="26303B"/>
                           </a:solidFill>
                           <a:latin typeface="Calibri" pitchFamily="34" charset="0"/>
                           <a:ea typeface="Calibri" pitchFamily="34" charset="-122"/>
@@ -10760,7 +10445,7 @@
                       <a:r>
                         <a:rPr lang="en-US" sz="1100" dirty="0">
                           <a:solidFill>
-                            <a:srgbClr val="21294D"/>
+                            <a:srgbClr val="26303B"/>
                           </a:solidFill>
                           <a:latin typeface="Calibri" pitchFamily="34" charset="0"/>
                           <a:ea typeface="Calibri" pitchFamily="34" charset="-122"/>
@@ -10828,7 +10513,7 @@
                       <a:r>
                         <a:rPr lang="en-US" sz="1100" dirty="0">
                           <a:solidFill>
-                            <a:srgbClr val="21294D"/>
+                            <a:srgbClr val="26303B"/>
                           </a:solidFill>
                           <a:latin typeface="Calibri" pitchFamily="34" charset="0"/>
                           <a:ea typeface="Calibri" pitchFamily="34" charset="-122"/>
@@ -10896,7 +10581,7 @@
                       <a:r>
                         <a:rPr lang="en-US" sz="1100" dirty="0">
                           <a:solidFill>
-                            <a:srgbClr val="21294D"/>
+                            <a:srgbClr val="26303B"/>
                           </a:solidFill>
                           <a:latin typeface="Calibri" pitchFamily="34" charset="0"/>
                           <a:ea typeface="Calibri" pitchFamily="34" charset="-122"/>
@@ -10964,7 +10649,7 @@
                       <a:r>
                         <a:rPr lang="en-US" sz="1100" dirty="0">
                           <a:solidFill>
-                            <a:srgbClr val="21294D"/>
+                            <a:srgbClr val="26303B"/>
                           </a:solidFill>
                           <a:latin typeface="Calibri" pitchFamily="34" charset="0"/>
                           <a:ea typeface="Calibri" pitchFamily="34" charset="-122"/>
@@ -11034,7 +10719,7 @@
                       <a:r>
                         <a:rPr lang="en-US" sz="1100" b="1" dirty="0">
                           <a:solidFill>
-                            <a:srgbClr val="21294D"/>
+                            <a:srgbClr val="26303B"/>
                           </a:solidFill>
                           <a:latin typeface="Calibri" pitchFamily="34" charset="0"/>
                           <a:ea typeface="Calibri" pitchFamily="34" charset="-122"/>
@@ -11102,7 +10787,7 @@
                       <a:r>
                         <a:rPr lang="en-US" sz="1100" dirty="0">
                           <a:solidFill>
-                            <a:srgbClr val="21294D"/>
+                            <a:srgbClr val="26303B"/>
                           </a:solidFill>
                           <a:latin typeface="Calibri" pitchFamily="34" charset="0"/>
                           <a:ea typeface="Calibri" pitchFamily="34" charset="-122"/>
@@ -11170,7 +10855,7 @@
                       <a:r>
                         <a:rPr lang="en-US" sz="1100" dirty="0">
                           <a:solidFill>
-                            <a:srgbClr val="21294D"/>
+                            <a:srgbClr val="26303B"/>
                           </a:solidFill>
                           <a:latin typeface="Calibri" pitchFamily="34" charset="0"/>
                           <a:ea typeface="Calibri" pitchFamily="34" charset="-122"/>
@@ -11238,7 +10923,7 @@
                       <a:r>
                         <a:rPr lang="en-US" sz="1100" dirty="0">
                           <a:solidFill>
-                            <a:srgbClr val="21294D"/>
+                            <a:srgbClr val="26303B"/>
                           </a:solidFill>
                           <a:latin typeface="Calibri" pitchFamily="34" charset="0"/>
                           <a:ea typeface="Calibri" pitchFamily="34" charset="-122"/>
@@ -11306,7 +10991,7 @@
                       <a:r>
                         <a:rPr lang="en-US" sz="1100" dirty="0">
                           <a:solidFill>
-                            <a:srgbClr val="21294D"/>
+                            <a:srgbClr val="26303B"/>
                           </a:solidFill>
                           <a:latin typeface="Calibri" pitchFamily="34" charset="0"/>
                           <a:ea typeface="Calibri" pitchFamily="34" charset="-122"/>
@@ -11374,7 +11059,7 @@
                       <a:r>
                         <a:rPr lang="en-US" sz="1100" dirty="0">
                           <a:solidFill>
-                            <a:srgbClr val="21294D"/>
+                            <a:srgbClr val="26303B"/>
                           </a:solidFill>
                           <a:latin typeface="Calibri" pitchFamily="34" charset="0"/>
                           <a:ea typeface="Calibri" pitchFamily="34" charset="-122"/>
@@ -11442,7 +11127,7 @@
                       <a:r>
                         <a:rPr lang="en-US" sz="1100" dirty="0">
                           <a:solidFill>
-                            <a:srgbClr val="21294D"/>
+                            <a:srgbClr val="26303B"/>
                           </a:solidFill>
                           <a:latin typeface="Calibri" pitchFamily="34" charset="0"/>
                           <a:ea typeface="Calibri" pitchFamily="34" charset="-122"/>
@@ -11512,7 +11197,7 @@
                       <a:r>
                         <a:rPr lang="en-US" sz="1100" b="1" dirty="0">
                           <a:solidFill>
-                            <a:srgbClr val="21294D"/>
+                            <a:srgbClr val="26303B"/>
                           </a:solidFill>
                           <a:latin typeface="Calibri" pitchFamily="34" charset="0"/>
                           <a:ea typeface="Calibri" pitchFamily="34" charset="-122"/>
@@ -11580,7 +11265,7 @@
                       <a:r>
                         <a:rPr lang="en-US" sz="1100" dirty="0">
                           <a:solidFill>
-                            <a:srgbClr val="21294D"/>
+                            <a:srgbClr val="26303B"/>
                           </a:solidFill>
                           <a:latin typeface="Calibri" pitchFamily="34" charset="0"/>
                           <a:ea typeface="Calibri" pitchFamily="34" charset="-122"/>
@@ -11648,7 +11333,7 @@
                       <a:r>
                         <a:rPr lang="en-US" sz="1100" dirty="0">
                           <a:solidFill>
-                            <a:srgbClr val="21294D"/>
+                            <a:srgbClr val="26303B"/>
                           </a:solidFill>
                           <a:latin typeface="Calibri" pitchFamily="34" charset="0"/>
                           <a:ea typeface="Calibri" pitchFamily="34" charset="-122"/>
@@ -11716,7 +11401,7 @@
                       <a:r>
                         <a:rPr lang="en-US" sz="1100" dirty="0">
                           <a:solidFill>
-                            <a:srgbClr val="21294D"/>
+                            <a:srgbClr val="26303B"/>
                           </a:solidFill>
                           <a:latin typeface="Calibri" pitchFamily="34" charset="0"/>
                           <a:ea typeface="Calibri" pitchFamily="34" charset="-122"/>
@@ -11784,7 +11469,7 @@
                       <a:r>
                         <a:rPr lang="en-US" sz="1100" dirty="0">
                           <a:solidFill>
-                            <a:srgbClr val="21294D"/>
+                            <a:srgbClr val="26303B"/>
                           </a:solidFill>
                           <a:latin typeface="Calibri" pitchFamily="34" charset="0"/>
                           <a:ea typeface="Calibri" pitchFamily="34" charset="-122"/>
@@ -11852,7 +11537,7 @@
                       <a:r>
                         <a:rPr lang="en-US" sz="1100" b="1" dirty="0">
                           <a:solidFill>
-                            <a:srgbClr val="2C9C7F"/>
+                            <a:srgbClr val="3F7A66"/>
                           </a:solidFill>
                           <a:latin typeface="Calibri" pitchFamily="34" charset="0"/>
                           <a:ea typeface="Calibri" pitchFamily="34" charset="-122"/>
@@ -11920,7 +11605,7 @@
                       <a:r>
                         <a:rPr lang="en-US" sz="1100" dirty="0">
                           <a:solidFill>
-                            <a:srgbClr val="21294D"/>
+                            <a:srgbClr val="26303B"/>
                           </a:solidFill>
                           <a:latin typeface="Calibri" pitchFamily="34" charset="0"/>
                           <a:ea typeface="Calibri" pitchFamily="34" charset="-122"/>
@@ -11990,7 +11675,7 @@
                       <a:r>
                         <a:rPr lang="en-US" sz="1100" b="1" dirty="0">
                           <a:solidFill>
-                            <a:srgbClr val="21294D"/>
+                            <a:srgbClr val="26303B"/>
                           </a:solidFill>
                           <a:latin typeface="Calibri" pitchFamily="34" charset="0"/>
                           <a:ea typeface="Calibri" pitchFamily="34" charset="-122"/>
@@ -12058,7 +11743,7 @@
                       <a:r>
                         <a:rPr lang="en-US" sz="1100" dirty="0">
                           <a:solidFill>
-                            <a:srgbClr val="21294D"/>
+                            <a:srgbClr val="26303B"/>
                           </a:solidFill>
                           <a:latin typeface="Calibri" pitchFamily="34" charset="0"/>
                           <a:ea typeface="Calibri" pitchFamily="34" charset="-122"/>
@@ -12126,7 +11811,7 @@
                       <a:r>
                         <a:rPr lang="en-US" sz="1100" dirty="0">
                           <a:solidFill>
-                            <a:srgbClr val="21294D"/>
+                            <a:srgbClr val="26303B"/>
                           </a:solidFill>
                           <a:latin typeface="Calibri" pitchFamily="34" charset="0"/>
                           <a:ea typeface="Calibri" pitchFamily="34" charset="-122"/>
@@ -12194,7 +11879,7 @@
                       <a:r>
                         <a:rPr lang="en-US" sz="1100" dirty="0">
                           <a:solidFill>
-                            <a:srgbClr val="21294D"/>
+                            <a:srgbClr val="26303B"/>
                           </a:solidFill>
                           <a:latin typeface="Calibri" pitchFamily="34" charset="0"/>
                           <a:ea typeface="Calibri" pitchFamily="34" charset="-122"/>
@@ -12262,7 +11947,7 @@
                       <a:r>
                         <a:rPr lang="en-US" sz="1100" dirty="0">
                           <a:solidFill>
-                            <a:srgbClr val="21294D"/>
+                            <a:srgbClr val="26303B"/>
                           </a:solidFill>
                           <a:latin typeface="Calibri" pitchFamily="34" charset="0"/>
                           <a:ea typeface="Calibri" pitchFamily="34" charset="-122"/>
@@ -12330,7 +12015,7 @@
                       <a:r>
                         <a:rPr lang="en-US" sz="1100" dirty="0">
                           <a:solidFill>
-                            <a:srgbClr val="21294D"/>
+                            <a:srgbClr val="26303B"/>
                           </a:solidFill>
                           <a:latin typeface="Calibri" pitchFamily="34" charset="0"/>
                           <a:ea typeface="Calibri" pitchFamily="34" charset="-122"/>
@@ -12398,7 +12083,7 @@
                       <a:r>
                         <a:rPr lang="en-US" sz="1100" dirty="0">
                           <a:solidFill>
-                            <a:srgbClr val="21294D"/>
+                            <a:srgbClr val="26303B"/>
                           </a:solidFill>
                           <a:latin typeface="Calibri" pitchFamily="34" charset="0"/>
                           <a:ea typeface="Calibri" pitchFamily="34" charset="-122"/>
@@ -12468,7 +12153,7 @@
                       <a:r>
                         <a:rPr lang="en-US" sz="1100" b="1" dirty="0">
                           <a:solidFill>
-                            <a:srgbClr val="21294D"/>
+                            <a:srgbClr val="26303B"/>
                           </a:solidFill>
                           <a:latin typeface="Calibri" pitchFamily="34" charset="0"/>
                           <a:ea typeface="Calibri" pitchFamily="34" charset="-122"/>
@@ -12536,7 +12221,7 @@
                       <a:r>
                         <a:rPr lang="en-US" sz="1100" dirty="0">
                           <a:solidFill>
-                            <a:srgbClr val="21294D"/>
+                            <a:srgbClr val="26303B"/>
                           </a:solidFill>
                           <a:latin typeface="Calibri" pitchFamily="34" charset="0"/>
                           <a:ea typeface="Calibri" pitchFamily="34" charset="-122"/>
@@ -12604,7 +12289,7 @@
                       <a:r>
                         <a:rPr lang="en-US" sz="1100" dirty="0">
                           <a:solidFill>
-                            <a:srgbClr val="21294D"/>
+                            <a:srgbClr val="26303B"/>
                           </a:solidFill>
                           <a:latin typeface="Calibri" pitchFamily="34" charset="0"/>
                           <a:ea typeface="Calibri" pitchFamily="34" charset="-122"/>
@@ -12672,7 +12357,7 @@
                       <a:r>
                         <a:rPr lang="en-US" sz="1100" dirty="0">
                           <a:solidFill>
-                            <a:srgbClr val="21294D"/>
+                            <a:srgbClr val="26303B"/>
                           </a:solidFill>
                           <a:latin typeface="Calibri" pitchFamily="34" charset="0"/>
                           <a:ea typeface="Calibri" pitchFamily="34" charset="-122"/>
@@ -12740,7 +12425,7 @@
                       <a:r>
                         <a:rPr lang="en-US" sz="1100" dirty="0">
                           <a:solidFill>
-                            <a:srgbClr val="21294D"/>
+                            <a:srgbClr val="26303B"/>
                           </a:solidFill>
                           <a:latin typeface="Calibri" pitchFamily="34" charset="0"/>
                           <a:ea typeface="Calibri" pitchFamily="34" charset="-122"/>
@@ -12808,7 +12493,7 @@
                       <a:r>
                         <a:rPr lang="en-US" sz="1100" dirty="0">
                           <a:solidFill>
-                            <a:srgbClr val="21294D"/>
+                            <a:srgbClr val="26303B"/>
                           </a:solidFill>
                           <a:latin typeface="Calibri" pitchFamily="34" charset="0"/>
                           <a:ea typeface="Calibri" pitchFamily="34" charset="-122"/>
@@ -12876,7 +12561,7 @@
                       <a:r>
                         <a:rPr lang="en-US" sz="1100" dirty="0">
                           <a:solidFill>
-                            <a:srgbClr val="21294D"/>
+                            <a:srgbClr val="26303B"/>
                           </a:solidFill>
                           <a:latin typeface="Calibri" pitchFamily="34" charset="0"/>
                           <a:ea typeface="Calibri" pitchFamily="34" charset="-122"/>
@@ -12946,7 +12631,7 @@
                       <a:r>
                         <a:rPr lang="en-US" sz="1100" b="1" dirty="0">
                           <a:solidFill>
-                            <a:srgbClr val="21294D"/>
+                            <a:srgbClr val="26303B"/>
                           </a:solidFill>
                           <a:latin typeface="Calibri" pitchFamily="34" charset="0"/>
                           <a:ea typeface="Calibri" pitchFamily="34" charset="-122"/>
@@ -13014,7 +12699,7 @@
                       <a:r>
                         <a:rPr lang="en-US" sz="1100" dirty="0">
                           <a:solidFill>
-                            <a:srgbClr val="21294D"/>
+                            <a:srgbClr val="26303B"/>
                           </a:solidFill>
                           <a:latin typeface="Calibri" pitchFamily="34" charset="0"/>
                           <a:ea typeface="Calibri" pitchFamily="34" charset="-122"/>
@@ -13082,7 +12767,7 @@
                       <a:r>
                         <a:rPr lang="en-US" sz="1100" dirty="0">
                           <a:solidFill>
-                            <a:srgbClr val="21294D"/>
+                            <a:srgbClr val="26303B"/>
                           </a:solidFill>
                           <a:latin typeface="Calibri" pitchFamily="34" charset="0"/>
                           <a:ea typeface="Calibri" pitchFamily="34" charset="-122"/>
@@ -13150,7 +12835,7 @@
                       <a:r>
                         <a:rPr lang="en-US" sz="1100" dirty="0">
                           <a:solidFill>
-                            <a:srgbClr val="21294D"/>
+                            <a:srgbClr val="26303B"/>
                           </a:solidFill>
                           <a:latin typeface="Calibri" pitchFamily="34" charset="0"/>
                           <a:ea typeface="Calibri" pitchFamily="34" charset="-122"/>
@@ -13218,7 +12903,7 @@
                       <a:r>
                         <a:rPr lang="en-US" sz="1100" dirty="0">
                           <a:solidFill>
-                            <a:srgbClr val="21294D"/>
+                            <a:srgbClr val="26303B"/>
                           </a:solidFill>
                           <a:latin typeface="Calibri" pitchFamily="34" charset="0"/>
                           <a:ea typeface="Calibri" pitchFamily="34" charset="-122"/>
@@ -13286,7 +12971,7 @@
                       <a:r>
                         <a:rPr lang="en-US" sz="1100" dirty="0">
                           <a:solidFill>
-                            <a:srgbClr val="21294D"/>
+                            <a:srgbClr val="26303B"/>
                           </a:solidFill>
                           <a:latin typeface="Calibri" pitchFamily="34" charset="0"/>
                           <a:ea typeface="Calibri" pitchFamily="34" charset="-122"/>
@@ -13354,7 +13039,7 @@
                       <a:r>
                         <a:rPr lang="en-US" sz="1100" dirty="0">
                           <a:solidFill>
-                            <a:srgbClr val="21294D"/>
+                            <a:srgbClr val="26303B"/>
                           </a:solidFill>
                           <a:latin typeface="Calibri" pitchFamily="34" charset="0"/>
                           <a:ea typeface="Calibri" pitchFamily="34" charset="-122"/>
@@ -13427,27 +13112,18 @@
             <a:off x="8961120" y="1600200"/>
             <a:ext cx="2743200" cy="3520440"/>
           </a:xfrm>
-          <a:prstGeom prst="roundRect">
-            <a:avLst>
-              <a:gd name="adj" fmla="val 2667"/>
-            </a:avLst>
+          <a:prstGeom prst="rect">
+            <a:avLst/>
           </a:prstGeom>
           <a:solidFill>
-            <a:srgbClr val="F4F6FB"/>
+            <a:srgbClr val="F4F5F7"/>
           </a:solidFill>
           <a:ln w="12700">
             <a:solidFill>
-              <a:srgbClr val="E2E7F2"/>
+              <a:srgbClr val="D7DCE3"/>
             </a:solidFill>
             <a:prstDash val="solid"/>
           </a:ln>
-          <a:effectLst>
-            <a:outerShdw sx="100000" sy="100000" kx="0" ky="0" algn="bl" rotWithShape="0" blurRad="88900" dist="25400" dir="5400000">
-              <a:srgbClr val="000000">
-                <a:alpha val="12000"/>
-              </a:srgbClr>
-            </a:outerShdw>
-          </a:effectLst>
         </p:spPr>
       </p:sp>
       <p:sp>
@@ -13477,7 +13153,7 @@
             <a:r>
               <a:rPr lang="en-US" sz="1500" b="1" dirty="0">
                 <a:solidFill>
-                  <a:srgbClr val="1E2761"/>
+                  <a:srgbClr val="1C2A3A"/>
                 </a:solidFill>
                 <a:latin typeface="Cambria" pitchFamily="34" charset="0"/>
                 <a:ea typeface="Cambria" pitchFamily="34" charset="-122"/>
@@ -13520,13 +13196,13 @@
             <a:r>
               <a:rPr lang="en-US" sz="1150" dirty="0">
                 <a:solidFill>
-                  <a:srgbClr val="21294D"/>
+                  <a:srgbClr val="26303B"/>
                 </a:solidFill>
                 <a:latin typeface="Calibri" pitchFamily="34" charset="0"/>
                 <a:ea typeface="Calibri" pitchFamily="34" charset="-122"/>
                 <a:cs typeface="Calibri" pitchFamily="34" charset="-120"/>
               </a:rPr>
-              <a:t>SVD wins significantly (CIs don't overlap with popularity)</a:t>
+              <a:t>SVD leads significantly — its CI does not overlap popularity's</a:t>
             </a:r>
             <a:endParaRPr lang="en-US" sz="1150" dirty="0"/>
           </a:p>
@@ -13541,13 +13217,13 @@
             <a:r>
               <a:rPr lang="en-US" sz="1150" dirty="0">
                 <a:solidFill>
-                  <a:srgbClr val="21294D"/>
+                  <a:srgbClr val="26303B"/>
                 </a:solidFill>
                 <a:latin typeface="Calibri" pitchFamily="34" charset="0"/>
                 <a:ea typeface="Calibri" pitchFamily="34" charset="-122"/>
                 <a:cs typeface="Calibri" pitchFamily="34" charset="-120"/>
               </a:rPr>
-              <a:t>Numbers are honest: temporal split, no leakage</a:t>
+              <a:t>Temporal split: no train/test leakage</a:t>
             </a:r>
             <a:endParaRPr lang="en-US" sz="1150" dirty="0"/>
           </a:p>
@@ -13562,7 +13238,7 @@
             <a:r>
               <a:rPr lang="en-US" sz="1150" dirty="0">
                 <a:solidFill>
-                  <a:srgbClr val="21294D"/>
+                  <a:srgbClr val="26303B"/>
                 </a:solidFill>
                 <a:latin typeface="Calibri" pitchFamily="34" charset="0"/>
                 <a:ea typeface="Calibri" pitchFamily="34" charset="-122"/>
@@ -13583,7 +13259,7 @@
             <a:r>
               <a:rPr lang="en-US" sz="1150" dirty="0">
                 <a:solidFill>
-                  <a:srgbClr val="21294D"/>
+                  <a:srgbClr val="26303B"/>
                 </a:solidFill>
                 <a:latin typeface="Calibri" pitchFamily="34" charset="0"/>
                 <a:ea typeface="Calibri" pitchFamily="34" charset="-122"/>
@@ -13604,7 +13280,7 @@
         <p:spPr>
           <a:xfrm>
             <a:off x="457200" y="6473952"/>
-            <a:ext cx="7315200" cy="274320"/>
+            <a:ext cx="8229600" cy="274320"/>
           </a:xfrm>
           <a:prstGeom prst="rect">
             <a:avLst/>
@@ -13622,13 +13298,13 @@
             <a:r>
               <a:rPr lang="en-US" sz="900" dirty="0">
                 <a:solidFill>
-                  <a:srgbClr val="5B6586"/>
+                  <a:srgbClr val="6B7480"/>
                 </a:solidFill>
                 <a:latin typeface="Calibri" pitchFamily="34" charset="0"/>
                 <a:ea typeface="Calibri" pitchFamily="34" charset="-122"/>
                 <a:cs typeface="Calibri" pitchFamily="34" charset="-120"/>
               </a:rPr>
-              <a:t>Recommender Systems · Individual Project</a:t>
+              <a:t>Recommender Systems — Individual Project</a:t>
             </a:r>
             <a:endParaRPr lang="en-US" sz="900" dirty="0"/>
           </a:p>
@@ -13661,7 +13337,7 @@
             <a:r>
               <a:rPr lang="en-US" sz="900" dirty="0">
                 <a:solidFill>
-                  <a:srgbClr val="5B6586"/>
+                  <a:srgbClr val="6B7480"/>
                 </a:solidFill>
                 <a:latin typeface="Calibri" pitchFamily="34" charset="0"/>
                 <a:ea typeface="Calibri" pitchFamily="34" charset="-122"/>
@@ -13713,8 +13389,8 @@
         </p:nvSpPr>
         <p:spPr>
           <a:xfrm>
-            <a:off x="457200" y="320040"/>
-            <a:ext cx="11247120" cy="640080"/>
+            <a:off x="457200" y="365760"/>
+            <a:ext cx="11247120" cy="603504"/>
           </a:xfrm>
           <a:prstGeom prst="rect">
             <a:avLst/>
@@ -13730,9 +13406,9 @@
               <a:buNone/>
             </a:pPr>
             <a:r>
-              <a:rPr lang="en-US" sz="3000" b="1" dirty="0">
-                <a:solidFill>
-                  <a:srgbClr val="1E2761"/>
+              <a:rPr lang="en-US" sz="2700" b="1" dirty="0">
+                <a:solidFill>
+                  <a:srgbClr val="1C2A3A"/>
                 </a:solidFill>
                 <a:latin typeface="Cambria" pitchFamily="34" charset="0"/>
                 <a:ea typeface="Cambria" pitchFamily="34" charset="-122"/>
@@ -13740,7 +13416,7 @@
               </a:rPr>
               <a:t>The accuracy–discovery trade-off</a:t>
             </a:r>
-            <a:endParaRPr lang="en-US" sz="3000" dirty="0"/>
+            <a:endParaRPr lang="en-US" sz="2700" dirty="0"/>
           </a:p>
         </p:txBody>
       </p:sp>
@@ -13752,8 +13428,8 @@
         </p:nvSpPr>
         <p:spPr>
           <a:xfrm>
-            <a:off x="457200" y="932688"/>
-            <a:ext cx="11247120" cy="320040"/>
+            <a:off x="475488" y="950976"/>
+            <a:ext cx="11247120" cy="292608"/>
           </a:xfrm>
           <a:prstGeom prst="rect">
             <a:avLst/>
@@ -13769,9 +13445,9 @@
               <a:buNone/>
             </a:pPr>
             <a:r>
-              <a:rPr lang="en-US" sz="1400" i="1" dirty="0">
-                <a:solidFill>
-                  <a:srgbClr val="F96167"/>
+              <a:rPr lang="en-US" sz="1300" dirty="0">
+                <a:solidFill>
+                  <a:srgbClr val="6B7480"/>
                 </a:solidFill>
                 <a:latin typeface="Calibri" pitchFamily="34" charset="0"/>
                 <a:ea typeface="Calibri" pitchFamily="34" charset="-122"/>
@@ -13779,7 +13455,7 @@
               </a:rPr>
               <a:t>Same models, two very different rankings</a:t>
             </a:r>
-            <a:endParaRPr lang="en-US" sz="1400" dirty="0"/>
+            <a:endParaRPr lang="en-US" sz="1300" dirty="0"/>
           </a:p>
         </p:txBody>
       </p:sp>
@@ -13816,7 +13492,7 @@
         <p:spPr>
           <a:xfrm>
             <a:off x="457200" y="6473952"/>
-            <a:ext cx="7315200" cy="274320"/>
+            <a:ext cx="8229600" cy="274320"/>
           </a:xfrm>
           <a:prstGeom prst="rect">
             <a:avLst/>
@@ -13834,13 +13510,13 @@
             <a:r>
               <a:rPr lang="en-US" sz="900" dirty="0">
                 <a:solidFill>
-                  <a:srgbClr val="5B6586"/>
+                  <a:srgbClr val="6B7480"/>
                 </a:solidFill>
                 <a:latin typeface="Calibri" pitchFamily="34" charset="0"/>
                 <a:ea typeface="Calibri" pitchFamily="34" charset="-122"/>
                 <a:cs typeface="Calibri" pitchFamily="34" charset="-120"/>
               </a:rPr>
-              <a:t>Recommender Systems · Individual Project</a:t>
+              <a:t>Recommender Systems — Individual Project</a:t>
             </a:r>
             <a:endParaRPr lang="en-US" sz="900" dirty="0"/>
           </a:p>
@@ -13873,7 +13549,7 @@
             <a:r>
               <a:rPr lang="en-US" sz="900" dirty="0">
                 <a:solidFill>
-                  <a:srgbClr val="5B6586"/>
+                  <a:srgbClr val="6B7480"/>
                 </a:solidFill>
                 <a:latin typeface="Calibri" pitchFamily="34" charset="0"/>
                 <a:ea typeface="Calibri" pitchFamily="34" charset="-122"/>
@@ -13925,8 +13601,8 @@
         </p:nvSpPr>
         <p:spPr>
           <a:xfrm>
-            <a:off x="457200" y="320040"/>
-            <a:ext cx="11247120" cy="640080"/>
+            <a:off x="457200" y="365760"/>
+            <a:ext cx="11247120" cy="603504"/>
           </a:xfrm>
           <a:prstGeom prst="rect">
             <a:avLst/>
@@ -13942,9 +13618,9 @@
               <a:buNone/>
             </a:pPr>
             <a:r>
-              <a:rPr lang="en-US" sz="3000" b="1" dirty="0">
-                <a:solidFill>
-                  <a:srgbClr val="1E2761"/>
+              <a:rPr lang="en-US" sz="2700" b="1" dirty="0">
+                <a:solidFill>
+                  <a:srgbClr val="1C2A3A"/>
                 </a:solidFill>
                 <a:latin typeface="Cambria" pitchFamily="34" charset="0"/>
                 <a:ea typeface="Cambria" pitchFamily="34" charset="-122"/>
@@ -13952,7 +13628,7 @@
               </a:rPr>
               <a:t>Recommendation examples</a:t>
             </a:r>
-            <a:endParaRPr lang="en-US" sz="3000" dirty="0"/>
+            <a:endParaRPr lang="en-US" sz="2700" dirty="0"/>
           </a:p>
         </p:txBody>
       </p:sp>
@@ -13964,8 +13640,8 @@
         </p:nvSpPr>
         <p:spPr>
           <a:xfrm>
-            <a:off x="457200" y="932688"/>
-            <a:ext cx="11247120" cy="320040"/>
+            <a:off x="475488" y="950976"/>
+            <a:ext cx="11247120" cy="292608"/>
           </a:xfrm>
           <a:prstGeom prst="rect">
             <a:avLst/>
@@ -13981,9 +13657,9 @@
               <a:buNone/>
             </a:pPr>
             <a:r>
-              <a:rPr lang="en-US" sz="1400" i="1" dirty="0">
-                <a:solidFill>
-                  <a:srgbClr val="F96167"/>
+              <a:rPr lang="en-US" sz="1300" dirty="0">
+                <a:solidFill>
+                  <a:srgbClr val="6B7480"/>
                 </a:solidFill>
                 <a:latin typeface="Calibri" pitchFamily="34" charset="0"/>
                 <a:ea typeface="Calibri" pitchFamily="34" charset="-122"/>
@@ -13991,7 +13667,7 @@
               </a:rPr>
               <a:t>Same user (id 124204), top-5 by method — the personality of each model</a:t>
             </a:r>
-            <a:endParaRPr lang="en-US" sz="1400" dirty="0"/>
+            <a:endParaRPr lang="en-US" sz="1300" dirty="0"/>
           </a:p>
         </p:txBody>
       </p:sp>
@@ -14006,27 +13682,18 @@
             <a:off x="457200" y="1463040"/>
             <a:ext cx="11247120" cy="731520"/>
           </a:xfrm>
-          <a:prstGeom prst="roundRect">
-            <a:avLst>
-              <a:gd name="adj" fmla="val 10000"/>
-            </a:avLst>
+          <a:prstGeom prst="rect">
+            <a:avLst/>
           </a:prstGeom>
           <a:solidFill>
             <a:srgbClr val="FFFFFF"/>
           </a:solidFill>
           <a:ln w="12700">
             <a:solidFill>
-              <a:srgbClr val="E2E7F2"/>
+              <a:srgbClr val="D7DCE3"/>
             </a:solidFill>
             <a:prstDash val="solid"/>
           </a:ln>
-          <a:effectLst>
-            <a:outerShdw sx="100000" sy="100000" kx="0" ky="0" algn="bl" rotWithShape="0" blurRad="88900" dist="25400" dir="5400000">
-              <a:srgbClr val="000000">
-                <a:alpha val="12000"/>
-              </a:srgbClr>
-            </a:outerShdw>
-          </a:effectLst>
         </p:spPr>
       </p:sp>
       <p:sp>
@@ -14044,7 +13711,7 @@
             <a:avLst/>
           </a:prstGeom>
           <a:solidFill>
-            <a:srgbClr val="1E2761"/>
+            <a:srgbClr val="1C2A3A"/>
           </a:solidFill>
           <a:ln/>
         </p:spPr>
@@ -14076,7 +13743,7 @@
             <a:r>
               <a:rPr lang="en-US" sz="1400" b="1" dirty="0">
                 <a:solidFill>
-                  <a:srgbClr val="1E2761"/>
+                  <a:srgbClr val="1C2A3A"/>
                 </a:solidFill>
                 <a:latin typeface="Cambria" pitchFamily="34" charset="0"/>
                 <a:ea typeface="Cambria" pitchFamily="34" charset="-122"/>
@@ -14115,7 +13782,7 @@
             <a:r>
               <a:rPr lang="en-US" sz="1250" dirty="0">
                 <a:solidFill>
-                  <a:srgbClr val="21294D"/>
+                  <a:srgbClr val="26303B"/>
                 </a:solidFill>
                 <a:latin typeface="Calibri" pitchFamily="34" charset="0"/>
                 <a:ea typeface="Calibri" pitchFamily="34" charset="-122"/>
@@ -14138,27 +13805,18 @@
             <a:off x="457200" y="2304288"/>
             <a:ext cx="11247120" cy="731520"/>
           </a:xfrm>
-          <a:prstGeom prst="roundRect">
-            <a:avLst>
-              <a:gd name="adj" fmla="val 10000"/>
-            </a:avLst>
+          <a:prstGeom prst="rect">
+            <a:avLst/>
           </a:prstGeom>
           <a:solidFill>
             <a:srgbClr val="FFFFFF"/>
           </a:solidFill>
           <a:ln w="12700">
             <a:solidFill>
-              <a:srgbClr val="E2E7F2"/>
+              <a:srgbClr val="D7DCE3"/>
             </a:solidFill>
             <a:prstDash val="solid"/>
           </a:ln>
-          <a:effectLst>
-            <a:outerShdw sx="100000" sy="100000" kx="0" ky="0" algn="bl" rotWithShape="0" blurRad="88900" dist="25400" dir="5400000">
-              <a:srgbClr val="000000">
-                <a:alpha val="12000"/>
-              </a:srgbClr>
-            </a:outerShdw>
-          </a:effectLst>
         </p:spPr>
       </p:sp>
       <p:sp>
@@ -14176,7 +13834,7 @@
             <a:avLst/>
           </a:prstGeom>
           <a:solidFill>
-            <a:srgbClr val="1E2761"/>
+            <a:srgbClr val="1C2A3A"/>
           </a:solidFill>
           <a:ln/>
         </p:spPr>
@@ -14208,7 +13866,7 @@
             <a:r>
               <a:rPr lang="en-US" sz="1400" b="1" dirty="0">
                 <a:solidFill>
-                  <a:srgbClr val="1E2761"/>
+                  <a:srgbClr val="1C2A3A"/>
                 </a:solidFill>
                 <a:latin typeface="Cambria" pitchFamily="34" charset="0"/>
                 <a:ea typeface="Cambria" pitchFamily="34" charset="-122"/>
@@ -14247,7 +13905,7 @@
             <a:r>
               <a:rPr lang="en-US" sz="1250" dirty="0">
                 <a:solidFill>
-                  <a:srgbClr val="21294D"/>
+                  <a:srgbClr val="26303B"/>
                 </a:solidFill>
                 <a:latin typeface="Calibri" pitchFamily="34" charset="0"/>
                 <a:ea typeface="Calibri" pitchFamily="34" charset="-122"/>
@@ -14270,27 +13928,18 @@
             <a:off x="457200" y="3145536"/>
             <a:ext cx="11247120" cy="731520"/>
           </a:xfrm>
-          <a:prstGeom prst="roundRect">
-            <a:avLst>
-              <a:gd name="adj" fmla="val 10000"/>
-            </a:avLst>
+          <a:prstGeom prst="rect">
+            <a:avLst/>
           </a:prstGeom>
           <a:solidFill>
             <a:srgbClr val="FFFFFF"/>
           </a:solidFill>
           <a:ln w="12700">
             <a:solidFill>
-              <a:srgbClr val="E2E7F2"/>
+              <a:srgbClr val="D7DCE3"/>
             </a:solidFill>
             <a:prstDash val="solid"/>
           </a:ln>
-          <a:effectLst>
-            <a:outerShdw sx="100000" sy="100000" kx="0" ky="0" algn="bl" rotWithShape="0" blurRad="88900" dist="25400" dir="5400000">
-              <a:srgbClr val="000000">
-                <a:alpha val="12000"/>
-              </a:srgbClr>
-            </a:outerShdw>
-          </a:effectLst>
         </p:spPr>
       </p:sp>
       <p:sp>
@@ -14308,7 +13957,7 @@
             <a:avLst/>
           </a:prstGeom>
           <a:solidFill>
-            <a:srgbClr val="2C9C7F"/>
+            <a:srgbClr val="3F7A66"/>
           </a:solidFill>
           <a:ln/>
         </p:spPr>
@@ -14340,7 +13989,7 @@
             <a:r>
               <a:rPr lang="en-US" sz="1400" b="1" dirty="0">
                 <a:solidFill>
-                  <a:srgbClr val="1E2761"/>
+                  <a:srgbClr val="1C2A3A"/>
                 </a:solidFill>
                 <a:latin typeface="Cambria" pitchFamily="34" charset="0"/>
                 <a:ea typeface="Cambria" pitchFamily="34" charset="-122"/>
@@ -14379,7 +14028,7 @@
             <a:r>
               <a:rPr lang="en-US" sz="1250" dirty="0">
                 <a:solidFill>
-                  <a:srgbClr val="21294D"/>
+                  <a:srgbClr val="26303B"/>
                 </a:solidFill>
                 <a:latin typeface="Calibri" pitchFamily="34" charset="0"/>
                 <a:ea typeface="Calibri" pitchFamily="34" charset="-122"/>
@@ -14402,27 +14051,18 @@
             <a:off x="457200" y="3986784"/>
             <a:ext cx="11247120" cy="731520"/>
           </a:xfrm>
-          <a:prstGeom prst="roundRect">
-            <a:avLst>
-              <a:gd name="adj" fmla="val 10000"/>
-            </a:avLst>
+          <a:prstGeom prst="rect">
+            <a:avLst/>
           </a:prstGeom>
           <a:solidFill>
             <a:srgbClr val="FFFFFF"/>
           </a:solidFill>
           <a:ln w="12700">
             <a:solidFill>
-              <a:srgbClr val="E2E7F2"/>
+              <a:srgbClr val="D7DCE3"/>
             </a:solidFill>
             <a:prstDash val="solid"/>
           </a:ln>
-          <a:effectLst>
-            <a:outerShdw sx="100000" sy="100000" kx="0" ky="0" algn="bl" rotWithShape="0" blurRad="88900" dist="25400" dir="5400000">
-              <a:srgbClr val="000000">
-                <a:alpha val="12000"/>
-              </a:srgbClr>
-            </a:outerShdw>
-          </a:effectLst>
         </p:spPr>
       </p:sp>
       <p:sp>
@@ -14440,7 +14080,7 @@
             <a:avLst/>
           </a:prstGeom>
           <a:solidFill>
-            <a:srgbClr val="2C9C7F"/>
+            <a:srgbClr val="3F7A66"/>
           </a:solidFill>
           <a:ln/>
         </p:spPr>
@@ -14472,7 +14112,7 @@
             <a:r>
               <a:rPr lang="en-US" sz="1400" b="1" dirty="0">
                 <a:solidFill>
-                  <a:srgbClr val="1E2761"/>
+                  <a:srgbClr val="1C2A3A"/>
                 </a:solidFill>
                 <a:latin typeface="Cambria" pitchFamily="34" charset="0"/>
                 <a:ea typeface="Cambria" pitchFamily="34" charset="-122"/>
@@ -14511,7 +14151,7 @@
             <a:r>
               <a:rPr lang="en-US" sz="1250" dirty="0">
                 <a:solidFill>
-                  <a:srgbClr val="21294D"/>
+                  <a:srgbClr val="26303B"/>
                 </a:solidFill>
                 <a:latin typeface="Calibri" pitchFamily="34" charset="0"/>
                 <a:ea typeface="Calibri" pitchFamily="34" charset="-122"/>
@@ -14534,27 +14174,18 @@
             <a:off x="457200" y="4828032"/>
             <a:ext cx="11247120" cy="731520"/>
           </a:xfrm>
-          <a:prstGeom prst="roundRect">
-            <a:avLst>
-              <a:gd name="adj" fmla="val 10000"/>
-            </a:avLst>
+          <a:prstGeom prst="rect">
+            <a:avLst/>
           </a:prstGeom>
           <a:solidFill>
             <a:srgbClr val="FFFFFF"/>
           </a:solidFill>
           <a:ln w="12700">
             <a:solidFill>
-              <a:srgbClr val="E2E7F2"/>
+              <a:srgbClr val="D7DCE3"/>
             </a:solidFill>
             <a:prstDash val="solid"/>
           </a:ln>
-          <a:effectLst>
-            <a:outerShdw sx="100000" sy="100000" kx="0" ky="0" algn="bl" rotWithShape="0" blurRad="88900" dist="25400" dir="5400000">
-              <a:srgbClr val="000000">
-                <a:alpha val="12000"/>
-              </a:srgbClr>
-            </a:outerShdw>
-          </a:effectLst>
         </p:spPr>
       </p:sp>
       <p:sp>
@@ -14572,7 +14203,7 @@
             <a:avLst/>
           </a:prstGeom>
           <a:solidFill>
-            <a:srgbClr val="F96167"/>
+            <a:srgbClr val="33617E"/>
           </a:solidFill>
           <a:ln/>
         </p:spPr>
@@ -14604,7 +14235,7 @@
             <a:r>
               <a:rPr lang="en-US" sz="1400" b="1" dirty="0">
                 <a:solidFill>
-                  <a:srgbClr val="1E2761"/>
+                  <a:srgbClr val="1C2A3A"/>
                 </a:solidFill>
                 <a:latin typeface="Cambria" pitchFamily="34" charset="0"/>
                 <a:ea typeface="Cambria" pitchFamily="34" charset="-122"/>
@@ -14643,7 +14274,7 @@
             <a:r>
               <a:rPr lang="en-US" sz="1250" dirty="0">
                 <a:solidFill>
-                  <a:srgbClr val="21294D"/>
+                  <a:srgbClr val="26303B"/>
                 </a:solidFill>
                 <a:latin typeface="Calibri" pitchFamily="34" charset="0"/>
                 <a:ea typeface="Calibri" pitchFamily="34" charset="-122"/>
@@ -14682,7 +14313,7 @@
             <a:r>
               <a:rPr lang="en-US" sz="1250" i="1" dirty="0">
                 <a:solidFill>
-                  <a:srgbClr val="5B6586"/>
+                  <a:srgbClr val="6B7480"/>
                 </a:solidFill>
                 <a:latin typeface="Calibri" pitchFamily="34" charset="0"/>
                 <a:ea typeface="Calibri" pitchFamily="34" charset="-122"/>
@@ -14703,7 +14334,7 @@
         <p:spPr>
           <a:xfrm>
             <a:off x="457200" y="6473952"/>
-            <a:ext cx="7315200" cy="274320"/>
+            <a:ext cx="8229600" cy="274320"/>
           </a:xfrm>
           <a:prstGeom prst="rect">
             <a:avLst/>
@@ -14721,13 +14352,13 @@
             <a:r>
               <a:rPr lang="en-US" sz="900" dirty="0">
                 <a:solidFill>
-                  <a:srgbClr val="5B6586"/>
+                  <a:srgbClr val="6B7480"/>
                 </a:solidFill>
                 <a:latin typeface="Calibri" pitchFamily="34" charset="0"/>
                 <a:ea typeface="Calibri" pitchFamily="34" charset="-122"/>
                 <a:cs typeface="Calibri" pitchFamily="34" charset="-120"/>
               </a:rPr>
-              <a:t>Recommender Systems · Individual Project</a:t>
+              <a:t>Recommender Systems — Individual Project</a:t>
             </a:r>
             <a:endParaRPr lang="en-US" sz="900" dirty="0"/>
           </a:p>
@@ -14760,7 +14391,7 @@
             <a:r>
               <a:rPr lang="en-US" sz="900" dirty="0">
                 <a:solidFill>
-                  <a:srgbClr val="5B6586"/>
+                  <a:srgbClr val="6B7480"/>
                 </a:solidFill>
                 <a:latin typeface="Calibri" pitchFamily="34" charset="0"/>
                 <a:ea typeface="Calibri" pitchFamily="34" charset="-122"/>
@@ -14812,8 +14443,8 @@
         </p:nvSpPr>
         <p:spPr>
           <a:xfrm>
-            <a:off x="457200" y="320040"/>
-            <a:ext cx="11247120" cy="640080"/>
+            <a:off x="457200" y="365760"/>
+            <a:ext cx="11247120" cy="603504"/>
           </a:xfrm>
           <a:prstGeom prst="rect">
             <a:avLst/>
@@ -14829,9 +14460,9 @@
               <a:buNone/>
             </a:pPr>
             <a:r>
-              <a:rPr lang="en-US" sz="3000" b="1" dirty="0">
-                <a:solidFill>
-                  <a:srgbClr val="1E2761"/>
+              <a:rPr lang="en-US" sz="2700" b="1" dirty="0">
+                <a:solidFill>
+                  <a:srgbClr val="1C2A3A"/>
                 </a:solidFill>
                 <a:latin typeface="Cambria" pitchFamily="34" charset="0"/>
                 <a:ea typeface="Cambria" pitchFamily="34" charset="-122"/>
@@ -14839,7 +14470,7 @@
               </a:rPr>
               <a:t>Interactive prototype (UX)</a:t>
             </a:r>
-            <a:endParaRPr lang="en-US" sz="3000" dirty="0"/>
+            <a:endParaRPr lang="en-US" sz="2700" dirty="0"/>
           </a:p>
         </p:txBody>
       </p:sp>
@@ -14851,8 +14482,8 @@
         </p:nvSpPr>
         <p:spPr>
           <a:xfrm>
-            <a:off x="457200" y="932688"/>
-            <a:ext cx="11247120" cy="320040"/>
+            <a:off x="475488" y="950976"/>
+            <a:ext cx="11247120" cy="292608"/>
           </a:xfrm>
           <a:prstGeom prst="rect">
             <a:avLst/>
@@ -14868,9 +14499,9 @@
               <a:buNone/>
             </a:pPr>
             <a:r>
-              <a:rPr lang="en-US" sz="1400" i="1" dirty="0">
-                <a:solidFill>
-                  <a:srgbClr val="F96167"/>
+              <a:rPr lang="en-US" sz="1300" dirty="0">
+                <a:solidFill>
+                  <a:srgbClr val="6B7480"/>
                 </a:solidFill>
                 <a:latin typeface="Calibri" pitchFamily="34" charset="0"/>
                 <a:ea typeface="Calibri" pitchFamily="34" charset="-122"/>
@@ -14878,7 +14509,7 @@
               </a:rPr>
               <a:t>Streamlit app — onboard a new user or explore an existing one</a:t>
             </a:r>
-            <a:endParaRPr lang="en-US" sz="1400" dirty="0"/>
+            <a:endParaRPr lang="en-US" sz="1300" dirty="0"/>
           </a:p>
         </p:txBody>
       </p:sp>
@@ -14893,27 +14524,18 @@
             <a:off x="457200" y="1508760"/>
             <a:ext cx="7498080" cy="3977640"/>
           </a:xfrm>
-          <a:prstGeom prst="roundRect">
-            <a:avLst>
-              <a:gd name="adj" fmla="val 1839"/>
-            </a:avLst>
+          <a:prstGeom prst="rect">
+            <a:avLst/>
           </a:prstGeom>
           <a:solidFill>
             <a:srgbClr val="FFFFFF"/>
           </a:solidFill>
           <a:ln w="12700">
             <a:solidFill>
-              <a:srgbClr val="E2E7F2"/>
+              <a:srgbClr val="D7DCE3"/>
             </a:solidFill>
             <a:prstDash val="solid"/>
           </a:ln>
-          <a:effectLst>
-            <a:outerShdw sx="100000" sy="100000" kx="0" ky="0" algn="bl" rotWithShape="0" blurRad="88900" dist="25400" dir="5400000">
-              <a:srgbClr val="000000">
-                <a:alpha val="12000"/>
-              </a:srgbClr>
-            </a:outerShdw>
-          </a:effectLst>
         </p:spPr>
       </p:sp>
       <p:sp>
@@ -15023,7 +14645,7 @@
             <a:r>
               <a:rPr lang="en-US" sz="1000" dirty="0">
                 <a:solidFill>
-                  <a:srgbClr val="5B6586"/>
+                  <a:srgbClr val="6B7480"/>
                 </a:solidFill>
                 <a:latin typeface="Calibri" pitchFamily="34" charset="0"/>
                 <a:ea typeface="Calibri" pitchFamily="34" charset="-122"/>
@@ -15052,7 +14674,7 @@
             </a:avLst>
           </a:prstGeom>
           <a:solidFill>
-            <a:srgbClr val="1E2761"/>
+            <a:srgbClr val="1C2A3A"/>
           </a:solidFill>
           <a:ln/>
         </p:spPr>
@@ -15113,7 +14735,7 @@
             <a:r>
               <a:rPr lang="en-US" sz="900" dirty="0">
                 <a:solidFill>
-                  <a:srgbClr val="CADCFC"/>
+                  <a:srgbClr val="CDD6E0"/>
                 </a:solidFill>
               </a:rPr>
               <a:t>User</a:t>
@@ -15156,7 +14778,7 @@
             <a:r>
               <a:rPr lang="en-US" sz="900" dirty="0">
                 <a:solidFill>
-                  <a:srgbClr val="CADCFC"/>
+                  <a:srgbClr val="CDD6E0"/>
                 </a:solidFill>
               </a:rPr>
               <a:t>Recommendations</a:t>
@@ -15199,7 +14821,7 @@
             <a:r>
               <a:rPr lang="en-US" sz="900" dirty="0">
                 <a:solidFill>
-                  <a:srgbClr val="CADCFC"/>
+                  <a:srgbClr val="CDD6E0"/>
                 </a:solidFill>
               </a:rPr>
               <a:t>Algorithms</a:t>
@@ -15291,7 +14913,7 @@
             <a:avLst/>
           </a:prstGeom>
           <a:solidFill>
-            <a:srgbClr val="1E2761"/>
+            <a:srgbClr val="1C2A3A"/>
           </a:solidFill>
           <a:ln/>
         </p:spPr>
@@ -15323,7 +14945,7 @@
             <a:r>
               <a:rPr lang="en-US" sz="1100" b="1" dirty="0">
                 <a:solidFill>
-                  <a:srgbClr val="1E2761"/>
+                  <a:srgbClr val="1C2A3A"/>
                 </a:solidFill>
                 <a:latin typeface="Cambria" pitchFamily="34" charset="0"/>
                 <a:ea typeface="Cambria" pitchFamily="34" charset="-122"/>
@@ -15346,27 +14968,18 @@
             <a:off x="2514600" y="2350008"/>
             <a:ext cx="1691640" cy="603504"/>
           </a:xfrm>
-          <a:prstGeom prst="roundRect">
-            <a:avLst>
-              <a:gd name="adj" fmla="val 12121"/>
-            </a:avLst>
+          <a:prstGeom prst="rect">
+            <a:avLst/>
           </a:prstGeom>
           <a:solidFill>
-            <a:srgbClr val="F4F6FB"/>
+            <a:srgbClr val="F4F5F7"/>
           </a:solidFill>
           <a:ln w="12700">
             <a:solidFill>
-              <a:srgbClr val="E2E7F2"/>
+              <a:srgbClr val="D7DCE3"/>
             </a:solidFill>
             <a:prstDash val="solid"/>
           </a:ln>
-          <a:effectLst>
-            <a:outerShdw sx="100000" sy="100000" kx="0" ky="0" algn="bl" rotWithShape="0" blurRad="88900" dist="25400" dir="5400000">
-              <a:srgbClr val="000000">
-                <a:alpha val="12000"/>
-              </a:srgbClr>
-            </a:outerShdw>
-          </a:effectLst>
         </p:spPr>
       </p:sp>
       <p:sp>
@@ -15396,7 +15009,7 @@
             <a:r>
               <a:rPr lang="en-US" sz="1000" b="1" dirty="0">
                 <a:solidFill>
-                  <a:srgbClr val="21294D"/>
+                  <a:srgbClr val="26303B"/>
                 </a:solidFill>
                 <a:latin typeface="Calibri" pitchFamily="34" charset="0"/>
                 <a:ea typeface="Calibri" pitchFamily="34" charset="-122"/>
@@ -15435,13 +15048,13 @@
             <a:r>
               <a:rPr lang="en-US" sz="800" dirty="0">
                 <a:solidFill>
-                  <a:srgbClr val="5B6586"/>
+                  <a:srgbClr val="6B7480"/>
                 </a:solidFill>
                 <a:latin typeface="Calibri" pitchFamily="34" charset="0"/>
                 <a:ea typeface="Calibri" pitchFamily="34" charset="-122"/>
                 <a:cs typeface="Calibri" pitchFamily="34" charset="-120"/>
               </a:rPr>
-              <a:t>Drama · Comedy</a:t>
+              <a:t>Comedy · Drama</a:t>
             </a:r>
             <a:endParaRPr lang="en-US" sz="800" dirty="0"/>
           </a:p>
@@ -15458,27 +15071,18 @@
             <a:off x="2514600" y="3063240"/>
             <a:ext cx="1691640" cy="603504"/>
           </a:xfrm>
-          <a:prstGeom prst="roundRect">
-            <a:avLst>
-              <a:gd name="adj" fmla="val 12121"/>
-            </a:avLst>
+          <a:prstGeom prst="rect">
+            <a:avLst/>
           </a:prstGeom>
           <a:solidFill>
-            <a:srgbClr val="F4F6FB"/>
+            <a:srgbClr val="F4F5F7"/>
           </a:solidFill>
           <a:ln w="12700">
             <a:solidFill>
-              <a:srgbClr val="E2E7F2"/>
+              <a:srgbClr val="D7DCE3"/>
             </a:solidFill>
             <a:prstDash val="solid"/>
           </a:ln>
-          <a:effectLst>
-            <a:outerShdw sx="100000" sy="100000" kx="0" ky="0" algn="bl" rotWithShape="0" blurRad="88900" dist="25400" dir="5400000">
-              <a:srgbClr val="000000">
-                <a:alpha val="12000"/>
-              </a:srgbClr>
-            </a:outerShdw>
-          </a:effectLst>
         </p:spPr>
       </p:sp>
       <p:sp>
@@ -15508,7 +15112,7 @@
             <a:r>
               <a:rPr lang="en-US" sz="1000" b="1" dirty="0">
                 <a:solidFill>
-                  <a:srgbClr val="21294D"/>
+                  <a:srgbClr val="26303B"/>
                 </a:solidFill>
                 <a:latin typeface="Calibri" pitchFamily="34" charset="0"/>
                 <a:ea typeface="Calibri" pitchFamily="34" charset="-122"/>
@@ -15547,13 +15151,13 @@
             <a:r>
               <a:rPr lang="en-US" sz="800" dirty="0">
                 <a:solidFill>
-                  <a:srgbClr val="5B6586"/>
+                  <a:srgbClr val="6B7480"/>
                 </a:solidFill>
                 <a:latin typeface="Calibri" pitchFamily="34" charset="0"/>
                 <a:ea typeface="Calibri" pitchFamily="34" charset="-122"/>
                 <a:cs typeface="Calibri" pitchFamily="34" charset="-120"/>
               </a:rPr>
-              <a:t>Drama · Comedy</a:t>
+              <a:t>Crime · Drama</a:t>
             </a:r>
             <a:endParaRPr lang="en-US" sz="800" dirty="0"/>
           </a:p>
@@ -15570,27 +15174,18 @@
             <a:off x="2514600" y="3776472"/>
             <a:ext cx="1691640" cy="603504"/>
           </a:xfrm>
-          <a:prstGeom prst="roundRect">
-            <a:avLst>
-              <a:gd name="adj" fmla="val 12121"/>
-            </a:avLst>
+          <a:prstGeom prst="rect">
+            <a:avLst/>
           </a:prstGeom>
           <a:solidFill>
-            <a:srgbClr val="F4F6FB"/>
+            <a:srgbClr val="F4F5F7"/>
           </a:solidFill>
           <a:ln w="12700">
             <a:solidFill>
-              <a:srgbClr val="E2E7F2"/>
+              <a:srgbClr val="D7DCE3"/>
             </a:solidFill>
             <a:prstDash val="solid"/>
           </a:ln>
-          <a:effectLst>
-            <a:outerShdw sx="100000" sy="100000" kx="0" ky="0" algn="bl" rotWithShape="0" blurRad="88900" dist="25400" dir="5400000">
-              <a:srgbClr val="000000">
-                <a:alpha val="12000"/>
-              </a:srgbClr>
-            </a:outerShdw>
-          </a:effectLst>
         </p:spPr>
       </p:sp>
       <p:sp>
@@ -15620,7 +15215,7 @@
             <a:r>
               <a:rPr lang="en-US" sz="1000" b="1" dirty="0">
                 <a:solidFill>
-                  <a:srgbClr val="21294D"/>
+                  <a:srgbClr val="26303B"/>
                 </a:solidFill>
                 <a:latin typeface="Calibri" pitchFamily="34" charset="0"/>
                 <a:ea typeface="Calibri" pitchFamily="34" charset="-122"/>
@@ -15659,13 +15254,13 @@
             <a:r>
               <a:rPr lang="en-US" sz="800" dirty="0">
                 <a:solidFill>
-                  <a:srgbClr val="5B6586"/>
+                  <a:srgbClr val="6B7480"/>
                 </a:solidFill>
                 <a:latin typeface="Calibri" pitchFamily="34" charset="0"/>
                 <a:ea typeface="Calibri" pitchFamily="34" charset="-122"/>
                 <a:cs typeface="Calibri" pitchFamily="34" charset="-120"/>
               </a:rPr>
-              <a:t>Drama · Comedy</a:t>
+              <a:t>Action · Sci-Fi</a:t>
             </a:r>
             <a:endParaRPr lang="en-US" sz="800" dirty="0"/>
           </a:p>
@@ -15682,27 +15277,18 @@
             <a:off x="2514600" y="4489704"/>
             <a:ext cx="1691640" cy="603504"/>
           </a:xfrm>
-          <a:prstGeom prst="roundRect">
-            <a:avLst>
-              <a:gd name="adj" fmla="val 12121"/>
-            </a:avLst>
+          <a:prstGeom prst="rect">
+            <a:avLst/>
           </a:prstGeom>
           <a:solidFill>
-            <a:srgbClr val="F4F6FB"/>
+            <a:srgbClr val="F4F5F7"/>
           </a:solidFill>
           <a:ln w="12700">
             <a:solidFill>
-              <a:srgbClr val="E2E7F2"/>
+              <a:srgbClr val="D7DCE3"/>
             </a:solidFill>
             <a:prstDash val="solid"/>
           </a:ln>
-          <a:effectLst>
-            <a:outerShdw sx="100000" sy="100000" kx="0" ky="0" algn="bl" rotWithShape="0" blurRad="88900" dist="25400" dir="5400000">
-              <a:srgbClr val="000000">
-                <a:alpha val="12000"/>
-              </a:srgbClr>
-            </a:outerShdw>
-          </a:effectLst>
         </p:spPr>
       </p:sp>
       <p:sp>
@@ -15732,7 +15318,7 @@
             <a:r>
               <a:rPr lang="en-US" sz="1000" b="1" dirty="0">
                 <a:solidFill>
-                  <a:srgbClr val="21294D"/>
+                  <a:srgbClr val="26303B"/>
                 </a:solidFill>
                 <a:latin typeface="Calibri" pitchFamily="34" charset="0"/>
                 <a:ea typeface="Calibri" pitchFamily="34" charset="-122"/>
@@ -15771,13 +15357,13 @@
             <a:r>
               <a:rPr lang="en-US" sz="800" dirty="0">
                 <a:solidFill>
-                  <a:srgbClr val="5B6586"/>
+                  <a:srgbClr val="6B7480"/>
                 </a:solidFill>
                 <a:latin typeface="Calibri" pitchFamily="34" charset="0"/>
                 <a:ea typeface="Calibri" pitchFamily="34" charset="-122"/>
                 <a:cs typeface="Calibri" pitchFamily="34" charset="-120"/>
               </a:rPr>
-              <a:t>Drama · Comedy</a:t>
+              <a:t>Action · Sci-Fi</a:t>
             </a:r>
             <a:endParaRPr lang="en-US" sz="800" dirty="0"/>
           </a:p>
@@ -15798,7 +15384,7 @@
             <a:avLst/>
           </a:prstGeom>
           <a:solidFill>
-            <a:srgbClr val="2C9C7F"/>
+            <a:srgbClr val="3F7A66"/>
           </a:solidFill>
           <a:ln/>
         </p:spPr>
@@ -15830,7 +15416,7 @@
             <a:r>
               <a:rPr lang="en-US" sz="1100" b="1" dirty="0">
                 <a:solidFill>
-                  <a:srgbClr val="1E2761"/>
+                  <a:srgbClr val="1C2A3A"/>
                 </a:solidFill>
                 <a:latin typeface="Cambria" pitchFamily="34" charset="0"/>
                 <a:ea typeface="Cambria" pitchFamily="34" charset="-122"/>
@@ -15853,27 +15439,18 @@
             <a:off x="4315968" y="2350008"/>
             <a:ext cx="1691640" cy="603504"/>
           </a:xfrm>
-          <a:prstGeom prst="roundRect">
-            <a:avLst>
-              <a:gd name="adj" fmla="val 12121"/>
-            </a:avLst>
+          <a:prstGeom prst="rect">
+            <a:avLst/>
           </a:prstGeom>
           <a:solidFill>
-            <a:srgbClr val="F4F6FB"/>
+            <a:srgbClr val="F4F5F7"/>
           </a:solidFill>
           <a:ln w="12700">
             <a:solidFill>
-              <a:srgbClr val="E2E7F2"/>
+              <a:srgbClr val="D7DCE3"/>
             </a:solidFill>
             <a:prstDash val="solid"/>
           </a:ln>
-          <a:effectLst>
-            <a:outerShdw sx="100000" sy="100000" kx="0" ky="0" algn="bl" rotWithShape="0" blurRad="88900" dist="25400" dir="5400000">
-              <a:srgbClr val="000000">
-                <a:alpha val="12000"/>
-              </a:srgbClr>
-            </a:outerShdw>
-          </a:effectLst>
         </p:spPr>
       </p:sp>
       <p:sp>
@@ -15903,7 +15480,7 @@
             <a:r>
               <a:rPr lang="en-US" sz="1000" b="1" dirty="0">
                 <a:solidFill>
-                  <a:srgbClr val="21294D"/>
+                  <a:srgbClr val="26303B"/>
                 </a:solidFill>
                 <a:latin typeface="Calibri" pitchFamily="34" charset="0"/>
                 <a:ea typeface="Calibri" pitchFamily="34" charset="-122"/>
@@ -15942,13 +15519,13 @@
             <a:r>
               <a:rPr lang="en-US" sz="800" dirty="0">
                 <a:solidFill>
-                  <a:srgbClr val="5B6586"/>
+                  <a:srgbClr val="6B7480"/>
                 </a:solidFill>
                 <a:latin typeface="Calibri" pitchFamily="34" charset="0"/>
                 <a:ea typeface="Calibri" pitchFamily="34" charset="-122"/>
                 <a:cs typeface="Calibri" pitchFamily="34" charset="-120"/>
               </a:rPr>
-              <a:t>Drama · Comedy</a:t>
+              <a:t>Documentary</a:t>
             </a:r>
             <a:endParaRPr lang="en-US" sz="800" dirty="0"/>
           </a:p>
@@ -15965,27 +15542,18 @@
             <a:off x="4315968" y="3063240"/>
             <a:ext cx="1691640" cy="603504"/>
           </a:xfrm>
-          <a:prstGeom prst="roundRect">
-            <a:avLst>
-              <a:gd name="adj" fmla="val 12121"/>
-            </a:avLst>
+          <a:prstGeom prst="rect">
+            <a:avLst/>
           </a:prstGeom>
           <a:solidFill>
-            <a:srgbClr val="F4F6FB"/>
+            <a:srgbClr val="F4F5F7"/>
           </a:solidFill>
           <a:ln w="12700">
             <a:solidFill>
-              <a:srgbClr val="E2E7F2"/>
+              <a:srgbClr val="D7DCE3"/>
             </a:solidFill>
             <a:prstDash val="solid"/>
           </a:ln>
-          <a:effectLst>
-            <a:outerShdw sx="100000" sy="100000" kx="0" ky="0" algn="bl" rotWithShape="0" blurRad="88900" dist="25400" dir="5400000">
-              <a:srgbClr val="000000">
-                <a:alpha val="12000"/>
-              </a:srgbClr>
-            </a:outerShdw>
-          </a:effectLst>
         </p:spPr>
       </p:sp>
       <p:sp>
@@ -16015,7 +15583,7 @@
             <a:r>
               <a:rPr lang="en-US" sz="1000" b="1" dirty="0">
                 <a:solidFill>
-                  <a:srgbClr val="21294D"/>
+                  <a:srgbClr val="26303B"/>
                 </a:solidFill>
                 <a:latin typeface="Calibri" pitchFamily="34" charset="0"/>
                 <a:ea typeface="Calibri" pitchFamily="34" charset="-122"/>
@@ -16054,13 +15622,13 @@
             <a:r>
               <a:rPr lang="en-US" sz="800" dirty="0">
                 <a:solidFill>
-                  <a:srgbClr val="5B6586"/>
+                  <a:srgbClr val="6B7480"/>
                 </a:solidFill>
                 <a:latin typeface="Calibri" pitchFamily="34" charset="0"/>
                 <a:ea typeface="Calibri" pitchFamily="34" charset="-122"/>
                 <a:cs typeface="Calibri" pitchFamily="34" charset="-120"/>
               </a:rPr>
-              <a:t>Drama · Comedy</a:t>
+              <a:t>Adventure · History</a:t>
             </a:r>
             <a:endParaRPr lang="en-US" sz="800" dirty="0"/>
           </a:p>
@@ -16077,27 +15645,18 @@
             <a:off x="4315968" y="3776472"/>
             <a:ext cx="1691640" cy="603504"/>
           </a:xfrm>
-          <a:prstGeom prst="roundRect">
-            <a:avLst>
-              <a:gd name="adj" fmla="val 12121"/>
-            </a:avLst>
+          <a:prstGeom prst="rect">
+            <a:avLst/>
           </a:prstGeom>
           <a:solidFill>
-            <a:srgbClr val="F4F6FB"/>
+            <a:srgbClr val="F4F5F7"/>
           </a:solidFill>
           <a:ln w="12700">
             <a:solidFill>
-              <a:srgbClr val="E2E7F2"/>
+              <a:srgbClr val="D7DCE3"/>
             </a:solidFill>
             <a:prstDash val="solid"/>
           </a:ln>
-          <a:effectLst>
-            <a:outerShdw sx="100000" sy="100000" kx="0" ky="0" algn="bl" rotWithShape="0" blurRad="88900" dist="25400" dir="5400000">
-              <a:srgbClr val="000000">
-                <a:alpha val="12000"/>
-              </a:srgbClr>
-            </a:outerShdw>
-          </a:effectLst>
         </p:spPr>
       </p:sp>
       <p:sp>
@@ -16127,7 +15686,7 @@
             <a:r>
               <a:rPr lang="en-US" sz="1000" b="1" dirty="0">
                 <a:solidFill>
-                  <a:srgbClr val="21294D"/>
+                  <a:srgbClr val="26303B"/>
                 </a:solidFill>
                 <a:latin typeface="Calibri" pitchFamily="34" charset="0"/>
                 <a:ea typeface="Calibri" pitchFamily="34" charset="-122"/>
@@ -16166,13 +15725,13 @@
             <a:r>
               <a:rPr lang="en-US" sz="800" dirty="0">
                 <a:solidFill>
-                  <a:srgbClr val="5B6586"/>
+                  <a:srgbClr val="6B7480"/>
                 </a:solidFill>
                 <a:latin typeface="Calibri" pitchFamily="34" charset="0"/>
                 <a:ea typeface="Calibri" pitchFamily="34" charset="-122"/>
                 <a:cs typeface="Calibri" pitchFamily="34" charset="-120"/>
               </a:rPr>
-              <a:t>Drama · Comedy</a:t>
+              <a:t>Action · Adventure</a:t>
             </a:r>
             <a:endParaRPr lang="en-US" sz="800" dirty="0"/>
           </a:p>
@@ -16189,27 +15748,18 @@
             <a:off x="4315968" y="4489704"/>
             <a:ext cx="1691640" cy="603504"/>
           </a:xfrm>
-          <a:prstGeom prst="roundRect">
-            <a:avLst>
-              <a:gd name="adj" fmla="val 12121"/>
-            </a:avLst>
+          <a:prstGeom prst="rect">
+            <a:avLst/>
           </a:prstGeom>
           <a:solidFill>
-            <a:srgbClr val="F4F6FB"/>
+            <a:srgbClr val="F4F5F7"/>
           </a:solidFill>
           <a:ln w="12700">
             <a:solidFill>
-              <a:srgbClr val="E2E7F2"/>
+              <a:srgbClr val="D7DCE3"/>
             </a:solidFill>
             <a:prstDash val="solid"/>
           </a:ln>
-          <a:effectLst>
-            <a:outerShdw sx="100000" sy="100000" kx="0" ky="0" algn="bl" rotWithShape="0" blurRad="88900" dist="25400" dir="5400000">
-              <a:srgbClr val="000000">
-                <a:alpha val="12000"/>
-              </a:srgbClr>
-            </a:outerShdw>
-          </a:effectLst>
         </p:spPr>
       </p:sp>
       <p:sp>
@@ -16239,7 +15789,7 @@
             <a:r>
               <a:rPr lang="en-US" sz="1000" b="1" dirty="0">
                 <a:solidFill>
-                  <a:srgbClr val="21294D"/>
+                  <a:srgbClr val="26303B"/>
                 </a:solidFill>
                 <a:latin typeface="Calibri" pitchFamily="34" charset="0"/>
                 <a:ea typeface="Calibri" pitchFamily="34" charset="-122"/>
@@ -16278,13 +15828,13 @@
             <a:r>
               <a:rPr lang="en-US" sz="800" dirty="0">
                 <a:solidFill>
-                  <a:srgbClr val="5B6586"/>
+                  <a:srgbClr val="6B7480"/>
                 </a:solidFill>
                 <a:latin typeface="Calibri" pitchFamily="34" charset="0"/>
                 <a:ea typeface="Calibri" pitchFamily="34" charset="-122"/>
                 <a:cs typeface="Calibri" pitchFamily="34" charset="-120"/>
               </a:rPr>
-              <a:t>Drama · Comedy</a:t>
+              <a:t>Documentary</a:t>
             </a:r>
             <a:endParaRPr lang="en-US" sz="800" dirty="0"/>
           </a:p>
@@ -16305,7 +15855,7 @@
             <a:avLst/>
           </a:prstGeom>
           <a:solidFill>
-            <a:srgbClr val="F96167"/>
+            <a:srgbClr val="33617E"/>
           </a:solidFill>
           <a:ln/>
         </p:spPr>
@@ -16337,7 +15887,7 @@
             <a:r>
               <a:rPr lang="en-US" sz="1100" b="1" dirty="0">
                 <a:solidFill>
-                  <a:srgbClr val="1E2761"/>
+                  <a:srgbClr val="1C2A3A"/>
                 </a:solidFill>
                 <a:latin typeface="Cambria" pitchFamily="34" charset="0"/>
                 <a:ea typeface="Cambria" pitchFamily="34" charset="-122"/>
@@ -16360,27 +15910,18 @@
             <a:off x="6117336" y="2350008"/>
             <a:ext cx="1691640" cy="603504"/>
           </a:xfrm>
-          <a:prstGeom prst="roundRect">
-            <a:avLst>
-              <a:gd name="adj" fmla="val 12121"/>
-            </a:avLst>
+          <a:prstGeom prst="rect">
+            <a:avLst/>
           </a:prstGeom>
           <a:solidFill>
-            <a:srgbClr val="F4F6FB"/>
+            <a:srgbClr val="F4F5F7"/>
           </a:solidFill>
           <a:ln w="12700">
             <a:solidFill>
-              <a:srgbClr val="E2E7F2"/>
+              <a:srgbClr val="D7DCE3"/>
             </a:solidFill>
             <a:prstDash val="solid"/>
           </a:ln>
-          <a:effectLst>
-            <a:outerShdw sx="100000" sy="100000" kx="0" ky="0" algn="bl" rotWithShape="0" blurRad="88900" dist="25400" dir="5400000">
-              <a:srgbClr val="000000">
-                <a:alpha val="12000"/>
-              </a:srgbClr>
-            </a:outerShdw>
-          </a:effectLst>
         </p:spPr>
       </p:sp>
       <p:sp>
@@ -16410,7 +15951,7 @@
             <a:r>
               <a:rPr lang="en-US" sz="1000" b="1" dirty="0">
                 <a:solidFill>
-                  <a:srgbClr val="21294D"/>
+                  <a:srgbClr val="26303B"/>
                 </a:solidFill>
                 <a:latin typeface="Calibri" pitchFamily="34" charset="0"/>
                 <a:ea typeface="Calibri" pitchFamily="34" charset="-122"/>
@@ -16449,13 +15990,13 @@
             <a:r>
               <a:rPr lang="en-US" sz="800" dirty="0">
                 <a:solidFill>
-                  <a:srgbClr val="5B6586"/>
+                  <a:srgbClr val="6B7480"/>
                 </a:solidFill>
                 <a:latin typeface="Calibri" pitchFamily="34" charset="0"/>
                 <a:ea typeface="Calibri" pitchFamily="34" charset="-122"/>
                 <a:cs typeface="Calibri" pitchFamily="34" charset="-120"/>
               </a:rPr>
-              <a:t>Drama · Comedy</a:t>
+              <a:t>Documentary</a:t>
             </a:r>
             <a:endParaRPr lang="en-US" sz="800" dirty="0"/>
           </a:p>
@@ -16472,27 +16013,18 @@
             <a:off x="6117336" y="3063240"/>
             <a:ext cx="1691640" cy="603504"/>
           </a:xfrm>
-          <a:prstGeom prst="roundRect">
-            <a:avLst>
-              <a:gd name="adj" fmla="val 12121"/>
-            </a:avLst>
+          <a:prstGeom prst="rect">
+            <a:avLst/>
           </a:prstGeom>
           <a:solidFill>
-            <a:srgbClr val="F4F6FB"/>
+            <a:srgbClr val="F4F5F7"/>
           </a:solidFill>
           <a:ln w="12700">
             <a:solidFill>
-              <a:srgbClr val="E2E7F2"/>
+              <a:srgbClr val="D7DCE3"/>
             </a:solidFill>
             <a:prstDash val="solid"/>
           </a:ln>
-          <a:effectLst>
-            <a:outerShdw sx="100000" sy="100000" kx="0" ky="0" algn="bl" rotWithShape="0" blurRad="88900" dist="25400" dir="5400000">
-              <a:srgbClr val="000000">
-                <a:alpha val="12000"/>
-              </a:srgbClr>
-            </a:outerShdw>
-          </a:effectLst>
         </p:spPr>
       </p:sp>
       <p:sp>
@@ -16522,13 +16054,13 @@
             <a:r>
               <a:rPr lang="en-US" sz="1000" b="1" dirty="0">
                 <a:solidFill>
-                  <a:srgbClr val="21294D"/>
+                  <a:srgbClr val="26303B"/>
                 </a:solidFill>
                 <a:latin typeface="Calibri" pitchFamily="34" charset="0"/>
                 <a:ea typeface="Calibri" pitchFamily="34" charset="-122"/>
                 <a:cs typeface="Calibri" pitchFamily="34" charset="-120"/>
               </a:rPr>
-              <a:t>2. Planet Earth</a:t>
+              <a:t>2. Persuasion</a:t>
             </a:r>
             <a:endParaRPr lang="en-US" sz="1000" dirty="0"/>
           </a:p>
@@ -16561,13 +16093,13 @@
             <a:r>
               <a:rPr lang="en-US" sz="800" dirty="0">
                 <a:solidFill>
-                  <a:srgbClr val="5B6586"/>
+                  <a:srgbClr val="6B7480"/>
                 </a:solidFill>
                 <a:latin typeface="Calibri" pitchFamily="34" charset="0"/>
                 <a:ea typeface="Calibri" pitchFamily="34" charset="-122"/>
                 <a:cs typeface="Calibri" pitchFamily="34" charset="-120"/>
               </a:rPr>
-              <a:t>Drama · Comedy</a:t>
+              <a:t>Drama · Romance</a:t>
             </a:r>
             <a:endParaRPr lang="en-US" sz="800" dirty="0"/>
           </a:p>
@@ -16584,27 +16116,18 @@
             <a:off x="6117336" y="3776472"/>
             <a:ext cx="1691640" cy="603504"/>
           </a:xfrm>
-          <a:prstGeom prst="roundRect">
-            <a:avLst>
-              <a:gd name="adj" fmla="val 12121"/>
-            </a:avLst>
+          <a:prstGeom prst="rect">
+            <a:avLst/>
           </a:prstGeom>
           <a:solidFill>
-            <a:srgbClr val="F4F6FB"/>
+            <a:srgbClr val="F4F5F7"/>
           </a:solidFill>
           <a:ln w="12700">
             <a:solidFill>
-              <a:srgbClr val="E2E7F2"/>
+              <a:srgbClr val="D7DCE3"/>
             </a:solidFill>
             <a:prstDash val="solid"/>
           </a:ln>
-          <a:effectLst>
-            <a:outerShdw sx="100000" sy="100000" kx="0" ky="0" algn="bl" rotWithShape="0" blurRad="88900" dist="25400" dir="5400000">
-              <a:srgbClr val="000000">
-                <a:alpha val="12000"/>
-              </a:srgbClr>
-            </a:outerShdw>
-          </a:effectLst>
         </p:spPr>
       </p:sp>
       <p:sp>
@@ -16634,13 +16157,13 @@
             <a:r>
               <a:rPr lang="en-US" sz="1000" b="1" dirty="0">
                 <a:solidFill>
-                  <a:srgbClr val="21294D"/>
+                  <a:srgbClr val="26303B"/>
                 </a:solidFill>
                 <a:latin typeface="Calibri" pitchFamily="34" charset="0"/>
                 <a:ea typeface="Calibri" pitchFamily="34" charset="-122"/>
                 <a:cs typeface="Calibri" pitchFamily="34" charset="-120"/>
               </a:rPr>
-              <a:t>3. Persuasion</a:t>
+              <a:t>3. Nausicaä</a:t>
             </a:r>
             <a:endParaRPr lang="en-US" sz="1000" dirty="0"/>
           </a:p>
@@ -16673,13 +16196,13 @@
             <a:r>
               <a:rPr lang="en-US" sz="800" dirty="0">
                 <a:solidFill>
-                  <a:srgbClr val="5B6586"/>
+                  <a:srgbClr val="6B7480"/>
                 </a:solidFill>
                 <a:latin typeface="Calibri" pitchFamily="34" charset="0"/>
                 <a:ea typeface="Calibri" pitchFamily="34" charset="-122"/>
                 <a:cs typeface="Calibri" pitchFamily="34" charset="-120"/>
               </a:rPr>
-              <a:t>Drama · Comedy</a:t>
+              <a:t>Animation · Fantasy</a:t>
             </a:r>
             <a:endParaRPr lang="en-US" sz="800" dirty="0"/>
           </a:p>
@@ -16696,27 +16219,18 @@
             <a:off x="6117336" y="4489704"/>
             <a:ext cx="1691640" cy="603504"/>
           </a:xfrm>
-          <a:prstGeom prst="roundRect">
-            <a:avLst>
-              <a:gd name="adj" fmla="val 12121"/>
-            </a:avLst>
+          <a:prstGeom prst="rect">
+            <a:avLst/>
           </a:prstGeom>
           <a:solidFill>
-            <a:srgbClr val="F4F6FB"/>
+            <a:srgbClr val="F4F5F7"/>
           </a:solidFill>
           <a:ln w="12700">
             <a:solidFill>
-              <a:srgbClr val="E2E7F2"/>
+              <a:srgbClr val="D7DCE3"/>
             </a:solidFill>
             <a:prstDash val="solid"/>
           </a:ln>
-          <a:effectLst>
-            <a:outerShdw sx="100000" sy="100000" kx="0" ky="0" algn="bl" rotWithShape="0" blurRad="88900" dist="25400" dir="5400000">
-              <a:srgbClr val="000000">
-                <a:alpha val="12000"/>
-              </a:srgbClr>
-            </a:outerShdw>
-          </a:effectLst>
         </p:spPr>
       </p:sp>
       <p:sp>
@@ -16746,13 +16260,13 @@
             <a:r>
               <a:rPr lang="en-US" sz="1000" b="1" dirty="0">
                 <a:solidFill>
-                  <a:srgbClr val="21294D"/>
+                  <a:srgbClr val="26303B"/>
                 </a:solidFill>
                 <a:latin typeface="Calibri" pitchFamily="34" charset="0"/>
                 <a:ea typeface="Calibri" pitchFamily="34" charset="-122"/>
                 <a:cs typeface="Calibri" pitchFamily="34" charset="-120"/>
               </a:rPr>
-              <a:t>4. Nausicaä</a:t>
+              <a:t>4. Memento</a:t>
             </a:r>
             <a:endParaRPr lang="en-US" sz="1000" dirty="0"/>
           </a:p>
@@ -16785,13 +16299,13 @@
             <a:r>
               <a:rPr lang="en-US" sz="800" dirty="0">
                 <a:solidFill>
-                  <a:srgbClr val="5B6586"/>
+                  <a:srgbClr val="6B7480"/>
                 </a:solidFill>
                 <a:latin typeface="Calibri" pitchFamily="34" charset="0"/>
                 <a:ea typeface="Calibri" pitchFamily="34" charset="-122"/>
                 <a:cs typeface="Calibri" pitchFamily="34" charset="-120"/>
               </a:rPr>
-              <a:t>Drama · Comedy</a:t>
+              <a:t>Mystery · Thriller</a:t>
             </a:r>
             <a:endParaRPr lang="en-US" sz="800" dirty="0"/>
           </a:p>
@@ -16808,27 +16322,18 @@
             <a:off x="8183880" y="1508760"/>
             <a:ext cx="3520440" cy="3977640"/>
           </a:xfrm>
-          <a:prstGeom prst="roundRect">
-            <a:avLst>
-              <a:gd name="adj" fmla="val 2078"/>
-            </a:avLst>
+          <a:prstGeom prst="rect">
+            <a:avLst/>
           </a:prstGeom>
           <a:solidFill>
-            <a:srgbClr val="F4F6FB"/>
+            <a:srgbClr val="F4F5F7"/>
           </a:solidFill>
           <a:ln w="12700">
             <a:solidFill>
-              <a:srgbClr val="E2E7F2"/>
+              <a:srgbClr val="D7DCE3"/>
             </a:solidFill>
             <a:prstDash val="solid"/>
           </a:ln>
-          <a:effectLst>
-            <a:outerShdw sx="100000" sy="100000" kx="0" ky="0" algn="bl" rotWithShape="0" blurRad="88900" dist="25400" dir="5400000">
-              <a:srgbClr val="000000">
-                <a:alpha val="12000"/>
-              </a:srgbClr>
-            </a:outerShdw>
-          </a:effectLst>
         </p:spPr>
       </p:sp>
       <p:sp>
@@ -16858,7 +16363,7 @@
             <a:r>
               <a:rPr lang="en-US" sz="1600" b="1" dirty="0">
                 <a:solidFill>
-                  <a:srgbClr val="1E2761"/>
+                  <a:srgbClr val="1C2A3A"/>
                 </a:solidFill>
                 <a:latin typeface="Cambria" pitchFamily="34" charset="0"/>
                 <a:ea typeface="Cambria" pitchFamily="34" charset="-122"/>
@@ -16885,7 +16390,7 @@
             <a:avLst/>
           </a:prstGeom>
           <a:solidFill>
-            <a:srgbClr val="F96167"/>
+            <a:srgbClr val="33617E"/>
           </a:solidFill>
           <a:ln/>
         </p:spPr>
@@ -16917,7 +16422,7 @@
             <a:r>
               <a:rPr lang="en-US" sz="1250" b="1" dirty="0">
                 <a:solidFill>
-                  <a:srgbClr val="1E2761"/>
+                  <a:srgbClr val="1C2A3A"/>
                 </a:solidFill>
                 <a:latin typeface="Cambria" pitchFamily="34" charset="0"/>
                 <a:ea typeface="Cambria" pitchFamily="34" charset="-122"/>
@@ -16956,7 +16461,7 @@
             <a:r>
               <a:rPr lang="en-US" sz="1000" dirty="0">
                 <a:solidFill>
-                  <a:srgbClr val="21294D"/>
+                  <a:srgbClr val="26303B"/>
                 </a:solidFill>
                 <a:latin typeface="Calibri" pitchFamily="34" charset="0"/>
                 <a:ea typeface="Calibri" pitchFamily="34" charset="-122"/>
@@ -16983,7 +16488,7 @@
             <a:avLst/>
           </a:prstGeom>
           <a:solidFill>
-            <a:srgbClr val="F96167"/>
+            <a:srgbClr val="33617E"/>
           </a:solidFill>
           <a:ln/>
         </p:spPr>
@@ -17015,7 +16520,7 @@
             <a:r>
               <a:rPr lang="en-US" sz="1250" b="1" dirty="0">
                 <a:solidFill>
-                  <a:srgbClr val="1E2761"/>
+                  <a:srgbClr val="1C2A3A"/>
                 </a:solidFill>
                 <a:latin typeface="Cambria" pitchFamily="34" charset="0"/>
                 <a:ea typeface="Cambria" pitchFamily="34" charset="-122"/>
@@ -17054,7 +16559,7 @@
             <a:r>
               <a:rPr lang="en-US" sz="1000" dirty="0">
                 <a:solidFill>
-                  <a:srgbClr val="21294D"/>
+                  <a:srgbClr val="26303B"/>
                 </a:solidFill>
                 <a:latin typeface="Calibri" pitchFamily="34" charset="0"/>
                 <a:ea typeface="Calibri" pitchFamily="34" charset="-122"/>
@@ -17081,7 +16586,7 @@
             <a:avLst/>
           </a:prstGeom>
           <a:solidFill>
-            <a:srgbClr val="F96167"/>
+            <a:srgbClr val="33617E"/>
           </a:solidFill>
           <a:ln/>
         </p:spPr>
@@ -17113,7 +16618,7 @@
             <a:r>
               <a:rPr lang="en-US" sz="1250" b="1" dirty="0">
                 <a:solidFill>
-                  <a:srgbClr val="1E2761"/>
+                  <a:srgbClr val="1C2A3A"/>
                 </a:solidFill>
                 <a:latin typeface="Cambria" pitchFamily="34" charset="0"/>
                 <a:ea typeface="Cambria" pitchFamily="34" charset="-122"/>
@@ -17152,7 +16657,7 @@
             <a:r>
               <a:rPr lang="en-US" sz="1000" dirty="0">
                 <a:solidFill>
-                  <a:srgbClr val="21294D"/>
+                  <a:srgbClr val="26303B"/>
                 </a:solidFill>
                 <a:latin typeface="Calibri" pitchFamily="34" charset="0"/>
                 <a:ea typeface="Calibri" pitchFamily="34" charset="-122"/>
@@ -17179,7 +16684,7 @@
             <a:avLst/>
           </a:prstGeom>
           <a:solidFill>
-            <a:srgbClr val="F96167"/>
+            <a:srgbClr val="33617E"/>
           </a:solidFill>
           <a:ln/>
         </p:spPr>
@@ -17211,7 +16716,7 @@
             <a:r>
               <a:rPr lang="en-US" sz="1250" b="1" dirty="0">
                 <a:solidFill>
-                  <a:srgbClr val="1E2761"/>
+                  <a:srgbClr val="1C2A3A"/>
                 </a:solidFill>
                 <a:latin typeface="Cambria" pitchFamily="34" charset="0"/>
                 <a:ea typeface="Cambria" pitchFamily="34" charset="-122"/>
@@ -17250,7 +16755,7 @@
             <a:r>
               <a:rPr lang="en-US" sz="1000" dirty="0">
                 <a:solidFill>
-                  <a:srgbClr val="21294D"/>
+                  <a:srgbClr val="26303B"/>
                 </a:solidFill>
                 <a:latin typeface="Calibri" pitchFamily="34" charset="0"/>
                 <a:ea typeface="Calibri" pitchFamily="34" charset="-122"/>
@@ -17271,7 +16776,7 @@
         <p:spPr>
           <a:xfrm>
             <a:off x="457200" y="6473952"/>
-            <a:ext cx="7315200" cy="274320"/>
+            <a:ext cx="8229600" cy="274320"/>
           </a:xfrm>
           <a:prstGeom prst="rect">
             <a:avLst/>
@@ -17289,13 +16794,13 @@
             <a:r>
               <a:rPr lang="en-US" sz="900" dirty="0">
                 <a:solidFill>
-                  <a:srgbClr val="5B6586"/>
+                  <a:srgbClr val="6B7480"/>
                 </a:solidFill>
                 <a:latin typeface="Calibri" pitchFamily="34" charset="0"/>
                 <a:ea typeface="Calibri" pitchFamily="34" charset="-122"/>
                 <a:cs typeface="Calibri" pitchFamily="34" charset="-120"/>
               </a:rPr>
-              <a:t>Recommender Systems · Individual Project</a:t>
+              <a:t>Recommender Systems — Individual Project</a:t>
             </a:r>
             <a:endParaRPr lang="en-US" sz="900" dirty="0"/>
           </a:p>
@@ -17328,7 +16833,7 @@
             <a:r>
               <a:rPr lang="en-US" sz="900" dirty="0">
                 <a:solidFill>
-                  <a:srgbClr val="5B6586"/>
+                  <a:srgbClr val="6B7480"/>
                 </a:solidFill>
                 <a:latin typeface="Calibri" pitchFamily="34" charset="0"/>
                 <a:ea typeface="Calibri" pitchFamily="34" charset="-122"/>
